--- a/概要書.pptx
+++ b/概要書.pptx
@@ -9,7 +9,7 @@
     <p:sldId id="331" r:id="rId6"/>
     <p:sldId id="319" r:id="rId7"/>
     <p:sldId id="320" r:id="rId8"/>
-    <p:sldId id="341" r:id="rId9"/>
+    <p:sldId id="343" r:id="rId9"/>
     <p:sldId id="342" r:id="rId10"/>
     <p:sldId id="340" r:id="rId11"/>
     <p:sldId id="339" r:id="rId12"/>
@@ -5229,6 +5229,781 @@
       </p:grpSpPr>
       <p:sp>
         <p:nvSpPr>
+          <p:cNvPr id="2" name="テキスト ボックス 1">
+            <a:extLst>
+              <a:ext uri="{FF2B5EF4-FFF2-40B4-BE49-F238E27FC236}">
+                <a16:creationId xmlns:a16="http://schemas.microsoft.com/office/drawing/2014/main" id="{2E93FB6D-AD3E-0DBB-DF24-2085D59CE313}"/>
+              </a:ext>
+            </a:extLst>
+          </p:cNvPr>
+          <p:cNvSpPr txBox="1"/>
+          <p:nvPr/>
+        </p:nvSpPr>
+        <p:spPr>
+          <a:xfrm>
+            <a:off x="435429" y="269966"/>
+            <a:ext cx="3840480" cy="369332"/>
+          </a:xfrm>
+          <a:prstGeom prst="rect">
+            <a:avLst/>
+          </a:prstGeom>
+          <a:noFill/>
+        </p:spPr>
+        <p:txBody>
+          <a:bodyPr wrap="square" rtlCol="0">
+            <a:spAutoFit/>
+          </a:bodyPr>
+          <a:lstStyle/>
+          <a:p>
+            <a:r>
+              <a:rPr kumimoji="1" lang="ja-JP" altLang="en-US" dirty="0"/>
+              <a:t>ゲーム概要</a:t>
+            </a:r>
+          </a:p>
+        </p:txBody>
+      </p:sp>
+      <p:sp>
+        <p:nvSpPr>
+          <p:cNvPr id="3" name="テキスト ボックス 2">
+            <a:extLst>
+              <a:ext uri="{FF2B5EF4-FFF2-40B4-BE49-F238E27FC236}">
+                <a16:creationId xmlns:a16="http://schemas.microsoft.com/office/drawing/2014/main" id="{E36F84EE-8FD3-C154-D35E-C46FC4E9C924}"/>
+              </a:ext>
+            </a:extLst>
+          </p:cNvPr>
+          <p:cNvSpPr txBox="1"/>
+          <p:nvPr/>
+        </p:nvSpPr>
+        <p:spPr>
+          <a:xfrm>
+            <a:off x="513806" y="792480"/>
+            <a:ext cx="5695405" cy="3693319"/>
+          </a:xfrm>
+          <a:prstGeom prst="rect">
+            <a:avLst/>
+          </a:prstGeom>
+          <a:noFill/>
+        </p:spPr>
+        <p:txBody>
+          <a:bodyPr wrap="square" rtlCol="0">
+            <a:spAutoFit/>
+          </a:bodyPr>
+          <a:lstStyle/>
+          <a:p>
+            <a:r>
+              <a:rPr kumimoji="1" lang="ja-JP" altLang="en-US" dirty="0"/>
+              <a:t>敵とプレイヤーの１対１</a:t>
+            </a:r>
+            <a:endParaRPr kumimoji="1" lang="en-US" altLang="ja-JP" dirty="0"/>
+          </a:p>
+          <a:p>
+            <a:r>
+              <a:rPr lang="ja-JP" altLang="en-US" dirty="0"/>
+              <a:t>どちらかの</a:t>
+            </a:r>
+            <a:r>
+              <a:rPr lang="en-US" altLang="ja-JP" dirty="0"/>
+              <a:t>Hp</a:t>
+            </a:r>
+            <a:r>
+              <a:rPr lang="ja-JP" altLang="en-US" dirty="0"/>
+              <a:t>がなくなったら決着</a:t>
+            </a:r>
+            <a:endParaRPr lang="en-US" altLang="ja-JP" dirty="0"/>
+          </a:p>
+          <a:p>
+            <a:endParaRPr lang="en-US" altLang="ja-JP" dirty="0"/>
+          </a:p>
+          <a:p>
+            <a:r>
+              <a:rPr lang="ja-JP" altLang="en-US" dirty="0"/>
+              <a:t>プレイヤーの行動　</a:t>
+            </a:r>
+            <a:endParaRPr lang="en-US" altLang="ja-JP" dirty="0"/>
+          </a:p>
+          <a:p>
+            <a:pPr marL="285750" indent="-285750">
+              <a:buFont typeface="Arial" panose="020B0604020202020204" pitchFamily="34" charset="0"/>
+              <a:buChar char="•"/>
+            </a:pPr>
+            <a:r>
+              <a:rPr lang="ja-JP" altLang="en-US" dirty="0"/>
+              <a:t>通常攻撃</a:t>
+            </a:r>
+            <a:endParaRPr lang="en-US" altLang="ja-JP" dirty="0"/>
+          </a:p>
+          <a:p>
+            <a:pPr marL="285750" indent="-285750">
+              <a:buFont typeface="Arial" panose="020B0604020202020204" pitchFamily="34" charset="0"/>
+              <a:buChar char="•"/>
+            </a:pPr>
+            <a:r>
+              <a:rPr lang="ja-JP" altLang="en-US" dirty="0"/>
+              <a:t>必殺技</a:t>
+            </a:r>
+            <a:endParaRPr lang="en-US" altLang="ja-JP" dirty="0"/>
+          </a:p>
+          <a:p>
+            <a:pPr marL="285750" indent="-285750">
+              <a:buFont typeface="Arial" panose="020B0604020202020204" pitchFamily="34" charset="0"/>
+              <a:buChar char="•"/>
+            </a:pPr>
+            <a:r>
+              <a:rPr lang="ja-JP" altLang="en-US" dirty="0"/>
+              <a:t>回避（追加予定）</a:t>
+            </a:r>
+            <a:endParaRPr lang="en-US" altLang="ja-JP" dirty="0"/>
+          </a:p>
+          <a:p>
+            <a:endParaRPr lang="en-US" altLang="ja-JP" dirty="0"/>
+          </a:p>
+          <a:p>
+            <a:r>
+              <a:rPr lang="ja-JP" altLang="en-US" dirty="0"/>
+              <a:t>敵の行動</a:t>
+            </a:r>
+            <a:endParaRPr lang="en-US" altLang="ja-JP" dirty="0"/>
+          </a:p>
+          <a:p>
+            <a:pPr marL="285750" indent="-285750">
+              <a:buFont typeface="Arial" panose="020B0604020202020204" pitchFamily="34" charset="0"/>
+              <a:buChar char="•"/>
+            </a:pPr>
+            <a:r>
+              <a:rPr lang="ja-JP" altLang="en-US" dirty="0"/>
+              <a:t>突進</a:t>
+            </a:r>
+            <a:endParaRPr lang="en-US" altLang="ja-JP" dirty="0"/>
+          </a:p>
+          <a:p>
+            <a:pPr marL="285750" indent="-285750">
+              <a:buFont typeface="Arial" panose="020B0604020202020204" pitchFamily="34" charset="0"/>
+              <a:buChar char="•"/>
+            </a:pPr>
+            <a:r>
+              <a:rPr lang="ja-JP" altLang="en-US" dirty="0"/>
+              <a:t>振り下ろし</a:t>
+            </a:r>
+            <a:endParaRPr lang="en-US" altLang="ja-JP" dirty="0"/>
+          </a:p>
+          <a:p>
+            <a:endParaRPr lang="en-US" altLang="ja-JP" dirty="0"/>
+          </a:p>
+          <a:p>
+            <a:endParaRPr kumimoji="1" lang="ja-JP" altLang="en-US" dirty="0"/>
+          </a:p>
+        </p:txBody>
+      </p:sp>
+    </p:spTree>
+    <p:extLst>
+      <p:ext uri="{BB962C8B-B14F-4D97-AF65-F5344CB8AC3E}">
+        <p14:creationId xmlns:p14="http://schemas.microsoft.com/office/powerpoint/2010/main" val="3966911292"/>
+      </p:ext>
+    </p:extLst>
+  </p:cSld>
+  <p:clrMapOvr>
+    <a:masterClrMapping/>
+  </p:clrMapOvr>
+  <p:transition spd="slow" advClick="0">
+    <p:fade thruBlk="1"/>
+  </p:transition>
+</p:sld>
+</file>
+
+<file path=ppt/slides/slide6.xml><?xml version="1.0" encoding="utf-8"?>
+<p:sld xmlns:a="http://schemas.openxmlformats.org/drawingml/2006/main" xmlns:r="http://schemas.openxmlformats.org/officeDocument/2006/relationships" xmlns:p="http://schemas.openxmlformats.org/presentationml/2006/main">
+  <p:cSld>
+    <p:spTree>
+      <p:nvGrpSpPr>
+        <p:cNvPr id="1" name=""/>
+        <p:cNvGrpSpPr/>
+        <p:nvPr/>
+      </p:nvGrpSpPr>
+      <p:grpSpPr>
+        <a:xfrm>
+          <a:off x="0" y="0"/>
+          <a:ext cx="0" cy="0"/>
+          <a:chOff x="0" y="0"/>
+          <a:chExt cx="0" cy="0"/>
+        </a:xfrm>
+      </p:grpSpPr>
+      <p:sp>
+        <p:nvSpPr>
+          <p:cNvPr id="2" name="テキスト ボックス 1">
+            <a:extLst>
+              <a:ext uri="{FF2B5EF4-FFF2-40B4-BE49-F238E27FC236}">
+                <a16:creationId xmlns:a16="http://schemas.microsoft.com/office/drawing/2014/main" id="{4CE7A60F-DFD4-7C8A-01B0-5803F76E3427}"/>
+              </a:ext>
+            </a:extLst>
+          </p:cNvPr>
+          <p:cNvSpPr txBox="1"/>
+          <p:nvPr/>
+        </p:nvSpPr>
+        <p:spPr>
+          <a:xfrm>
+            <a:off x="218628" y="306150"/>
+            <a:ext cx="2425959" cy="369332"/>
+          </a:xfrm>
+          <a:prstGeom prst="rect">
+            <a:avLst/>
+          </a:prstGeom>
+          <a:noFill/>
+        </p:spPr>
+        <p:txBody>
+          <a:bodyPr wrap="square" rtlCol="0">
+            <a:spAutoFit/>
+          </a:bodyPr>
+          <a:lstStyle/>
+          <a:p>
+            <a:r>
+              <a:rPr kumimoji="1" lang="ja-JP" altLang="en-US" dirty="0"/>
+              <a:t>必殺技　概要</a:t>
+            </a:r>
+          </a:p>
+        </p:txBody>
+      </p:sp>
+      <p:sp>
+        <p:nvSpPr>
+          <p:cNvPr id="3" name="テキスト ボックス 2">
+            <a:extLst>
+              <a:ext uri="{FF2B5EF4-FFF2-40B4-BE49-F238E27FC236}">
+                <a16:creationId xmlns:a16="http://schemas.microsoft.com/office/drawing/2014/main" id="{2B5BD5E2-D383-D8B9-8FA2-8C477CEED092}"/>
+              </a:ext>
+            </a:extLst>
+          </p:cNvPr>
+          <p:cNvSpPr txBox="1"/>
+          <p:nvPr/>
+        </p:nvSpPr>
+        <p:spPr>
+          <a:xfrm>
+            <a:off x="242595" y="793102"/>
+            <a:ext cx="7847045" cy="369332"/>
+          </a:xfrm>
+          <a:prstGeom prst="rect">
+            <a:avLst/>
+          </a:prstGeom>
+          <a:noFill/>
+        </p:spPr>
+        <p:txBody>
+          <a:bodyPr wrap="square" rtlCol="0">
+            <a:spAutoFit/>
+          </a:bodyPr>
+          <a:lstStyle/>
+          <a:p>
+            <a:r>
+              <a:rPr lang="ja-JP" altLang="en-US" dirty="0"/>
+              <a:t>発生後　無敵の強い攻撃　自動</a:t>
+            </a:r>
+            <a:r>
+              <a:rPr lang="en-US" altLang="ja-JP" dirty="0"/>
+              <a:t>HIT</a:t>
+            </a:r>
+            <a:r>
+              <a:rPr lang="ja-JP" altLang="en-US" dirty="0"/>
+              <a:t>　必中</a:t>
+            </a:r>
+            <a:endParaRPr kumimoji="1" lang="en-US" altLang="ja-JP" dirty="0"/>
+          </a:p>
+        </p:txBody>
+      </p:sp>
+      <p:sp>
+        <p:nvSpPr>
+          <p:cNvPr id="5" name="テキスト ボックス 4">
+            <a:extLst>
+              <a:ext uri="{FF2B5EF4-FFF2-40B4-BE49-F238E27FC236}">
+                <a16:creationId xmlns:a16="http://schemas.microsoft.com/office/drawing/2014/main" id="{879BFEC1-67A9-0A0A-8480-F98BE5EBF864}"/>
+              </a:ext>
+            </a:extLst>
+          </p:cNvPr>
+          <p:cNvSpPr txBox="1"/>
+          <p:nvPr/>
+        </p:nvSpPr>
+        <p:spPr>
+          <a:xfrm>
+            <a:off x="242594" y="1397675"/>
+            <a:ext cx="11786760" cy="2031325"/>
+          </a:xfrm>
+          <a:prstGeom prst="rect">
+            <a:avLst/>
+          </a:prstGeom>
+          <a:noFill/>
+        </p:spPr>
+        <p:txBody>
+          <a:bodyPr wrap="square" rtlCol="0">
+            <a:spAutoFit/>
+          </a:bodyPr>
+          <a:lstStyle/>
+          <a:p>
+            <a:r>
+              <a:rPr kumimoji="1" lang="ja-JP" altLang="en-US" dirty="0"/>
+              <a:t>挙動</a:t>
+            </a:r>
+            <a:endParaRPr kumimoji="1" lang="en-US" altLang="ja-JP" dirty="0"/>
+          </a:p>
+          <a:p>
+            <a:endParaRPr lang="en-US" altLang="ja-JP" dirty="0"/>
+          </a:p>
+          <a:p>
+            <a:pPr marL="285750" indent="-285750">
+              <a:buFont typeface="Arial" panose="020B0604020202020204" pitchFamily="34" charset="0"/>
+              <a:buChar char="•"/>
+            </a:pPr>
+            <a:r>
+              <a:rPr kumimoji="1" lang="ja-JP" altLang="en-US" dirty="0"/>
+              <a:t>ジャンプの準備挙動　　　　　　この時間は攻撃が通り当たると必殺キャンセル　会うアニメションを探し中</a:t>
+            </a:r>
+            <a:endParaRPr kumimoji="1" lang="en-US" altLang="ja-JP" dirty="0"/>
+          </a:p>
+          <a:p>
+            <a:pPr marL="285750" indent="-285750">
+              <a:buFont typeface="Arial" panose="020B0604020202020204" pitchFamily="34" charset="0"/>
+              <a:buChar char="•"/>
+            </a:pPr>
+            <a:r>
+              <a:rPr lang="ja-JP" altLang="en-US" dirty="0"/>
+              <a:t>飛び上がり　　　　　　　　　　　　　　ここから敵の行動を停止</a:t>
+            </a:r>
+            <a:endParaRPr lang="en-US" altLang="ja-JP" dirty="0"/>
+          </a:p>
+          <a:p>
+            <a:pPr marL="285750" indent="-285750">
+              <a:buFont typeface="Arial" panose="020B0604020202020204" pitchFamily="34" charset="0"/>
+              <a:buChar char="•"/>
+            </a:pPr>
+            <a:r>
+              <a:rPr kumimoji="1" lang="ja-JP" altLang="en-US" dirty="0"/>
+              <a:t>空中で敵視点ぐらいからよる　　　　　　この時点で敵の上に移動</a:t>
+            </a:r>
+            <a:endParaRPr kumimoji="1" lang="en-US" altLang="ja-JP" dirty="0"/>
+          </a:p>
+          <a:p>
+            <a:pPr marL="285750" indent="-285750">
+              <a:buFont typeface="Arial" panose="020B0604020202020204" pitchFamily="34" charset="0"/>
+              <a:buChar char="•"/>
+            </a:pPr>
+            <a:r>
+              <a:rPr lang="ja-JP" altLang="en-US" dirty="0"/>
+              <a:t>敵めがけて動く　　　　攻撃とダメージが入る　ヒット時　点滅と拡大縮小　ダメージ　仮１００　通常４０</a:t>
+            </a:r>
+            <a:endParaRPr lang="en-US" altLang="ja-JP" dirty="0"/>
+          </a:p>
+          <a:p>
+            <a:pPr marL="285750" indent="-285750">
+              <a:buFont typeface="Arial" panose="020B0604020202020204" pitchFamily="34" charset="0"/>
+              <a:buChar char="•"/>
+            </a:pPr>
+            <a:r>
+              <a:rPr lang="ja-JP" altLang="en-US" dirty="0"/>
+              <a:t>定位置に戻り終わり　　敵は吹っ飛ぶ</a:t>
+            </a:r>
+            <a:endParaRPr lang="en-US" altLang="ja-JP" dirty="0"/>
+          </a:p>
+        </p:txBody>
+      </p:sp>
+      <p:sp>
+        <p:nvSpPr>
+          <p:cNvPr id="6" name="テキスト ボックス 5">
+            <a:extLst>
+              <a:ext uri="{FF2B5EF4-FFF2-40B4-BE49-F238E27FC236}">
+                <a16:creationId xmlns:a16="http://schemas.microsoft.com/office/drawing/2014/main" id="{8455609B-B179-8CCF-F7A0-30CA3EBEC491}"/>
+              </a:ext>
+            </a:extLst>
+          </p:cNvPr>
+          <p:cNvSpPr txBox="1"/>
+          <p:nvPr/>
+        </p:nvSpPr>
+        <p:spPr>
+          <a:xfrm>
+            <a:off x="162646" y="3479575"/>
+            <a:ext cx="6407454" cy="369332"/>
+          </a:xfrm>
+          <a:prstGeom prst="rect">
+            <a:avLst/>
+          </a:prstGeom>
+          <a:noFill/>
+        </p:spPr>
+        <p:txBody>
+          <a:bodyPr wrap="square" rtlCol="0">
+            <a:spAutoFit/>
+          </a:bodyPr>
+          <a:lstStyle/>
+          <a:p>
+            <a:r>
+              <a:rPr kumimoji="1" lang="ja-JP" altLang="en-US" dirty="0"/>
+              <a:t>所要時間　</a:t>
+            </a:r>
+            <a:r>
+              <a:rPr lang="ja-JP" altLang="en-US" dirty="0"/>
+              <a:t>４</a:t>
+            </a:r>
+            <a:r>
+              <a:rPr kumimoji="1" lang="ja-JP" altLang="en-US" dirty="0"/>
+              <a:t>秒程度　各　１</a:t>
+            </a:r>
+            <a:r>
+              <a:rPr kumimoji="1" lang="en-US" altLang="ja-JP" dirty="0"/>
+              <a:t>.</a:t>
+            </a:r>
+            <a:r>
+              <a:rPr kumimoji="1" lang="ja-JP" altLang="en-US" dirty="0"/>
+              <a:t>５</a:t>
+            </a:r>
+            <a:r>
+              <a:rPr kumimoji="1" lang="en-US" altLang="ja-JP" dirty="0"/>
+              <a:t>,</a:t>
+            </a:r>
+            <a:r>
+              <a:rPr kumimoji="1" lang="ja-JP" altLang="en-US" dirty="0"/>
+              <a:t>０</a:t>
+            </a:r>
+            <a:r>
+              <a:rPr kumimoji="1" lang="en-US" altLang="ja-JP" dirty="0"/>
+              <a:t>.</a:t>
+            </a:r>
+            <a:r>
+              <a:rPr kumimoji="1" lang="ja-JP" altLang="en-US" dirty="0"/>
+              <a:t>５</a:t>
+            </a:r>
+            <a:r>
+              <a:rPr kumimoji="1" lang="en-US" altLang="ja-JP" dirty="0"/>
+              <a:t>,1,</a:t>
+            </a:r>
+            <a:r>
+              <a:rPr kumimoji="1" lang="ja-JP" altLang="en-US" dirty="0"/>
+              <a:t>１</a:t>
+            </a:r>
+          </a:p>
+        </p:txBody>
+      </p:sp>
+      <p:sp>
+        <p:nvSpPr>
+          <p:cNvPr id="7" name="テキスト ボックス 6">
+            <a:extLst>
+              <a:ext uri="{FF2B5EF4-FFF2-40B4-BE49-F238E27FC236}">
+                <a16:creationId xmlns:a16="http://schemas.microsoft.com/office/drawing/2014/main" id="{9CEDE7C0-A716-9185-9B51-3631FCE11AEC}"/>
+              </a:ext>
+            </a:extLst>
+          </p:cNvPr>
+          <p:cNvSpPr txBox="1"/>
+          <p:nvPr/>
+        </p:nvSpPr>
+        <p:spPr>
+          <a:xfrm>
+            <a:off x="307910" y="4040155"/>
+            <a:ext cx="4086808" cy="646331"/>
+          </a:xfrm>
+          <a:prstGeom prst="rect">
+            <a:avLst/>
+          </a:prstGeom>
+          <a:noFill/>
+        </p:spPr>
+        <p:txBody>
+          <a:bodyPr wrap="square" rtlCol="0">
+            <a:spAutoFit/>
+          </a:bodyPr>
+          <a:lstStyle/>
+          <a:p>
+            <a:r>
+              <a:rPr kumimoji="1" lang="ja-JP" altLang="en-US" dirty="0"/>
+              <a:t>イメージ</a:t>
+            </a:r>
+            <a:endParaRPr kumimoji="1" lang="en-US" altLang="ja-JP" dirty="0"/>
+          </a:p>
+          <a:p>
+            <a:r>
+              <a:rPr lang="ja-JP" altLang="en-US" dirty="0"/>
+              <a:t>仮面ライダーのライダーキック</a:t>
+            </a:r>
+            <a:endParaRPr kumimoji="1" lang="ja-JP" altLang="en-US" dirty="0"/>
+          </a:p>
+        </p:txBody>
+      </p:sp>
+      <p:sp>
+        <p:nvSpPr>
+          <p:cNvPr id="8" name="テキスト ボックス 7">
+            <a:extLst>
+              <a:ext uri="{FF2B5EF4-FFF2-40B4-BE49-F238E27FC236}">
+                <a16:creationId xmlns:a16="http://schemas.microsoft.com/office/drawing/2014/main" id="{041B8081-C347-CE61-3CD0-C71E5AC104FD}"/>
+              </a:ext>
+            </a:extLst>
+          </p:cNvPr>
+          <p:cNvSpPr txBox="1"/>
+          <p:nvPr/>
+        </p:nvSpPr>
+        <p:spPr>
+          <a:xfrm>
+            <a:off x="300592" y="4877734"/>
+            <a:ext cx="6131561" cy="923330"/>
+          </a:xfrm>
+          <a:prstGeom prst="rect">
+            <a:avLst/>
+          </a:prstGeom>
+          <a:noFill/>
+        </p:spPr>
+        <p:txBody>
+          <a:bodyPr wrap="square" rtlCol="0">
+            <a:spAutoFit/>
+          </a:bodyPr>
+          <a:lstStyle/>
+          <a:p>
+            <a:r>
+              <a:rPr kumimoji="1" lang="ja-JP" altLang="en-US" dirty="0"/>
+              <a:t>発動条件</a:t>
+            </a:r>
+            <a:endParaRPr kumimoji="1" lang="en-US" altLang="ja-JP" dirty="0"/>
+          </a:p>
+          <a:p>
+            <a:r>
+              <a:rPr lang="en-US" altLang="ja-JP" dirty="0"/>
+              <a:t>G</a:t>
+            </a:r>
+            <a:r>
+              <a:rPr lang="ja-JP" altLang="en-US" dirty="0"/>
+              <a:t>キー　今後ゲージの実装やキーの変更をする予定 </a:t>
+            </a:r>
+            <a:endParaRPr lang="en-US" altLang="ja-JP" dirty="0"/>
+          </a:p>
+          <a:p>
+            <a:r>
+              <a:rPr lang="ja-JP" altLang="en-US" dirty="0"/>
+              <a:t>コントローラーは　</a:t>
+            </a:r>
+            <a:r>
+              <a:rPr lang="en-US" altLang="ja-JP" dirty="0"/>
+              <a:t>R</a:t>
+            </a:r>
+            <a:r>
+              <a:rPr lang="ja-JP" altLang="en-US" dirty="0"/>
+              <a:t>　予定</a:t>
+            </a:r>
+            <a:endParaRPr kumimoji="1" lang="ja-JP" altLang="en-US" dirty="0"/>
+          </a:p>
+        </p:txBody>
+      </p:sp>
+      <p:sp>
+        <p:nvSpPr>
+          <p:cNvPr id="9" name="テキスト ボックス 8">
+            <a:extLst>
+              <a:ext uri="{FF2B5EF4-FFF2-40B4-BE49-F238E27FC236}">
+                <a16:creationId xmlns:a16="http://schemas.microsoft.com/office/drawing/2014/main" id="{7DC0D889-37ED-EDA6-5AAE-BBAA905E33AF}"/>
+              </a:ext>
+            </a:extLst>
+          </p:cNvPr>
+          <p:cNvSpPr txBox="1"/>
+          <p:nvPr/>
+        </p:nvSpPr>
+        <p:spPr>
+          <a:xfrm>
+            <a:off x="307909" y="5807646"/>
+            <a:ext cx="9731830" cy="369332"/>
+          </a:xfrm>
+          <a:prstGeom prst="rect">
+            <a:avLst/>
+          </a:prstGeom>
+          <a:noFill/>
+        </p:spPr>
+        <p:txBody>
+          <a:bodyPr wrap="square" rtlCol="0">
+            <a:spAutoFit/>
+          </a:bodyPr>
+          <a:lstStyle/>
+          <a:p>
+            <a:r>
+              <a:rPr kumimoji="1" lang="ja-JP" altLang="en-US" dirty="0"/>
+              <a:t>メリット　敵を吹っ飛ばすので猶予ができる　</a:t>
+            </a:r>
+            <a:r>
+              <a:rPr kumimoji="1" lang="en-US" altLang="ja-JP" dirty="0"/>
+              <a:t>Hp</a:t>
+            </a:r>
+            <a:r>
+              <a:rPr kumimoji="1" lang="ja-JP" altLang="en-US" dirty="0"/>
+              <a:t>が低いとき回復の猶予　無敵　大ダメージ</a:t>
+            </a:r>
+          </a:p>
+        </p:txBody>
+      </p:sp>
+      <p:sp>
+        <p:nvSpPr>
+          <p:cNvPr id="4" name="テキスト ボックス 3">
+            <a:extLst>
+              <a:ext uri="{FF2B5EF4-FFF2-40B4-BE49-F238E27FC236}">
+                <a16:creationId xmlns:a16="http://schemas.microsoft.com/office/drawing/2014/main" id="{90B32E43-49A7-ABE1-1460-BD8244BDE826}"/>
+              </a:ext>
+            </a:extLst>
+          </p:cNvPr>
+          <p:cNvSpPr txBox="1"/>
+          <p:nvPr/>
+        </p:nvSpPr>
+        <p:spPr>
+          <a:xfrm>
+            <a:off x="307909" y="6275893"/>
+            <a:ext cx="5430418" cy="369332"/>
+          </a:xfrm>
+          <a:prstGeom prst="rect">
+            <a:avLst/>
+          </a:prstGeom>
+          <a:noFill/>
+        </p:spPr>
+        <p:txBody>
+          <a:bodyPr wrap="square" rtlCol="0">
+            <a:spAutoFit/>
+          </a:bodyPr>
+          <a:lstStyle/>
+          <a:p>
+            <a:r>
+              <a:rPr kumimoji="1" lang="ja-JP" altLang="en-US" dirty="0"/>
+              <a:t>デメリット　隙が多い　自分が動けない</a:t>
+            </a:r>
+          </a:p>
+        </p:txBody>
+      </p:sp>
+      <p:sp>
+        <p:nvSpPr>
+          <p:cNvPr id="10" name="テキスト ボックス 9">
+            <a:extLst>
+              <a:ext uri="{FF2B5EF4-FFF2-40B4-BE49-F238E27FC236}">
+                <a16:creationId xmlns:a16="http://schemas.microsoft.com/office/drawing/2014/main" id="{E2CDEF38-A04B-4DD5-527F-80FFFBDA20CC}"/>
+              </a:ext>
+            </a:extLst>
+          </p:cNvPr>
+          <p:cNvSpPr txBox="1"/>
+          <p:nvPr/>
+        </p:nvSpPr>
+        <p:spPr>
+          <a:xfrm>
+            <a:off x="6251510" y="3479575"/>
+            <a:ext cx="2258008" cy="369332"/>
+          </a:xfrm>
+          <a:prstGeom prst="rect">
+            <a:avLst/>
+          </a:prstGeom>
+          <a:noFill/>
+        </p:spPr>
+        <p:txBody>
+          <a:bodyPr wrap="square" rtlCol="0">
+            <a:spAutoFit/>
+          </a:bodyPr>
+          <a:lstStyle/>
+          <a:p>
+            <a:r>
+              <a:rPr kumimoji="1" lang="ja-JP" altLang="en-US" dirty="0"/>
+              <a:t>参考必殺技</a:t>
+            </a:r>
+          </a:p>
+        </p:txBody>
+      </p:sp>
+      <p:sp>
+        <p:nvSpPr>
+          <p:cNvPr id="14" name="テキスト ボックス 13">
+            <a:extLst>
+              <a:ext uri="{FF2B5EF4-FFF2-40B4-BE49-F238E27FC236}">
+                <a16:creationId xmlns:a16="http://schemas.microsoft.com/office/drawing/2014/main" id="{50B8177F-3A16-AAB8-1626-91DA975A75E6}"/>
+              </a:ext>
+            </a:extLst>
+          </p:cNvPr>
+          <p:cNvSpPr txBox="1"/>
+          <p:nvPr/>
+        </p:nvSpPr>
+        <p:spPr>
+          <a:xfrm>
+            <a:off x="6095999" y="3899482"/>
+            <a:ext cx="5569597" cy="646331"/>
+          </a:xfrm>
+          <a:prstGeom prst="rect">
+            <a:avLst/>
+          </a:prstGeom>
+          <a:noFill/>
+        </p:spPr>
+        <p:txBody>
+          <a:bodyPr wrap="square">
+            <a:spAutoFit/>
+          </a:bodyPr>
+          <a:lstStyle/>
+          <a:p>
+            <a:r>
+              <a:rPr lang="ja-JP" altLang="en-US" dirty="0">
+                <a:hlinkClick r:id="rId2"/>
+              </a:rPr>
+              <a:t>https://youtu.be/iE-ZEc6bkWs?si=FG2noyAuzwhMMODY&amp;t=977</a:t>
+            </a:r>
+            <a:endParaRPr lang="ja-JP" altLang="en-US" dirty="0"/>
+          </a:p>
+        </p:txBody>
+      </p:sp>
+      <p:sp>
+        <p:nvSpPr>
+          <p:cNvPr id="16" name="テキスト ボックス 15">
+            <a:extLst>
+              <a:ext uri="{FF2B5EF4-FFF2-40B4-BE49-F238E27FC236}">
+                <a16:creationId xmlns:a16="http://schemas.microsoft.com/office/drawing/2014/main" id="{E63BE89E-DDF3-04F6-5D0F-6D2759051D67}"/>
+              </a:ext>
+            </a:extLst>
+          </p:cNvPr>
+          <p:cNvSpPr txBox="1"/>
+          <p:nvPr/>
+        </p:nvSpPr>
+        <p:spPr>
+          <a:xfrm>
+            <a:off x="5931800" y="4604975"/>
+            <a:ext cx="6097554" cy="646331"/>
+          </a:xfrm>
+          <a:prstGeom prst="rect">
+            <a:avLst/>
+          </a:prstGeom>
+          <a:noFill/>
+        </p:spPr>
+        <p:txBody>
+          <a:bodyPr wrap="square">
+            <a:spAutoFit/>
+          </a:bodyPr>
+          <a:lstStyle/>
+          <a:p>
+            <a:r>
+              <a:rPr lang="ja-JP" altLang="en-US" dirty="0">
+                <a:hlinkClick r:id="rId3"/>
+              </a:rPr>
+              <a:t>https://youtu.be/5gzqQ1_PPHw?si=mggR05w2e9POMOOe&amp;t=50</a:t>
+            </a:r>
+            <a:endParaRPr lang="ja-JP" altLang="en-US" dirty="0"/>
+          </a:p>
+        </p:txBody>
+      </p:sp>
+    </p:spTree>
+    <p:extLst>
+      <p:ext uri="{BB962C8B-B14F-4D97-AF65-F5344CB8AC3E}">
+        <p14:creationId xmlns:p14="http://schemas.microsoft.com/office/powerpoint/2010/main" val="2502149341"/>
+      </p:ext>
+    </p:extLst>
+  </p:cSld>
+  <p:clrMapOvr>
+    <a:masterClrMapping/>
+  </p:clrMapOvr>
+  <p:transition spd="slow" advClick="0">
+    <p:fade thruBlk="1"/>
+  </p:transition>
+</p:sld>
+</file>
+
+<file path=ppt/slides/slide7.xml><?xml version="1.0" encoding="utf-8"?>
+<p:sld xmlns:a="http://schemas.openxmlformats.org/drawingml/2006/main" xmlns:r="http://schemas.openxmlformats.org/officeDocument/2006/relationships" xmlns:p="http://schemas.openxmlformats.org/presentationml/2006/main">
+  <p:cSld>
+    <p:spTree>
+      <p:nvGrpSpPr>
+        <p:cNvPr id="1" name=""/>
+        <p:cNvGrpSpPr/>
+        <p:nvPr/>
+      </p:nvGrpSpPr>
+      <p:grpSpPr>
+        <a:xfrm>
+          <a:off x="0" y="0"/>
+          <a:ext cx="0" cy="0"/>
+          <a:chOff x="0" y="0"/>
+          <a:chExt cx="0" cy="0"/>
+        </a:xfrm>
+      </p:grpSpPr>
+      <p:sp>
+        <p:nvSpPr>
           <p:cNvPr id="2" name="正方形/長方形 1">
             <a:extLst>
               <a:ext uri="{FF2B5EF4-FFF2-40B4-BE49-F238E27FC236}">
@@ -5296,2005 +6071,6 @@
         <p:spPr>
           <a:xfrm>
             <a:off x="271606" y="98492"/>
-            <a:ext cx="1694695" cy="461665"/>
-          </a:xfrm>
-          <a:prstGeom prst="rect">
-            <a:avLst/>
-          </a:prstGeom>
-          <a:noFill/>
-        </p:spPr>
-        <p:txBody>
-          <a:bodyPr wrap="none" lIns="91440" tIns="45720" rIns="91440" bIns="45720">
-            <a:spAutoFit/>
-          </a:bodyPr>
-          <a:lstStyle/>
-          <a:p>
-            <a:r>
-              <a:rPr lang="ja-JP" altLang="en-US" sz="2400" dirty="0">
-                <a:ln w="0"/>
-                <a:solidFill>
-                  <a:schemeClr val="bg1"/>
-                </a:solidFill>
-                <a:latin typeface="ＭＳ Ｐゴシック" panose="020B0600070205080204" pitchFamily="50" charset="-128"/>
-                <a:ea typeface="ＭＳ Ｐゴシック" panose="020B0600070205080204" pitchFamily="50" charset="-128"/>
-              </a:rPr>
-              <a:t>ゲーム画面</a:t>
-            </a:r>
-            <a:endParaRPr lang="ja-JP" altLang="en-US" sz="2400" b="0" cap="none" spc="0" dirty="0">
-              <a:ln w="0"/>
-              <a:solidFill>
-                <a:schemeClr val="bg1"/>
-              </a:solidFill>
-              <a:latin typeface="ＭＳ Ｐゴシック" panose="020B0600070205080204" pitchFamily="50" charset="-128"/>
-              <a:ea typeface="ＭＳ Ｐゴシック" panose="020B0600070205080204" pitchFamily="50" charset="-128"/>
-            </a:endParaRPr>
-          </a:p>
-        </p:txBody>
-      </p:sp>
-      <p:sp>
-        <p:nvSpPr>
-          <p:cNvPr id="3" name="正方形/長方形 2">
-            <a:extLst>
-              <a:ext uri="{FF2B5EF4-FFF2-40B4-BE49-F238E27FC236}">
-                <a16:creationId xmlns:a16="http://schemas.microsoft.com/office/drawing/2014/main" id="{A297B050-AB7A-B0F6-4238-A1FFC172F6C9}"/>
-              </a:ext>
-            </a:extLst>
-          </p:cNvPr>
-          <p:cNvSpPr/>
-          <p:nvPr/>
-        </p:nvSpPr>
-        <p:spPr>
-          <a:xfrm>
-            <a:off x="1158240" y="702323"/>
-            <a:ext cx="9875520" cy="5703483"/>
-          </a:xfrm>
-          <a:prstGeom prst="rect">
-            <a:avLst/>
-          </a:prstGeom>
-        </p:spPr>
-        <p:style>
-          <a:lnRef idx="2">
-            <a:schemeClr val="accent1">
-              <a:shade val="15000"/>
-            </a:schemeClr>
-          </a:lnRef>
-          <a:fillRef idx="1">
-            <a:schemeClr val="accent1"/>
-          </a:fillRef>
-          <a:effectRef idx="0">
-            <a:schemeClr val="accent1"/>
-          </a:effectRef>
-          <a:fontRef idx="minor">
-            <a:schemeClr val="lt1"/>
-          </a:fontRef>
-        </p:style>
-        <p:txBody>
-          <a:bodyPr rtlCol="0" anchor="ctr"/>
-          <a:lstStyle/>
-          <a:p>
-            <a:pPr algn="ctr"/>
-            <a:endParaRPr kumimoji="1" lang="ja-JP" altLang="en-US"/>
-          </a:p>
-        </p:txBody>
-      </p:sp>
-      <p:sp>
-        <p:nvSpPr>
-          <p:cNvPr id="5" name="正方形/長方形 4">
-            <a:extLst>
-              <a:ext uri="{FF2B5EF4-FFF2-40B4-BE49-F238E27FC236}">
-                <a16:creationId xmlns:a16="http://schemas.microsoft.com/office/drawing/2014/main" id="{96FA8485-B9F2-3BAA-C3C6-912C1C6A3447}"/>
-              </a:ext>
-            </a:extLst>
-          </p:cNvPr>
-          <p:cNvSpPr/>
-          <p:nvPr/>
-        </p:nvSpPr>
-        <p:spPr>
-          <a:xfrm>
-            <a:off x="1436914" y="936171"/>
-            <a:ext cx="3189515" cy="489858"/>
-          </a:xfrm>
-          <a:prstGeom prst="rect">
-            <a:avLst/>
-          </a:prstGeom>
-          <a:solidFill>
-            <a:schemeClr val="tx1"/>
-          </a:solidFill>
-        </p:spPr>
-        <p:style>
-          <a:lnRef idx="2">
-            <a:schemeClr val="accent1">
-              <a:shade val="15000"/>
-            </a:schemeClr>
-          </a:lnRef>
-          <a:fillRef idx="1">
-            <a:schemeClr val="accent1"/>
-          </a:fillRef>
-          <a:effectRef idx="0">
-            <a:schemeClr val="accent1"/>
-          </a:effectRef>
-          <a:fontRef idx="minor">
-            <a:schemeClr val="lt1"/>
-          </a:fontRef>
-        </p:style>
-        <p:txBody>
-          <a:bodyPr rtlCol="0" anchor="ctr"/>
-          <a:lstStyle/>
-          <a:p>
-            <a:pPr algn="ctr"/>
-            <a:endParaRPr kumimoji="1" lang="ja-JP" altLang="en-US"/>
-          </a:p>
-        </p:txBody>
-      </p:sp>
-      <p:sp>
-        <p:nvSpPr>
-          <p:cNvPr id="6" name="正方形/長方形 5">
-            <a:extLst>
-              <a:ext uri="{FF2B5EF4-FFF2-40B4-BE49-F238E27FC236}">
-                <a16:creationId xmlns:a16="http://schemas.microsoft.com/office/drawing/2014/main" id="{2C0DB03F-E84D-D357-ED34-3B7D9F8B3960}"/>
-              </a:ext>
-            </a:extLst>
-          </p:cNvPr>
-          <p:cNvSpPr/>
-          <p:nvPr/>
-        </p:nvSpPr>
-        <p:spPr>
-          <a:xfrm>
-            <a:off x="4778829" y="913070"/>
-            <a:ext cx="849085" cy="1144330"/>
-          </a:xfrm>
-          <a:prstGeom prst="rect">
-            <a:avLst/>
-          </a:prstGeom>
-          <a:solidFill>
-            <a:schemeClr val="tx1"/>
-          </a:solidFill>
-        </p:spPr>
-        <p:style>
-          <a:lnRef idx="2">
-            <a:schemeClr val="accent1">
-              <a:shade val="15000"/>
-            </a:schemeClr>
-          </a:lnRef>
-          <a:fillRef idx="1">
-            <a:schemeClr val="accent1"/>
-          </a:fillRef>
-          <a:effectRef idx="0">
-            <a:schemeClr val="accent1"/>
-          </a:effectRef>
-          <a:fontRef idx="minor">
-            <a:schemeClr val="lt1"/>
-          </a:fontRef>
-        </p:style>
-        <p:txBody>
-          <a:bodyPr rtlCol="0" anchor="ctr"/>
-          <a:lstStyle/>
-          <a:p>
-            <a:pPr algn="ctr"/>
-            <a:endParaRPr kumimoji="1" lang="ja-JP" altLang="en-US"/>
-          </a:p>
-        </p:txBody>
-      </p:sp>
-      <p:sp>
-        <p:nvSpPr>
-          <p:cNvPr id="7" name="正方形/長方形 6">
-            <a:extLst>
-              <a:ext uri="{FF2B5EF4-FFF2-40B4-BE49-F238E27FC236}">
-                <a16:creationId xmlns:a16="http://schemas.microsoft.com/office/drawing/2014/main" id="{8A5482E1-DF46-D3CD-FFE3-1071F0087C78}"/>
-              </a:ext>
-            </a:extLst>
-          </p:cNvPr>
-          <p:cNvSpPr/>
-          <p:nvPr/>
-        </p:nvSpPr>
-        <p:spPr>
-          <a:xfrm>
-            <a:off x="5715003" y="913070"/>
-            <a:ext cx="849085" cy="1144330"/>
-          </a:xfrm>
-          <a:prstGeom prst="rect">
-            <a:avLst/>
-          </a:prstGeom>
-          <a:solidFill>
-            <a:schemeClr val="tx1"/>
-          </a:solidFill>
-        </p:spPr>
-        <p:style>
-          <a:lnRef idx="2">
-            <a:schemeClr val="accent1">
-              <a:shade val="15000"/>
-            </a:schemeClr>
-          </a:lnRef>
-          <a:fillRef idx="1">
-            <a:schemeClr val="accent1"/>
-          </a:fillRef>
-          <a:effectRef idx="0">
-            <a:schemeClr val="accent1"/>
-          </a:effectRef>
-          <a:fontRef idx="minor">
-            <a:schemeClr val="lt1"/>
-          </a:fontRef>
-        </p:style>
-        <p:txBody>
-          <a:bodyPr rtlCol="0" anchor="ctr"/>
-          <a:lstStyle/>
-          <a:p>
-            <a:pPr algn="ctr"/>
-            <a:endParaRPr kumimoji="1" lang="ja-JP" altLang="en-US"/>
-          </a:p>
-        </p:txBody>
-      </p:sp>
-      <p:sp>
-        <p:nvSpPr>
-          <p:cNvPr id="8" name="正方形/長方形 7">
-            <a:extLst>
-              <a:ext uri="{FF2B5EF4-FFF2-40B4-BE49-F238E27FC236}">
-                <a16:creationId xmlns:a16="http://schemas.microsoft.com/office/drawing/2014/main" id="{3FFD38FD-22B4-4DF0-6F7F-2633EAE6B758}"/>
-              </a:ext>
-            </a:extLst>
-          </p:cNvPr>
-          <p:cNvSpPr/>
-          <p:nvPr/>
-        </p:nvSpPr>
-        <p:spPr>
-          <a:xfrm>
-            <a:off x="9208646" y="5869023"/>
-            <a:ext cx="338124" cy="455697"/>
-          </a:xfrm>
-          <a:prstGeom prst="rect">
-            <a:avLst/>
-          </a:prstGeom>
-          <a:solidFill>
-            <a:schemeClr val="tx1"/>
-          </a:solidFill>
-        </p:spPr>
-        <p:style>
-          <a:lnRef idx="2">
-            <a:schemeClr val="accent1">
-              <a:shade val="15000"/>
-            </a:schemeClr>
-          </a:lnRef>
-          <a:fillRef idx="1">
-            <a:schemeClr val="accent1"/>
-          </a:fillRef>
-          <a:effectRef idx="0">
-            <a:schemeClr val="accent1"/>
-          </a:effectRef>
-          <a:fontRef idx="minor">
-            <a:schemeClr val="lt1"/>
-          </a:fontRef>
-        </p:style>
-        <p:txBody>
-          <a:bodyPr rtlCol="0" anchor="ctr"/>
-          <a:lstStyle/>
-          <a:p>
-            <a:pPr algn="ctr"/>
-            <a:endParaRPr kumimoji="1" lang="ja-JP" altLang="en-US"/>
-          </a:p>
-        </p:txBody>
-      </p:sp>
-      <p:sp>
-        <p:nvSpPr>
-          <p:cNvPr id="9" name="正方形/長方形 8">
-            <a:extLst>
-              <a:ext uri="{FF2B5EF4-FFF2-40B4-BE49-F238E27FC236}">
-                <a16:creationId xmlns:a16="http://schemas.microsoft.com/office/drawing/2014/main" id="{88FE6618-41C9-FDF3-0518-F97CD72AA5CE}"/>
-              </a:ext>
-            </a:extLst>
-          </p:cNvPr>
-          <p:cNvSpPr/>
-          <p:nvPr/>
-        </p:nvSpPr>
-        <p:spPr>
-          <a:xfrm>
-            <a:off x="9640474" y="5869023"/>
-            <a:ext cx="338124" cy="455697"/>
-          </a:xfrm>
-          <a:prstGeom prst="rect">
-            <a:avLst/>
-          </a:prstGeom>
-          <a:solidFill>
-            <a:schemeClr val="tx1"/>
-          </a:solidFill>
-        </p:spPr>
-        <p:style>
-          <a:lnRef idx="2">
-            <a:schemeClr val="accent1">
-              <a:shade val="15000"/>
-            </a:schemeClr>
-          </a:lnRef>
-          <a:fillRef idx="1">
-            <a:schemeClr val="accent1"/>
-          </a:fillRef>
-          <a:effectRef idx="0">
-            <a:schemeClr val="accent1"/>
-          </a:effectRef>
-          <a:fontRef idx="minor">
-            <a:schemeClr val="lt1"/>
-          </a:fontRef>
-        </p:style>
-        <p:txBody>
-          <a:bodyPr rtlCol="0" anchor="ctr"/>
-          <a:lstStyle/>
-          <a:p>
-            <a:pPr algn="ctr"/>
-            <a:endParaRPr kumimoji="1" lang="ja-JP" altLang="en-US"/>
-          </a:p>
-        </p:txBody>
-      </p:sp>
-      <p:sp>
-        <p:nvSpPr>
-          <p:cNvPr id="10" name="正方形/長方形 9">
-            <a:extLst>
-              <a:ext uri="{FF2B5EF4-FFF2-40B4-BE49-F238E27FC236}">
-                <a16:creationId xmlns:a16="http://schemas.microsoft.com/office/drawing/2014/main" id="{643F0557-5EE7-B99C-9F59-04A6C0CDF40B}"/>
-              </a:ext>
-            </a:extLst>
-          </p:cNvPr>
-          <p:cNvSpPr/>
-          <p:nvPr/>
-        </p:nvSpPr>
-        <p:spPr>
-          <a:xfrm>
-            <a:off x="10072302" y="5869022"/>
-            <a:ext cx="338124" cy="455697"/>
-          </a:xfrm>
-          <a:prstGeom prst="rect">
-            <a:avLst/>
-          </a:prstGeom>
-          <a:solidFill>
-            <a:schemeClr val="tx1"/>
-          </a:solidFill>
-        </p:spPr>
-        <p:style>
-          <a:lnRef idx="2">
-            <a:schemeClr val="accent1">
-              <a:shade val="15000"/>
-            </a:schemeClr>
-          </a:lnRef>
-          <a:fillRef idx="1">
-            <a:schemeClr val="accent1"/>
-          </a:fillRef>
-          <a:effectRef idx="0">
-            <a:schemeClr val="accent1"/>
-          </a:effectRef>
-          <a:fontRef idx="minor">
-            <a:schemeClr val="lt1"/>
-          </a:fontRef>
-        </p:style>
-        <p:txBody>
-          <a:bodyPr rtlCol="0" anchor="ctr"/>
-          <a:lstStyle/>
-          <a:p>
-            <a:pPr algn="ctr"/>
-            <a:endParaRPr kumimoji="1" lang="ja-JP" altLang="en-US"/>
-          </a:p>
-        </p:txBody>
-      </p:sp>
-      <p:sp>
-        <p:nvSpPr>
-          <p:cNvPr id="11" name="正方形/長方形 10">
-            <a:extLst>
-              <a:ext uri="{FF2B5EF4-FFF2-40B4-BE49-F238E27FC236}">
-                <a16:creationId xmlns:a16="http://schemas.microsoft.com/office/drawing/2014/main" id="{AECA8EA7-D7AB-2BA6-AD3A-8F293EF1FCFC}"/>
-              </a:ext>
-            </a:extLst>
-          </p:cNvPr>
-          <p:cNvSpPr/>
-          <p:nvPr/>
-        </p:nvSpPr>
-        <p:spPr>
-          <a:xfrm>
-            <a:off x="1251857" y="5203371"/>
-            <a:ext cx="9666514" cy="455697"/>
-          </a:xfrm>
-          <a:prstGeom prst="rect">
-            <a:avLst/>
-          </a:prstGeom>
-          <a:solidFill>
-            <a:schemeClr val="tx1"/>
-          </a:solidFill>
-        </p:spPr>
-        <p:style>
-          <a:lnRef idx="2">
-            <a:schemeClr val="accent1">
-              <a:shade val="15000"/>
-            </a:schemeClr>
-          </a:lnRef>
-          <a:fillRef idx="1">
-            <a:schemeClr val="accent1"/>
-          </a:fillRef>
-          <a:effectRef idx="0">
-            <a:schemeClr val="accent1"/>
-          </a:effectRef>
-          <a:fontRef idx="minor">
-            <a:schemeClr val="lt1"/>
-          </a:fontRef>
-        </p:style>
-        <p:txBody>
-          <a:bodyPr rtlCol="0" anchor="ctr"/>
-          <a:lstStyle/>
-          <a:p>
-            <a:pPr algn="ctr"/>
-            <a:endParaRPr kumimoji="1" lang="ja-JP" altLang="en-US"/>
-          </a:p>
-        </p:txBody>
-      </p:sp>
-      <p:grpSp>
-        <p:nvGrpSpPr>
-          <p:cNvPr id="16" name="グループ化 15">
-            <a:extLst>
-              <a:ext uri="{FF2B5EF4-FFF2-40B4-BE49-F238E27FC236}">
-                <a16:creationId xmlns:a16="http://schemas.microsoft.com/office/drawing/2014/main" id="{B3380D2C-B8FF-9AD8-F5F1-B9D423BAB354}"/>
-              </a:ext>
-            </a:extLst>
-          </p:cNvPr>
-          <p:cNvGrpSpPr/>
-          <p:nvPr/>
-        </p:nvGrpSpPr>
-        <p:grpSpPr>
-          <a:xfrm>
-            <a:off x="3664131" y="3942130"/>
-            <a:ext cx="1970318" cy="455698"/>
-            <a:chOff x="3664131" y="3942130"/>
-            <a:chExt cx="1970318" cy="455698"/>
-          </a:xfrm>
-        </p:grpSpPr>
-        <p:sp>
-          <p:nvSpPr>
-            <p:cNvPr id="12" name="正方形/長方形 11">
-              <a:extLst>
-                <a:ext uri="{FF2B5EF4-FFF2-40B4-BE49-F238E27FC236}">
-                  <a16:creationId xmlns:a16="http://schemas.microsoft.com/office/drawing/2014/main" id="{559B0A41-3086-5382-2EAD-C60C5A5F97C5}"/>
-                </a:ext>
-              </a:extLst>
-            </p:cNvPr>
-            <p:cNvSpPr/>
-            <p:nvPr/>
-          </p:nvSpPr>
-          <p:spPr>
-            <a:xfrm>
-              <a:off x="3664131" y="3942131"/>
-              <a:ext cx="461554" cy="455697"/>
-            </a:xfrm>
-            <a:prstGeom prst="rect">
-              <a:avLst/>
-            </a:prstGeom>
-            <a:solidFill>
-              <a:schemeClr val="tx1"/>
-            </a:solidFill>
-          </p:spPr>
-          <p:style>
-            <a:lnRef idx="2">
-              <a:schemeClr val="accent1">
-                <a:shade val="15000"/>
-              </a:schemeClr>
-            </a:lnRef>
-            <a:fillRef idx="1">
-              <a:schemeClr val="accent1"/>
-            </a:fillRef>
-            <a:effectRef idx="0">
-              <a:schemeClr val="accent1"/>
-            </a:effectRef>
-            <a:fontRef idx="minor">
-              <a:schemeClr val="lt1"/>
-            </a:fontRef>
-          </p:style>
-          <p:txBody>
-            <a:bodyPr rtlCol="0" anchor="ctr"/>
-            <a:lstStyle/>
-            <a:p>
-              <a:pPr algn="ctr"/>
-              <a:endParaRPr kumimoji="1" lang="ja-JP" altLang="en-US"/>
-            </a:p>
-          </p:txBody>
-        </p:sp>
-        <p:sp>
-          <p:nvSpPr>
-            <p:cNvPr id="13" name="正方形/長方形 12">
-              <a:extLst>
-                <a:ext uri="{FF2B5EF4-FFF2-40B4-BE49-F238E27FC236}">
-                  <a16:creationId xmlns:a16="http://schemas.microsoft.com/office/drawing/2014/main" id="{7D224D5B-3771-2828-B431-70F5EFA9C7D4}"/>
-                </a:ext>
-              </a:extLst>
-            </p:cNvPr>
-            <p:cNvSpPr/>
-            <p:nvPr/>
-          </p:nvSpPr>
-          <p:spPr>
-            <a:xfrm>
-              <a:off x="4164875" y="3942130"/>
-              <a:ext cx="461554" cy="455697"/>
-            </a:xfrm>
-            <a:prstGeom prst="rect">
-              <a:avLst/>
-            </a:prstGeom>
-            <a:solidFill>
-              <a:schemeClr val="tx1"/>
-            </a:solidFill>
-          </p:spPr>
-          <p:style>
-            <a:lnRef idx="2">
-              <a:schemeClr val="accent1">
-                <a:shade val="15000"/>
-              </a:schemeClr>
-            </a:lnRef>
-            <a:fillRef idx="1">
-              <a:schemeClr val="accent1"/>
-            </a:fillRef>
-            <a:effectRef idx="0">
-              <a:schemeClr val="accent1"/>
-            </a:effectRef>
-            <a:fontRef idx="minor">
-              <a:schemeClr val="lt1"/>
-            </a:fontRef>
-          </p:style>
-          <p:txBody>
-            <a:bodyPr rtlCol="0" anchor="ctr"/>
-            <a:lstStyle/>
-            <a:p>
-              <a:pPr algn="ctr"/>
-              <a:endParaRPr kumimoji="1" lang="ja-JP" altLang="en-US"/>
-            </a:p>
-          </p:txBody>
-        </p:sp>
-        <p:sp>
-          <p:nvSpPr>
-            <p:cNvPr id="14" name="正方形/長方形 13">
-              <a:extLst>
-                <a:ext uri="{FF2B5EF4-FFF2-40B4-BE49-F238E27FC236}">
-                  <a16:creationId xmlns:a16="http://schemas.microsoft.com/office/drawing/2014/main" id="{F9A61B81-CD53-0187-A65A-92089EA22FB6}"/>
-                </a:ext>
-              </a:extLst>
-            </p:cNvPr>
-            <p:cNvSpPr/>
-            <p:nvPr/>
-          </p:nvSpPr>
-          <p:spPr>
-            <a:xfrm>
-              <a:off x="4665619" y="3942130"/>
-              <a:ext cx="461554" cy="455697"/>
-            </a:xfrm>
-            <a:prstGeom prst="rect">
-              <a:avLst/>
-            </a:prstGeom>
-            <a:solidFill>
-              <a:schemeClr val="tx1"/>
-            </a:solidFill>
-          </p:spPr>
-          <p:style>
-            <a:lnRef idx="2">
-              <a:schemeClr val="accent1">
-                <a:shade val="15000"/>
-              </a:schemeClr>
-            </a:lnRef>
-            <a:fillRef idx="1">
-              <a:schemeClr val="accent1"/>
-            </a:fillRef>
-            <a:effectRef idx="0">
-              <a:schemeClr val="accent1"/>
-            </a:effectRef>
-            <a:fontRef idx="minor">
-              <a:schemeClr val="lt1"/>
-            </a:fontRef>
-          </p:style>
-          <p:txBody>
-            <a:bodyPr rtlCol="0" anchor="ctr"/>
-            <a:lstStyle/>
-            <a:p>
-              <a:pPr algn="ctr"/>
-              <a:endParaRPr kumimoji="1" lang="ja-JP" altLang="en-US"/>
-            </a:p>
-          </p:txBody>
-        </p:sp>
-        <p:sp>
-          <p:nvSpPr>
-            <p:cNvPr id="15" name="正方形/長方形 14">
-              <a:extLst>
-                <a:ext uri="{FF2B5EF4-FFF2-40B4-BE49-F238E27FC236}">
-                  <a16:creationId xmlns:a16="http://schemas.microsoft.com/office/drawing/2014/main" id="{27C3ABC9-9245-B038-D64F-F72AB29B90F7}"/>
-                </a:ext>
-              </a:extLst>
-            </p:cNvPr>
-            <p:cNvSpPr/>
-            <p:nvPr/>
-          </p:nvSpPr>
-          <p:spPr>
-            <a:xfrm>
-              <a:off x="5172895" y="3942130"/>
-              <a:ext cx="461554" cy="455697"/>
-            </a:xfrm>
-            <a:prstGeom prst="rect">
-              <a:avLst/>
-            </a:prstGeom>
-            <a:solidFill>
-              <a:schemeClr val="tx1"/>
-            </a:solidFill>
-          </p:spPr>
-          <p:style>
-            <a:lnRef idx="2">
-              <a:schemeClr val="accent1">
-                <a:shade val="15000"/>
-              </a:schemeClr>
-            </a:lnRef>
-            <a:fillRef idx="1">
-              <a:schemeClr val="accent1"/>
-            </a:fillRef>
-            <a:effectRef idx="0">
-              <a:schemeClr val="accent1"/>
-            </a:effectRef>
-            <a:fontRef idx="minor">
-              <a:schemeClr val="lt1"/>
-            </a:fontRef>
-          </p:style>
-          <p:txBody>
-            <a:bodyPr rtlCol="0" anchor="ctr"/>
-            <a:lstStyle/>
-            <a:p>
-              <a:pPr algn="ctr"/>
-              <a:endParaRPr kumimoji="1" lang="ja-JP" altLang="en-US"/>
-            </a:p>
-          </p:txBody>
-        </p:sp>
-      </p:grpSp>
-      <p:grpSp>
-        <p:nvGrpSpPr>
-          <p:cNvPr id="17" name="グループ化 16">
-            <a:extLst>
-              <a:ext uri="{FF2B5EF4-FFF2-40B4-BE49-F238E27FC236}">
-                <a16:creationId xmlns:a16="http://schemas.microsoft.com/office/drawing/2014/main" id="{96AB3461-C22A-E70E-506B-6BF1024FEA02}"/>
-              </a:ext>
-            </a:extLst>
-          </p:cNvPr>
-          <p:cNvGrpSpPr/>
-          <p:nvPr/>
-        </p:nvGrpSpPr>
-        <p:grpSpPr>
-          <a:xfrm>
-            <a:off x="6133015" y="2973302"/>
-            <a:ext cx="1970318" cy="455698"/>
-            <a:chOff x="3664131" y="3942130"/>
-            <a:chExt cx="1970318" cy="455698"/>
-          </a:xfrm>
-        </p:grpSpPr>
-        <p:sp>
-          <p:nvSpPr>
-            <p:cNvPr id="18" name="正方形/長方形 17">
-              <a:extLst>
-                <a:ext uri="{FF2B5EF4-FFF2-40B4-BE49-F238E27FC236}">
-                  <a16:creationId xmlns:a16="http://schemas.microsoft.com/office/drawing/2014/main" id="{0A0113EA-5951-ECED-CB78-68846C4546BC}"/>
-                </a:ext>
-              </a:extLst>
-            </p:cNvPr>
-            <p:cNvSpPr/>
-            <p:nvPr/>
-          </p:nvSpPr>
-          <p:spPr>
-            <a:xfrm>
-              <a:off x="3664131" y="3942131"/>
-              <a:ext cx="461554" cy="455697"/>
-            </a:xfrm>
-            <a:prstGeom prst="rect">
-              <a:avLst/>
-            </a:prstGeom>
-            <a:solidFill>
-              <a:schemeClr val="tx1"/>
-            </a:solidFill>
-          </p:spPr>
-          <p:style>
-            <a:lnRef idx="2">
-              <a:schemeClr val="accent1">
-                <a:shade val="15000"/>
-              </a:schemeClr>
-            </a:lnRef>
-            <a:fillRef idx="1">
-              <a:schemeClr val="accent1"/>
-            </a:fillRef>
-            <a:effectRef idx="0">
-              <a:schemeClr val="accent1"/>
-            </a:effectRef>
-            <a:fontRef idx="minor">
-              <a:schemeClr val="lt1"/>
-            </a:fontRef>
-          </p:style>
-          <p:txBody>
-            <a:bodyPr rtlCol="0" anchor="ctr"/>
-            <a:lstStyle/>
-            <a:p>
-              <a:pPr algn="ctr"/>
-              <a:endParaRPr kumimoji="1" lang="ja-JP" altLang="en-US"/>
-            </a:p>
-          </p:txBody>
-        </p:sp>
-        <p:sp>
-          <p:nvSpPr>
-            <p:cNvPr id="19" name="正方形/長方形 18">
-              <a:extLst>
-                <a:ext uri="{FF2B5EF4-FFF2-40B4-BE49-F238E27FC236}">
-                  <a16:creationId xmlns:a16="http://schemas.microsoft.com/office/drawing/2014/main" id="{502ACF8E-90EC-D58E-E5EF-55D91040F818}"/>
-                </a:ext>
-              </a:extLst>
-            </p:cNvPr>
-            <p:cNvSpPr/>
-            <p:nvPr/>
-          </p:nvSpPr>
-          <p:spPr>
-            <a:xfrm>
-              <a:off x="4164875" y="3942130"/>
-              <a:ext cx="461554" cy="455697"/>
-            </a:xfrm>
-            <a:prstGeom prst="rect">
-              <a:avLst/>
-            </a:prstGeom>
-            <a:solidFill>
-              <a:schemeClr val="tx1"/>
-            </a:solidFill>
-          </p:spPr>
-          <p:style>
-            <a:lnRef idx="2">
-              <a:schemeClr val="accent1">
-                <a:shade val="15000"/>
-              </a:schemeClr>
-            </a:lnRef>
-            <a:fillRef idx="1">
-              <a:schemeClr val="accent1"/>
-            </a:fillRef>
-            <a:effectRef idx="0">
-              <a:schemeClr val="accent1"/>
-            </a:effectRef>
-            <a:fontRef idx="minor">
-              <a:schemeClr val="lt1"/>
-            </a:fontRef>
-          </p:style>
-          <p:txBody>
-            <a:bodyPr rtlCol="0" anchor="ctr"/>
-            <a:lstStyle/>
-            <a:p>
-              <a:pPr algn="ctr"/>
-              <a:endParaRPr kumimoji="1" lang="ja-JP" altLang="en-US"/>
-            </a:p>
-          </p:txBody>
-        </p:sp>
-        <p:sp>
-          <p:nvSpPr>
-            <p:cNvPr id="20" name="正方形/長方形 19">
-              <a:extLst>
-                <a:ext uri="{FF2B5EF4-FFF2-40B4-BE49-F238E27FC236}">
-                  <a16:creationId xmlns:a16="http://schemas.microsoft.com/office/drawing/2014/main" id="{6D167C80-32F8-974A-0AD7-F3715734B1B4}"/>
-                </a:ext>
-              </a:extLst>
-            </p:cNvPr>
-            <p:cNvSpPr/>
-            <p:nvPr/>
-          </p:nvSpPr>
-          <p:spPr>
-            <a:xfrm>
-              <a:off x="4665619" y="3942130"/>
-              <a:ext cx="461554" cy="455697"/>
-            </a:xfrm>
-            <a:prstGeom prst="rect">
-              <a:avLst/>
-            </a:prstGeom>
-            <a:solidFill>
-              <a:schemeClr val="tx1"/>
-            </a:solidFill>
-          </p:spPr>
-          <p:style>
-            <a:lnRef idx="2">
-              <a:schemeClr val="accent1">
-                <a:shade val="15000"/>
-              </a:schemeClr>
-            </a:lnRef>
-            <a:fillRef idx="1">
-              <a:schemeClr val="accent1"/>
-            </a:fillRef>
-            <a:effectRef idx="0">
-              <a:schemeClr val="accent1"/>
-            </a:effectRef>
-            <a:fontRef idx="minor">
-              <a:schemeClr val="lt1"/>
-            </a:fontRef>
-          </p:style>
-          <p:txBody>
-            <a:bodyPr rtlCol="0" anchor="ctr"/>
-            <a:lstStyle/>
-            <a:p>
-              <a:pPr algn="ctr"/>
-              <a:endParaRPr kumimoji="1" lang="ja-JP" altLang="en-US"/>
-            </a:p>
-          </p:txBody>
-        </p:sp>
-        <p:sp>
-          <p:nvSpPr>
-            <p:cNvPr id="21" name="正方形/長方形 20">
-              <a:extLst>
-                <a:ext uri="{FF2B5EF4-FFF2-40B4-BE49-F238E27FC236}">
-                  <a16:creationId xmlns:a16="http://schemas.microsoft.com/office/drawing/2014/main" id="{71032C80-B181-3988-718B-82AD964099B2}"/>
-                </a:ext>
-              </a:extLst>
-            </p:cNvPr>
-            <p:cNvSpPr/>
-            <p:nvPr/>
-          </p:nvSpPr>
-          <p:spPr>
-            <a:xfrm>
-              <a:off x="5172895" y="3942130"/>
-              <a:ext cx="461554" cy="455697"/>
-            </a:xfrm>
-            <a:prstGeom prst="rect">
-              <a:avLst/>
-            </a:prstGeom>
-            <a:solidFill>
-              <a:schemeClr val="tx1"/>
-            </a:solidFill>
-          </p:spPr>
-          <p:style>
-            <a:lnRef idx="2">
-              <a:schemeClr val="accent1">
-                <a:shade val="15000"/>
-              </a:schemeClr>
-            </a:lnRef>
-            <a:fillRef idx="1">
-              <a:schemeClr val="accent1"/>
-            </a:fillRef>
-            <a:effectRef idx="0">
-              <a:schemeClr val="accent1"/>
-            </a:effectRef>
-            <a:fontRef idx="minor">
-              <a:schemeClr val="lt1"/>
-            </a:fontRef>
-          </p:style>
-          <p:txBody>
-            <a:bodyPr rtlCol="0" anchor="ctr"/>
-            <a:lstStyle/>
-            <a:p>
-              <a:pPr algn="ctr"/>
-              <a:endParaRPr kumimoji="1" lang="ja-JP" altLang="en-US"/>
-            </a:p>
-          </p:txBody>
-        </p:sp>
-      </p:grpSp>
-      <p:grpSp>
-        <p:nvGrpSpPr>
-          <p:cNvPr id="22" name="グループ化 21">
-            <a:extLst>
-              <a:ext uri="{FF2B5EF4-FFF2-40B4-BE49-F238E27FC236}">
-                <a16:creationId xmlns:a16="http://schemas.microsoft.com/office/drawing/2014/main" id="{38CFC615-B11B-346F-325E-6589217704ED}"/>
-              </a:ext>
-            </a:extLst>
-          </p:cNvPr>
-          <p:cNvGrpSpPr/>
-          <p:nvPr/>
-        </p:nvGrpSpPr>
-        <p:grpSpPr>
-          <a:xfrm>
-            <a:off x="7641779" y="3962278"/>
-            <a:ext cx="1970318" cy="455698"/>
-            <a:chOff x="3664131" y="3942130"/>
-            <a:chExt cx="1970318" cy="455698"/>
-          </a:xfrm>
-        </p:grpSpPr>
-        <p:sp>
-          <p:nvSpPr>
-            <p:cNvPr id="23" name="正方形/長方形 22">
-              <a:extLst>
-                <a:ext uri="{FF2B5EF4-FFF2-40B4-BE49-F238E27FC236}">
-                  <a16:creationId xmlns:a16="http://schemas.microsoft.com/office/drawing/2014/main" id="{2A969379-3D19-F6E4-9D1B-4AC9A14D4136}"/>
-                </a:ext>
-              </a:extLst>
-            </p:cNvPr>
-            <p:cNvSpPr/>
-            <p:nvPr/>
-          </p:nvSpPr>
-          <p:spPr>
-            <a:xfrm>
-              <a:off x="3664131" y="3942131"/>
-              <a:ext cx="461554" cy="455697"/>
-            </a:xfrm>
-            <a:prstGeom prst="rect">
-              <a:avLst/>
-            </a:prstGeom>
-            <a:solidFill>
-              <a:schemeClr val="tx1"/>
-            </a:solidFill>
-          </p:spPr>
-          <p:style>
-            <a:lnRef idx="2">
-              <a:schemeClr val="accent1">
-                <a:shade val="15000"/>
-              </a:schemeClr>
-            </a:lnRef>
-            <a:fillRef idx="1">
-              <a:schemeClr val="accent1"/>
-            </a:fillRef>
-            <a:effectRef idx="0">
-              <a:schemeClr val="accent1"/>
-            </a:effectRef>
-            <a:fontRef idx="minor">
-              <a:schemeClr val="lt1"/>
-            </a:fontRef>
-          </p:style>
-          <p:txBody>
-            <a:bodyPr rtlCol="0" anchor="ctr"/>
-            <a:lstStyle/>
-            <a:p>
-              <a:pPr algn="ctr"/>
-              <a:endParaRPr kumimoji="1" lang="ja-JP" altLang="en-US"/>
-            </a:p>
-          </p:txBody>
-        </p:sp>
-        <p:sp>
-          <p:nvSpPr>
-            <p:cNvPr id="24" name="正方形/長方形 23">
-              <a:extLst>
-                <a:ext uri="{FF2B5EF4-FFF2-40B4-BE49-F238E27FC236}">
-                  <a16:creationId xmlns:a16="http://schemas.microsoft.com/office/drawing/2014/main" id="{F58EB3C8-B991-475C-4B4E-69EB08069CF1}"/>
-                </a:ext>
-              </a:extLst>
-            </p:cNvPr>
-            <p:cNvSpPr/>
-            <p:nvPr/>
-          </p:nvSpPr>
-          <p:spPr>
-            <a:xfrm>
-              <a:off x="4164875" y="3942130"/>
-              <a:ext cx="461554" cy="455697"/>
-            </a:xfrm>
-            <a:prstGeom prst="rect">
-              <a:avLst/>
-            </a:prstGeom>
-            <a:solidFill>
-              <a:schemeClr val="tx1"/>
-            </a:solidFill>
-          </p:spPr>
-          <p:style>
-            <a:lnRef idx="2">
-              <a:schemeClr val="accent1">
-                <a:shade val="15000"/>
-              </a:schemeClr>
-            </a:lnRef>
-            <a:fillRef idx="1">
-              <a:schemeClr val="accent1"/>
-            </a:fillRef>
-            <a:effectRef idx="0">
-              <a:schemeClr val="accent1"/>
-            </a:effectRef>
-            <a:fontRef idx="minor">
-              <a:schemeClr val="lt1"/>
-            </a:fontRef>
-          </p:style>
-          <p:txBody>
-            <a:bodyPr rtlCol="0" anchor="ctr"/>
-            <a:lstStyle/>
-            <a:p>
-              <a:pPr algn="ctr"/>
-              <a:endParaRPr kumimoji="1" lang="ja-JP" altLang="en-US"/>
-            </a:p>
-          </p:txBody>
-        </p:sp>
-        <p:sp>
-          <p:nvSpPr>
-            <p:cNvPr id="25" name="正方形/長方形 24">
-              <a:extLst>
-                <a:ext uri="{FF2B5EF4-FFF2-40B4-BE49-F238E27FC236}">
-                  <a16:creationId xmlns:a16="http://schemas.microsoft.com/office/drawing/2014/main" id="{9A5B028B-A685-D2C1-DD91-1AD99E28371C}"/>
-                </a:ext>
-              </a:extLst>
-            </p:cNvPr>
-            <p:cNvSpPr/>
-            <p:nvPr/>
-          </p:nvSpPr>
-          <p:spPr>
-            <a:xfrm>
-              <a:off x="4665619" y="3942130"/>
-              <a:ext cx="461554" cy="455697"/>
-            </a:xfrm>
-            <a:prstGeom prst="rect">
-              <a:avLst/>
-            </a:prstGeom>
-            <a:solidFill>
-              <a:schemeClr val="tx1"/>
-            </a:solidFill>
-          </p:spPr>
-          <p:style>
-            <a:lnRef idx="2">
-              <a:schemeClr val="accent1">
-                <a:shade val="15000"/>
-              </a:schemeClr>
-            </a:lnRef>
-            <a:fillRef idx="1">
-              <a:schemeClr val="accent1"/>
-            </a:fillRef>
-            <a:effectRef idx="0">
-              <a:schemeClr val="accent1"/>
-            </a:effectRef>
-            <a:fontRef idx="minor">
-              <a:schemeClr val="lt1"/>
-            </a:fontRef>
-          </p:style>
-          <p:txBody>
-            <a:bodyPr rtlCol="0" anchor="ctr"/>
-            <a:lstStyle/>
-            <a:p>
-              <a:pPr algn="ctr"/>
-              <a:endParaRPr kumimoji="1" lang="ja-JP" altLang="en-US"/>
-            </a:p>
-          </p:txBody>
-        </p:sp>
-        <p:sp>
-          <p:nvSpPr>
-            <p:cNvPr id="26" name="正方形/長方形 25">
-              <a:extLst>
-                <a:ext uri="{FF2B5EF4-FFF2-40B4-BE49-F238E27FC236}">
-                  <a16:creationId xmlns:a16="http://schemas.microsoft.com/office/drawing/2014/main" id="{D29931C6-6818-970F-BA5D-7B179E5BFC6B}"/>
-                </a:ext>
-              </a:extLst>
-            </p:cNvPr>
-            <p:cNvSpPr/>
-            <p:nvPr/>
-          </p:nvSpPr>
-          <p:spPr>
-            <a:xfrm>
-              <a:off x="5172895" y="3942130"/>
-              <a:ext cx="461554" cy="455697"/>
-            </a:xfrm>
-            <a:prstGeom prst="rect">
-              <a:avLst/>
-            </a:prstGeom>
-            <a:solidFill>
-              <a:schemeClr val="tx1"/>
-            </a:solidFill>
-          </p:spPr>
-          <p:style>
-            <a:lnRef idx="2">
-              <a:schemeClr val="accent1">
-                <a:shade val="15000"/>
-              </a:schemeClr>
-            </a:lnRef>
-            <a:fillRef idx="1">
-              <a:schemeClr val="accent1"/>
-            </a:fillRef>
-            <a:effectRef idx="0">
-              <a:schemeClr val="accent1"/>
-            </a:effectRef>
-            <a:fontRef idx="minor">
-              <a:schemeClr val="lt1"/>
-            </a:fontRef>
-          </p:style>
-          <p:txBody>
-            <a:bodyPr rtlCol="0" anchor="ctr"/>
-            <a:lstStyle/>
-            <a:p>
-              <a:pPr algn="ctr"/>
-              <a:endParaRPr kumimoji="1" lang="ja-JP" altLang="en-US"/>
-            </a:p>
-          </p:txBody>
-        </p:sp>
-      </p:grpSp>
-      <p:sp>
-        <p:nvSpPr>
-          <p:cNvPr id="27" name="楕円 26">
-            <a:extLst>
-              <a:ext uri="{FF2B5EF4-FFF2-40B4-BE49-F238E27FC236}">
-                <a16:creationId xmlns:a16="http://schemas.microsoft.com/office/drawing/2014/main" id="{CB4FD8BC-D8D9-161D-1534-B453660066E8}"/>
-              </a:ext>
-            </a:extLst>
-          </p:cNvPr>
-          <p:cNvSpPr/>
-          <p:nvPr/>
-        </p:nvSpPr>
-        <p:spPr>
-          <a:xfrm>
-            <a:off x="2099852" y="3864429"/>
-            <a:ext cx="533398" cy="533398"/>
-          </a:xfrm>
-          <a:prstGeom prst="ellipse">
-            <a:avLst/>
-          </a:prstGeom>
-          <a:solidFill>
-            <a:schemeClr val="tx1"/>
-          </a:solidFill>
-        </p:spPr>
-        <p:style>
-          <a:lnRef idx="2">
-            <a:schemeClr val="accent1">
-              <a:shade val="15000"/>
-            </a:schemeClr>
-          </a:lnRef>
-          <a:fillRef idx="1">
-            <a:schemeClr val="accent1"/>
-          </a:fillRef>
-          <a:effectRef idx="0">
-            <a:schemeClr val="accent1"/>
-          </a:effectRef>
-          <a:fontRef idx="minor">
-            <a:schemeClr val="lt1"/>
-          </a:fontRef>
-        </p:style>
-        <p:txBody>
-          <a:bodyPr rtlCol="0" anchor="ctr"/>
-          <a:lstStyle/>
-          <a:p>
-            <a:pPr algn="ctr"/>
-            <a:endParaRPr kumimoji="1" lang="ja-JP" altLang="en-US"/>
-          </a:p>
-        </p:txBody>
-      </p:sp>
-      <p:sp>
-        <p:nvSpPr>
-          <p:cNvPr id="28" name="二等辺三角形 27">
-            <a:extLst>
-              <a:ext uri="{FF2B5EF4-FFF2-40B4-BE49-F238E27FC236}">
-                <a16:creationId xmlns:a16="http://schemas.microsoft.com/office/drawing/2014/main" id="{3FE458FA-4770-28F0-61FE-9DF0BD3AB72E}"/>
-              </a:ext>
-            </a:extLst>
-          </p:cNvPr>
-          <p:cNvSpPr/>
-          <p:nvPr/>
-        </p:nvSpPr>
-        <p:spPr>
-          <a:xfrm>
-            <a:off x="1994271" y="4223657"/>
-            <a:ext cx="748941" cy="696686"/>
-          </a:xfrm>
-          <a:prstGeom prst="triangle">
-            <a:avLst>
-              <a:gd name="adj" fmla="val 52786"/>
-            </a:avLst>
-          </a:prstGeom>
-          <a:solidFill>
-            <a:schemeClr val="tx1"/>
-          </a:solidFill>
-        </p:spPr>
-        <p:style>
-          <a:lnRef idx="2">
-            <a:schemeClr val="accent1">
-              <a:shade val="15000"/>
-            </a:schemeClr>
-          </a:lnRef>
-          <a:fillRef idx="1">
-            <a:schemeClr val="accent1"/>
-          </a:fillRef>
-          <a:effectRef idx="0">
-            <a:schemeClr val="accent1"/>
-          </a:effectRef>
-          <a:fontRef idx="minor">
-            <a:schemeClr val="lt1"/>
-          </a:fontRef>
-        </p:style>
-        <p:txBody>
-          <a:bodyPr rtlCol="0" anchor="ctr"/>
-          <a:lstStyle/>
-          <a:p>
-            <a:pPr algn="ctr"/>
-            <a:endParaRPr kumimoji="1" lang="ja-JP" altLang="en-US"/>
-          </a:p>
-        </p:txBody>
-      </p:sp>
-      <p:sp>
-        <p:nvSpPr>
-          <p:cNvPr id="29" name="矢印: 下 28">
-            <a:extLst>
-              <a:ext uri="{FF2B5EF4-FFF2-40B4-BE49-F238E27FC236}">
-                <a16:creationId xmlns:a16="http://schemas.microsoft.com/office/drawing/2014/main" id="{FCCCC438-667F-98DC-D3B4-04176CEBB071}"/>
-              </a:ext>
-            </a:extLst>
-          </p:cNvPr>
-          <p:cNvSpPr/>
-          <p:nvPr/>
-        </p:nvSpPr>
-        <p:spPr>
-          <a:xfrm rot="16200000">
-            <a:off x="2612234" y="4349592"/>
-            <a:ext cx="455697" cy="489858"/>
-          </a:xfrm>
-          <a:prstGeom prst="downArrow">
-            <a:avLst/>
-          </a:prstGeom>
-          <a:solidFill>
-            <a:schemeClr val="tx1"/>
-          </a:solidFill>
-        </p:spPr>
-        <p:style>
-          <a:lnRef idx="2">
-            <a:schemeClr val="accent1">
-              <a:shade val="15000"/>
-            </a:schemeClr>
-          </a:lnRef>
-          <a:fillRef idx="1">
-            <a:schemeClr val="accent1"/>
-          </a:fillRef>
-          <a:effectRef idx="0">
-            <a:schemeClr val="accent1"/>
-          </a:effectRef>
-          <a:fontRef idx="minor">
-            <a:schemeClr val="lt1"/>
-          </a:fontRef>
-        </p:style>
-        <p:txBody>
-          <a:bodyPr rtlCol="0" anchor="ctr"/>
-          <a:lstStyle/>
-          <a:p>
-            <a:pPr algn="ctr"/>
-            <a:endParaRPr kumimoji="1" lang="ja-JP" altLang="en-US"/>
-          </a:p>
-        </p:txBody>
-      </p:sp>
-      <p:sp>
-        <p:nvSpPr>
-          <p:cNvPr id="30" name="楕円 29">
-            <a:extLst>
-              <a:ext uri="{FF2B5EF4-FFF2-40B4-BE49-F238E27FC236}">
-                <a16:creationId xmlns:a16="http://schemas.microsoft.com/office/drawing/2014/main" id="{AA6B4544-3CB2-851D-E8D8-146FC989BE0A}"/>
-              </a:ext>
-            </a:extLst>
-          </p:cNvPr>
-          <p:cNvSpPr/>
-          <p:nvPr/>
-        </p:nvSpPr>
-        <p:spPr>
-          <a:xfrm>
-            <a:off x="7193283" y="1758673"/>
-            <a:ext cx="533398" cy="533398"/>
-          </a:xfrm>
-          <a:prstGeom prst="ellipse">
-            <a:avLst/>
-          </a:prstGeom>
-          <a:solidFill>
-            <a:schemeClr val="tx1"/>
-          </a:solidFill>
-        </p:spPr>
-        <p:style>
-          <a:lnRef idx="2">
-            <a:schemeClr val="accent1">
-              <a:shade val="15000"/>
-            </a:schemeClr>
-          </a:lnRef>
-          <a:fillRef idx="1">
-            <a:schemeClr val="accent1"/>
-          </a:fillRef>
-          <a:effectRef idx="0">
-            <a:schemeClr val="accent1"/>
-          </a:effectRef>
-          <a:fontRef idx="minor">
-            <a:schemeClr val="lt1"/>
-          </a:fontRef>
-        </p:style>
-        <p:txBody>
-          <a:bodyPr rtlCol="0" anchor="ctr"/>
-          <a:lstStyle/>
-          <a:p>
-            <a:pPr algn="ctr"/>
-            <a:endParaRPr kumimoji="1" lang="ja-JP" altLang="en-US"/>
-          </a:p>
-        </p:txBody>
-      </p:sp>
-      <p:sp>
-        <p:nvSpPr>
-          <p:cNvPr id="31" name="楕円 30">
-            <a:extLst>
-              <a:ext uri="{FF2B5EF4-FFF2-40B4-BE49-F238E27FC236}">
-                <a16:creationId xmlns:a16="http://schemas.microsoft.com/office/drawing/2014/main" id="{5678072E-CCA9-956B-81FC-B0CA4A014EEC}"/>
-              </a:ext>
-            </a:extLst>
-          </p:cNvPr>
-          <p:cNvSpPr/>
-          <p:nvPr/>
-        </p:nvSpPr>
-        <p:spPr>
-          <a:xfrm>
-            <a:off x="8426628" y="3287366"/>
-            <a:ext cx="533398" cy="533398"/>
-          </a:xfrm>
-          <a:prstGeom prst="ellipse">
-            <a:avLst/>
-          </a:prstGeom>
-          <a:solidFill>
-            <a:schemeClr val="tx1"/>
-          </a:solidFill>
-        </p:spPr>
-        <p:style>
-          <a:lnRef idx="2">
-            <a:schemeClr val="accent1">
-              <a:shade val="15000"/>
-            </a:schemeClr>
-          </a:lnRef>
-          <a:fillRef idx="1">
-            <a:schemeClr val="accent1"/>
-          </a:fillRef>
-          <a:effectRef idx="0">
-            <a:schemeClr val="accent1"/>
-          </a:effectRef>
-          <a:fontRef idx="minor">
-            <a:schemeClr val="lt1"/>
-          </a:fontRef>
-        </p:style>
-        <p:txBody>
-          <a:bodyPr rtlCol="0" anchor="ctr"/>
-          <a:lstStyle/>
-          <a:p>
-            <a:pPr algn="ctr"/>
-            <a:endParaRPr kumimoji="1" lang="ja-JP" altLang="en-US"/>
-          </a:p>
-        </p:txBody>
-      </p:sp>
-    </p:spTree>
-    <p:extLst>
-      <p:ext uri="{BB962C8B-B14F-4D97-AF65-F5344CB8AC3E}">
-        <p14:creationId xmlns:p14="http://schemas.microsoft.com/office/powerpoint/2010/main" val="1701843257"/>
-      </p:ext>
-    </p:extLst>
-  </p:cSld>
-  <p:clrMapOvr>
-    <a:masterClrMapping/>
-  </p:clrMapOvr>
-  <p:transition spd="slow" advClick="0">
-    <p:fade thruBlk="1"/>
-  </p:transition>
-</p:sld>
-</file>
-
-<file path=ppt/slides/slide6.xml><?xml version="1.0" encoding="utf-8"?>
-<p:sld xmlns:a="http://schemas.openxmlformats.org/drawingml/2006/main" xmlns:r="http://schemas.openxmlformats.org/officeDocument/2006/relationships" xmlns:p="http://schemas.openxmlformats.org/presentationml/2006/main">
-  <p:cSld>
-    <p:spTree>
-      <p:nvGrpSpPr>
-        <p:cNvPr id="1" name=""/>
-        <p:cNvGrpSpPr/>
-        <p:nvPr/>
-      </p:nvGrpSpPr>
-      <p:grpSpPr>
-        <a:xfrm>
-          <a:off x="0" y="0"/>
-          <a:ext cx="0" cy="0"/>
-          <a:chOff x="0" y="0"/>
-          <a:chExt cx="0" cy="0"/>
-        </a:xfrm>
-      </p:grpSpPr>
-      <p:sp>
-        <p:nvSpPr>
-          <p:cNvPr id="2" name="テキスト ボックス 1">
-            <a:extLst>
-              <a:ext uri="{FF2B5EF4-FFF2-40B4-BE49-F238E27FC236}">
-                <a16:creationId xmlns:a16="http://schemas.microsoft.com/office/drawing/2014/main" id="{4CE7A60F-DFD4-7C8A-01B0-5803F76E3427}"/>
-              </a:ext>
-            </a:extLst>
-          </p:cNvPr>
-          <p:cNvSpPr txBox="1"/>
-          <p:nvPr/>
-        </p:nvSpPr>
-        <p:spPr>
-          <a:xfrm>
-            <a:off x="218628" y="306150"/>
-            <a:ext cx="2425959" cy="369332"/>
-          </a:xfrm>
-          <a:prstGeom prst="rect">
-            <a:avLst/>
-          </a:prstGeom>
-          <a:noFill/>
-        </p:spPr>
-        <p:txBody>
-          <a:bodyPr wrap="square" rtlCol="0">
-            <a:spAutoFit/>
-          </a:bodyPr>
-          <a:lstStyle/>
-          <a:p>
-            <a:r>
-              <a:rPr kumimoji="1" lang="ja-JP" altLang="en-US" dirty="0"/>
-              <a:t>必殺技　概要</a:t>
-            </a:r>
-          </a:p>
-        </p:txBody>
-      </p:sp>
-      <p:sp>
-        <p:nvSpPr>
-          <p:cNvPr id="3" name="テキスト ボックス 2">
-            <a:extLst>
-              <a:ext uri="{FF2B5EF4-FFF2-40B4-BE49-F238E27FC236}">
-                <a16:creationId xmlns:a16="http://schemas.microsoft.com/office/drawing/2014/main" id="{2B5BD5E2-D383-D8B9-8FA2-8C477CEED092}"/>
-              </a:ext>
-            </a:extLst>
-          </p:cNvPr>
-          <p:cNvSpPr txBox="1"/>
-          <p:nvPr/>
-        </p:nvSpPr>
-        <p:spPr>
-          <a:xfrm>
-            <a:off x="242595" y="793102"/>
-            <a:ext cx="7847045" cy="369332"/>
-          </a:xfrm>
-          <a:prstGeom prst="rect">
-            <a:avLst/>
-          </a:prstGeom>
-          <a:noFill/>
-        </p:spPr>
-        <p:txBody>
-          <a:bodyPr wrap="square" rtlCol="0">
-            <a:spAutoFit/>
-          </a:bodyPr>
-          <a:lstStyle/>
-          <a:p>
-            <a:r>
-              <a:rPr lang="ja-JP" altLang="en-US" dirty="0"/>
-              <a:t>発生後　無敵の強い攻撃　自動</a:t>
-            </a:r>
-            <a:r>
-              <a:rPr lang="en-US" altLang="ja-JP" dirty="0"/>
-              <a:t>HIT</a:t>
-            </a:r>
-            <a:r>
-              <a:rPr lang="ja-JP" altLang="en-US" dirty="0"/>
-              <a:t>　必中</a:t>
-            </a:r>
-            <a:endParaRPr kumimoji="1" lang="en-US" altLang="ja-JP" dirty="0"/>
-          </a:p>
-        </p:txBody>
-      </p:sp>
-      <p:sp>
-        <p:nvSpPr>
-          <p:cNvPr id="5" name="テキスト ボックス 4">
-            <a:extLst>
-              <a:ext uri="{FF2B5EF4-FFF2-40B4-BE49-F238E27FC236}">
-                <a16:creationId xmlns:a16="http://schemas.microsoft.com/office/drawing/2014/main" id="{879BFEC1-67A9-0A0A-8480-F98BE5EBF864}"/>
-              </a:ext>
-            </a:extLst>
-          </p:cNvPr>
-          <p:cNvSpPr txBox="1"/>
-          <p:nvPr/>
-        </p:nvSpPr>
-        <p:spPr>
-          <a:xfrm>
-            <a:off x="242594" y="1397675"/>
-            <a:ext cx="11786760" cy="2031325"/>
-          </a:xfrm>
-          <a:prstGeom prst="rect">
-            <a:avLst/>
-          </a:prstGeom>
-          <a:noFill/>
-        </p:spPr>
-        <p:txBody>
-          <a:bodyPr wrap="square" rtlCol="0">
-            <a:spAutoFit/>
-          </a:bodyPr>
-          <a:lstStyle/>
-          <a:p>
-            <a:r>
-              <a:rPr kumimoji="1" lang="ja-JP" altLang="en-US" dirty="0"/>
-              <a:t>挙動</a:t>
-            </a:r>
-            <a:endParaRPr kumimoji="1" lang="en-US" altLang="ja-JP" dirty="0"/>
-          </a:p>
-          <a:p>
-            <a:endParaRPr lang="en-US" altLang="ja-JP" dirty="0"/>
-          </a:p>
-          <a:p>
-            <a:pPr marL="285750" indent="-285750">
-              <a:buFont typeface="Arial" panose="020B0604020202020204" pitchFamily="34" charset="0"/>
-              <a:buChar char="•"/>
-            </a:pPr>
-            <a:r>
-              <a:rPr kumimoji="1" lang="ja-JP" altLang="en-US" dirty="0"/>
-              <a:t>ジャンプの準備挙動　　　　　　この時間は攻撃が通り当たると必殺キャンセル　会うアニメションを探し中</a:t>
-            </a:r>
-            <a:endParaRPr kumimoji="1" lang="en-US" altLang="ja-JP" dirty="0"/>
-          </a:p>
-          <a:p>
-            <a:pPr marL="285750" indent="-285750">
-              <a:buFont typeface="Arial" panose="020B0604020202020204" pitchFamily="34" charset="0"/>
-              <a:buChar char="•"/>
-            </a:pPr>
-            <a:r>
-              <a:rPr lang="ja-JP" altLang="en-US" dirty="0"/>
-              <a:t>飛び上がり　　　　　　　　　　　　　　ここから敵の行動を停止</a:t>
-            </a:r>
-            <a:endParaRPr lang="en-US" altLang="ja-JP" dirty="0"/>
-          </a:p>
-          <a:p>
-            <a:pPr marL="285750" indent="-285750">
-              <a:buFont typeface="Arial" panose="020B0604020202020204" pitchFamily="34" charset="0"/>
-              <a:buChar char="•"/>
-            </a:pPr>
-            <a:r>
-              <a:rPr kumimoji="1" lang="ja-JP" altLang="en-US" dirty="0"/>
-              <a:t>空中で敵視点ぐらいからよる　　　　　　この時点で敵の上に移動</a:t>
-            </a:r>
-            <a:endParaRPr kumimoji="1" lang="en-US" altLang="ja-JP" dirty="0"/>
-          </a:p>
-          <a:p>
-            <a:pPr marL="285750" indent="-285750">
-              <a:buFont typeface="Arial" panose="020B0604020202020204" pitchFamily="34" charset="0"/>
-              <a:buChar char="•"/>
-            </a:pPr>
-            <a:r>
-              <a:rPr lang="ja-JP" altLang="en-US" dirty="0"/>
-              <a:t>敵めがけて動く　　　　攻撃とダメージが入る　ヒット時　点滅と拡大縮小　ダメージ　仮１００　通常４０</a:t>
-            </a:r>
-            <a:endParaRPr lang="en-US" altLang="ja-JP" dirty="0"/>
-          </a:p>
-          <a:p>
-            <a:pPr marL="285750" indent="-285750">
-              <a:buFont typeface="Arial" panose="020B0604020202020204" pitchFamily="34" charset="0"/>
-              <a:buChar char="•"/>
-            </a:pPr>
-            <a:r>
-              <a:rPr lang="ja-JP" altLang="en-US" dirty="0"/>
-              <a:t>定位置に戻り終わり　　敵は吹っ飛ぶ</a:t>
-            </a:r>
-            <a:endParaRPr lang="en-US" altLang="ja-JP" dirty="0"/>
-          </a:p>
-        </p:txBody>
-      </p:sp>
-      <p:sp>
-        <p:nvSpPr>
-          <p:cNvPr id="6" name="テキスト ボックス 5">
-            <a:extLst>
-              <a:ext uri="{FF2B5EF4-FFF2-40B4-BE49-F238E27FC236}">
-                <a16:creationId xmlns:a16="http://schemas.microsoft.com/office/drawing/2014/main" id="{8455609B-B179-8CCF-F7A0-30CA3EBEC491}"/>
-              </a:ext>
-            </a:extLst>
-          </p:cNvPr>
-          <p:cNvSpPr txBox="1"/>
-          <p:nvPr/>
-        </p:nvSpPr>
-        <p:spPr>
-          <a:xfrm>
-            <a:off x="162646" y="3479575"/>
-            <a:ext cx="6407454" cy="369332"/>
-          </a:xfrm>
-          <a:prstGeom prst="rect">
-            <a:avLst/>
-          </a:prstGeom>
-          <a:noFill/>
-        </p:spPr>
-        <p:txBody>
-          <a:bodyPr wrap="square" rtlCol="0">
-            <a:spAutoFit/>
-          </a:bodyPr>
-          <a:lstStyle/>
-          <a:p>
-            <a:r>
-              <a:rPr kumimoji="1" lang="ja-JP" altLang="en-US" dirty="0"/>
-              <a:t>所要時間　</a:t>
-            </a:r>
-            <a:r>
-              <a:rPr lang="ja-JP" altLang="en-US" dirty="0"/>
-              <a:t>４</a:t>
-            </a:r>
-            <a:r>
-              <a:rPr kumimoji="1" lang="ja-JP" altLang="en-US" dirty="0"/>
-              <a:t>秒程度　各　１</a:t>
-            </a:r>
-            <a:r>
-              <a:rPr kumimoji="1" lang="en-US" altLang="ja-JP" dirty="0"/>
-              <a:t>.</a:t>
-            </a:r>
-            <a:r>
-              <a:rPr kumimoji="1" lang="ja-JP" altLang="en-US" dirty="0"/>
-              <a:t>５</a:t>
-            </a:r>
-            <a:r>
-              <a:rPr kumimoji="1" lang="en-US" altLang="ja-JP" dirty="0"/>
-              <a:t>,</a:t>
-            </a:r>
-            <a:r>
-              <a:rPr kumimoji="1" lang="ja-JP" altLang="en-US" dirty="0"/>
-              <a:t>０</a:t>
-            </a:r>
-            <a:r>
-              <a:rPr kumimoji="1" lang="en-US" altLang="ja-JP" dirty="0"/>
-              <a:t>.</a:t>
-            </a:r>
-            <a:r>
-              <a:rPr kumimoji="1" lang="ja-JP" altLang="en-US" dirty="0"/>
-              <a:t>５</a:t>
-            </a:r>
-            <a:r>
-              <a:rPr kumimoji="1" lang="en-US" altLang="ja-JP" dirty="0"/>
-              <a:t>,1,</a:t>
-            </a:r>
-            <a:r>
-              <a:rPr kumimoji="1" lang="ja-JP" altLang="en-US" dirty="0"/>
-              <a:t>１</a:t>
-            </a:r>
-          </a:p>
-        </p:txBody>
-      </p:sp>
-      <p:sp>
-        <p:nvSpPr>
-          <p:cNvPr id="7" name="テキスト ボックス 6">
-            <a:extLst>
-              <a:ext uri="{FF2B5EF4-FFF2-40B4-BE49-F238E27FC236}">
-                <a16:creationId xmlns:a16="http://schemas.microsoft.com/office/drawing/2014/main" id="{9CEDE7C0-A716-9185-9B51-3631FCE11AEC}"/>
-              </a:ext>
-            </a:extLst>
-          </p:cNvPr>
-          <p:cNvSpPr txBox="1"/>
-          <p:nvPr/>
-        </p:nvSpPr>
-        <p:spPr>
-          <a:xfrm>
-            <a:off x="307910" y="4040155"/>
-            <a:ext cx="4086808" cy="646331"/>
-          </a:xfrm>
-          <a:prstGeom prst="rect">
-            <a:avLst/>
-          </a:prstGeom>
-          <a:noFill/>
-        </p:spPr>
-        <p:txBody>
-          <a:bodyPr wrap="square" rtlCol="0">
-            <a:spAutoFit/>
-          </a:bodyPr>
-          <a:lstStyle/>
-          <a:p>
-            <a:r>
-              <a:rPr kumimoji="1" lang="ja-JP" altLang="en-US" dirty="0"/>
-              <a:t>イメージ</a:t>
-            </a:r>
-            <a:endParaRPr kumimoji="1" lang="en-US" altLang="ja-JP" dirty="0"/>
-          </a:p>
-          <a:p>
-            <a:r>
-              <a:rPr lang="ja-JP" altLang="en-US" dirty="0"/>
-              <a:t>仮面ライダーのライダーキック</a:t>
-            </a:r>
-            <a:endParaRPr kumimoji="1" lang="ja-JP" altLang="en-US" dirty="0"/>
-          </a:p>
-        </p:txBody>
-      </p:sp>
-      <p:sp>
-        <p:nvSpPr>
-          <p:cNvPr id="8" name="テキスト ボックス 7">
-            <a:extLst>
-              <a:ext uri="{FF2B5EF4-FFF2-40B4-BE49-F238E27FC236}">
-                <a16:creationId xmlns:a16="http://schemas.microsoft.com/office/drawing/2014/main" id="{041B8081-C347-CE61-3CD0-C71E5AC104FD}"/>
-              </a:ext>
-            </a:extLst>
-          </p:cNvPr>
-          <p:cNvSpPr txBox="1"/>
-          <p:nvPr/>
-        </p:nvSpPr>
-        <p:spPr>
-          <a:xfrm>
-            <a:off x="300592" y="4877734"/>
-            <a:ext cx="6131561" cy="923330"/>
-          </a:xfrm>
-          <a:prstGeom prst="rect">
-            <a:avLst/>
-          </a:prstGeom>
-          <a:noFill/>
-        </p:spPr>
-        <p:txBody>
-          <a:bodyPr wrap="square" rtlCol="0">
-            <a:spAutoFit/>
-          </a:bodyPr>
-          <a:lstStyle/>
-          <a:p>
-            <a:r>
-              <a:rPr kumimoji="1" lang="ja-JP" altLang="en-US" dirty="0"/>
-              <a:t>発動条件</a:t>
-            </a:r>
-            <a:endParaRPr kumimoji="1" lang="en-US" altLang="ja-JP" dirty="0"/>
-          </a:p>
-          <a:p>
-            <a:r>
-              <a:rPr lang="en-US" altLang="ja-JP" dirty="0"/>
-              <a:t>G</a:t>
-            </a:r>
-            <a:r>
-              <a:rPr lang="ja-JP" altLang="en-US" dirty="0"/>
-              <a:t>キー　今後ゲージの実装やキーの変更をする予定 </a:t>
-            </a:r>
-            <a:endParaRPr lang="en-US" altLang="ja-JP" dirty="0"/>
-          </a:p>
-          <a:p>
-            <a:r>
-              <a:rPr lang="ja-JP" altLang="en-US" dirty="0"/>
-              <a:t>コントローラーは　</a:t>
-            </a:r>
-            <a:r>
-              <a:rPr lang="en-US" altLang="ja-JP" dirty="0"/>
-              <a:t>R</a:t>
-            </a:r>
-            <a:r>
-              <a:rPr lang="ja-JP" altLang="en-US" dirty="0"/>
-              <a:t>　予定</a:t>
-            </a:r>
-            <a:endParaRPr kumimoji="1" lang="ja-JP" altLang="en-US" dirty="0"/>
-          </a:p>
-        </p:txBody>
-      </p:sp>
-      <p:sp>
-        <p:nvSpPr>
-          <p:cNvPr id="9" name="テキスト ボックス 8">
-            <a:extLst>
-              <a:ext uri="{FF2B5EF4-FFF2-40B4-BE49-F238E27FC236}">
-                <a16:creationId xmlns:a16="http://schemas.microsoft.com/office/drawing/2014/main" id="{7DC0D889-37ED-EDA6-5AAE-BBAA905E33AF}"/>
-              </a:ext>
-            </a:extLst>
-          </p:cNvPr>
-          <p:cNvSpPr txBox="1"/>
-          <p:nvPr/>
-        </p:nvSpPr>
-        <p:spPr>
-          <a:xfrm>
-            <a:off x="307909" y="5807646"/>
-            <a:ext cx="9731830" cy="369332"/>
-          </a:xfrm>
-          <a:prstGeom prst="rect">
-            <a:avLst/>
-          </a:prstGeom>
-          <a:noFill/>
-        </p:spPr>
-        <p:txBody>
-          <a:bodyPr wrap="square" rtlCol="0">
-            <a:spAutoFit/>
-          </a:bodyPr>
-          <a:lstStyle/>
-          <a:p>
-            <a:r>
-              <a:rPr kumimoji="1" lang="ja-JP" altLang="en-US" dirty="0"/>
-              <a:t>メリット　敵を吹っ飛ばすので猶予ができる　</a:t>
-            </a:r>
-            <a:r>
-              <a:rPr kumimoji="1" lang="en-US" altLang="ja-JP" dirty="0"/>
-              <a:t>Hp</a:t>
-            </a:r>
-            <a:r>
-              <a:rPr kumimoji="1" lang="ja-JP" altLang="en-US" dirty="0"/>
-              <a:t>が低いとき回復の猶予　無敵　大ダメージ</a:t>
-            </a:r>
-          </a:p>
-        </p:txBody>
-      </p:sp>
-      <p:sp>
-        <p:nvSpPr>
-          <p:cNvPr id="4" name="テキスト ボックス 3">
-            <a:extLst>
-              <a:ext uri="{FF2B5EF4-FFF2-40B4-BE49-F238E27FC236}">
-                <a16:creationId xmlns:a16="http://schemas.microsoft.com/office/drawing/2014/main" id="{90B32E43-49A7-ABE1-1460-BD8244BDE826}"/>
-              </a:ext>
-            </a:extLst>
-          </p:cNvPr>
-          <p:cNvSpPr txBox="1"/>
-          <p:nvPr/>
-        </p:nvSpPr>
-        <p:spPr>
-          <a:xfrm>
-            <a:off x="307909" y="6275893"/>
-            <a:ext cx="5430418" cy="369332"/>
-          </a:xfrm>
-          <a:prstGeom prst="rect">
-            <a:avLst/>
-          </a:prstGeom>
-          <a:noFill/>
-        </p:spPr>
-        <p:txBody>
-          <a:bodyPr wrap="square" rtlCol="0">
-            <a:spAutoFit/>
-          </a:bodyPr>
-          <a:lstStyle/>
-          <a:p>
-            <a:r>
-              <a:rPr kumimoji="1" lang="ja-JP" altLang="en-US" dirty="0"/>
-              <a:t>デメリット　隙が多い　自分が動けない</a:t>
-            </a:r>
-          </a:p>
-        </p:txBody>
-      </p:sp>
-      <p:sp>
-        <p:nvSpPr>
-          <p:cNvPr id="10" name="テキスト ボックス 9">
-            <a:extLst>
-              <a:ext uri="{FF2B5EF4-FFF2-40B4-BE49-F238E27FC236}">
-                <a16:creationId xmlns:a16="http://schemas.microsoft.com/office/drawing/2014/main" id="{E2CDEF38-A04B-4DD5-527F-80FFFBDA20CC}"/>
-              </a:ext>
-            </a:extLst>
-          </p:cNvPr>
-          <p:cNvSpPr txBox="1"/>
-          <p:nvPr/>
-        </p:nvSpPr>
-        <p:spPr>
-          <a:xfrm>
-            <a:off x="6251510" y="3479575"/>
-            <a:ext cx="2258008" cy="369332"/>
-          </a:xfrm>
-          <a:prstGeom prst="rect">
-            <a:avLst/>
-          </a:prstGeom>
-          <a:noFill/>
-        </p:spPr>
-        <p:txBody>
-          <a:bodyPr wrap="square" rtlCol="0">
-            <a:spAutoFit/>
-          </a:bodyPr>
-          <a:lstStyle/>
-          <a:p>
-            <a:r>
-              <a:rPr kumimoji="1" lang="ja-JP" altLang="en-US" dirty="0"/>
-              <a:t>参考必殺技</a:t>
-            </a:r>
-          </a:p>
-        </p:txBody>
-      </p:sp>
-      <p:sp>
-        <p:nvSpPr>
-          <p:cNvPr id="14" name="テキスト ボックス 13">
-            <a:extLst>
-              <a:ext uri="{FF2B5EF4-FFF2-40B4-BE49-F238E27FC236}">
-                <a16:creationId xmlns:a16="http://schemas.microsoft.com/office/drawing/2014/main" id="{50B8177F-3A16-AAB8-1626-91DA975A75E6}"/>
-              </a:ext>
-            </a:extLst>
-          </p:cNvPr>
-          <p:cNvSpPr txBox="1"/>
-          <p:nvPr/>
-        </p:nvSpPr>
-        <p:spPr>
-          <a:xfrm>
-            <a:off x="6095999" y="3899482"/>
-            <a:ext cx="5569597" cy="646331"/>
-          </a:xfrm>
-          <a:prstGeom prst="rect">
-            <a:avLst/>
-          </a:prstGeom>
-          <a:noFill/>
-        </p:spPr>
-        <p:txBody>
-          <a:bodyPr wrap="square">
-            <a:spAutoFit/>
-          </a:bodyPr>
-          <a:lstStyle/>
-          <a:p>
-            <a:r>
-              <a:rPr lang="ja-JP" altLang="en-US" dirty="0">
-                <a:hlinkClick r:id="rId2"/>
-              </a:rPr>
-              <a:t>https://youtu.be/iE-ZEc6bkWs?si=FG2noyAuzwhMMODY&amp;t=977</a:t>
-            </a:r>
-            <a:endParaRPr lang="ja-JP" altLang="en-US" dirty="0"/>
-          </a:p>
-        </p:txBody>
-      </p:sp>
-      <p:sp>
-        <p:nvSpPr>
-          <p:cNvPr id="16" name="テキスト ボックス 15">
-            <a:extLst>
-              <a:ext uri="{FF2B5EF4-FFF2-40B4-BE49-F238E27FC236}">
-                <a16:creationId xmlns:a16="http://schemas.microsoft.com/office/drawing/2014/main" id="{E63BE89E-DDF3-04F6-5D0F-6D2759051D67}"/>
-              </a:ext>
-            </a:extLst>
-          </p:cNvPr>
-          <p:cNvSpPr txBox="1"/>
-          <p:nvPr/>
-        </p:nvSpPr>
-        <p:spPr>
-          <a:xfrm>
-            <a:off x="5931800" y="4604975"/>
-            <a:ext cx="6097554" cy="646331"/>
-          </a:xfrm>
-          <a:prstGeom prst="rect">
-            <a:avLst/>
-          </a:prstGeom>
-          <a:noFill/>
-        </p:spPr>
-        <p:txBody>
-          <a:bodyPr wrap="square">
-            <a:spAutoFit/>
-          </a:bodyPr>
-          <a:lstStyle/>
-          <a:p>
-            <a:r>
-              <a:rPr lang="ja-JP" altLang="en-US" dirty="0">
-                <a:hlinkClick r:id="rId3"/>
-              </a:rPr>
-              <a:t>https://youtu.be/5gzqQ1_PPHw?si=mggR05w2e9POMOOe&amp;t=50</a:t>
-            </a:r>
-            <a:endParaRPr lang="ja-JP" altLang="en-US" dirty="0"/>
-          </a:p>
-        </p:txBody>
-      </p:sp>
-    </p:spTree>
-    <p:extLst>
-      <p:ext uri="{BB962C8B-B14F-4D97-AF65-F5344CB8AC3E}">
-        <p14:creationId xmlns:p14="http://schemas.microsoft.com/office/powerpoint/2010/main" val="2502149341"/>
-      </p:ext>
-    </p:extLst>
-  </p:cSld>
-  <p:clrMapOvr>
-    <a:masterClrMapping/>
-  </p:clrMapOvr>
-  <p:transition spd="slow" advClick="0">
-    <p:fade thruBlk="1"/>
-  </p:transition>
-</p:sld>
-</file>
-
-<file path=ppt/slides/slide7.xml><?xml version="1.0" encoding="utf-8"?>
-<p:sld xmlns:a="http://schemas.openxmlformats.org/drawingml/2006/main" xmlns:r="http://schemas.openxmlformats.org/officeDocument/2006/relationships" xmlns:p="http://schemas.openxmlformats.org/presentationml/2006/main">
-  <p:cSld>
-    <p:spTree>
-      <p:nvGrpSpPr>
-        <p:cNvPr id="1" name=""/>
-        <p:cNvGrpSpPr/>
-        <p:nvPr/>
-      </p:nvGrpSpPr>
-      <p:grpSpPr>
-        <a:xfrm>
-          <a:off x="0" y="0"/>
-          <a:ext cx="0" cy="0"/>
-          <a:chOff x="0" y="0"/>
-          <a:chExt cx="0" cy="0"/>
-        </a:xfrm>
-      </p:grpSpPr>
-      <p:sp>
-        <p:nvSpPr>
-          <p:cNvPr id="2" name="正方形/長方形 1">
-            <a:extLst>
-              <a:ext uri="{FF2B5EF4-FFF2-40B4-BE49-F238E27FC236}">
-                <a16:creationId xmlns:a16="http://schemas.microsoft.com/office/drawing/2014/main" id="{335E1CB8-E728-0D6C-1199-ADF9C830F8BE}"/>
-              </a:ext>
-            </a:extLst>
-          </p:cNvPr>
-          <p:cNvSpPr/>
-          <p:nvPr/>
-        </p:nvSpPr>
-        <p:spPr>
-          <a:xfrm>
-            <a:off x="0" y="0"/>
-            <a:ext cx="12192000" cy="6858000"/>
-          </a:xfrm>
-          <a:prstGeom prst="rect">
-            <a:avLst/>
-          </a:prstGeom>
-          <a:solidFill>
-            <a:schemeClr val="tx1"/>
-          </a:solidFill>
-          <a:ln>
-            <a:solidFill>
-              <a:schemeClr val="tx1"/>
-            </a:solidFill>
-          </a:ln>
-        </p:spPr>
-        <p:style>
-          <a:lnRef idx="2">
-            <a:schemeClr val="accent1">
-              <a:shade val="15000"/>
-            </a:schemeClr>
-          </a:lnRef>
-          <a:fillRef idx="1">
-            <a:schemeClr val="accent1"/>
-          </a:fillRef>
-          <a:effectRef idx="0">
-            <a:schemeClr val="accent1"/>
-          </a:effectRef>
-          <a:fontRef idx="minor">
-            <a:schemeClr val="lt1"/>
-          </a:fontRef>
-        </p:style>
-        <p:txBody>
-          <a:bodyPr rtlCol="0" anchor="ctr"/>
-          <a:lstStyle/>
-          <a:p>
-            <a:pPr algn="ctr"/>
-            <a:endParaRPr kumimoji="1" lang="ja-JP" altLang="en-US"/>
-          </a:p>
-        </p:txBody>
-      </p:sp>
-      <p:sp>
-        <p:nvSpPr>
-          <p:cNvPr id="4" name="正方形/長方形 3">
-            <a:extLst>
-              <a:ext uri="{FF2B5EF4-FFF2-40B4-BE49-F238E27FC236}">
-                <a16:creationId xmlns:a16="http://schemas.microsoft.com/office/drawing/2014/main" id="{65D0E1D4-A7E4-6674-45EA-BE8E94FC0E73}"/>
-              </a:ext>
-            </a:extLst>
-          </p:cNvPr>
-          <p:cNvSpPr/>
-          <p:nvPr/>
-        </p:nvSpPr>
-        <p:spPr>
-          <a:xfrm>
-            <a:off x="271606" y="98492"/>
             <a:ext cx="2739853" cy="461665"/>
           </a:xfrm>
           <a:prstGeom prst="rect">
@@ -7967,7 +6743,7 @@
         </p:nvSpPr>
         <p:spPr>
           <a:xfrm>
-            <a:off x="0" y="0"/>
+            <a:off x="-106205" y="-15365"/>
             <a:ext cx="12192000" cy="6858000"/>
           </a:xfrm>
           <a:prstGeom prst="rect">
@@ -8064,7 +6840,7 @@
         <p:spPr>
           <a:xfrm>
             <a:off x="1781752" y="2082877"/>
-            <a:ext cx="3642344" cy="461665"/>
+            <a:ext cx="3334567" cy="461665"/>
           </a:xfrm>
           <a:prstGeom prst="rect">
             <a:avLst/>
@@ -8077,17 +6853,6 @@
           </a:bodyPr>
           <a:lstStyle/>
           <a:p>
-            <a:r>
-              <a:rPr lang="en-US" altLang="ja-JP" sz="2400" b="0" cap="none" spc="0" dirty="0">
-                <a:ln w="0"/>
-                <a:solidFill>
-                  <a:schemeClr val="bg1"/>
-                </a:solidFill>
-                <a:latin typeface="ＭＳ Ｐゴシック" panose="020B0600070205080204" pitchFamily="50" charset="-128"/>
-                <a:ea typeface="ＭＳ Ｐゴシック" panose="020B0600070205080204" pitchFamily="50" charset="-128"/>
-              </a:rPr>
-              <a:t>※</a:t>
-            </a:r>
             <a:r>
               <a:rPr lang="ja-JP" altLang="en-US" sz="2400" b="0" cap="none" spc="0" dirty="0">
                 <a:ln w="0"/>
@@ -8275,8 +7040,8 @@
         </p:nvSpPr>
         <p:spPr>
           <a:xfrm>
-            <a:off x="6096000" y="2172524"/>
-            <a:ext cx="5125955" cy="2893100"/>
+            <a:off x="6096000" y="4702516"/>
+            <a:ext cx="2978331" cy="461665"/>
           </a:xfrm>
           <a:prstGeom prst="rect">
             <a:avLst/>
@@ -8286,119 +7051,12 @@
           </a:solidFill>
         </p:spPr>
         <p:txBody>
-          <a:bodyPr wrap="none" lIns="91440" tIns="45720" rIns="91440" bIns="45720" anchor="t">
+          <a:bodyPr wrap="square" lIns="91440" tIns="45720" rIns="91440" bIns="45720" anchor="t">
             <a:spAutoFit/>
           </a:bodyPr>
           <a:lstStyle/>
           <a:p>
             <a:pPr algn="l"/>
-            <a:r>
-              <a:rPr lang="ja-JP" altLang="en-US" sz="1400" b="0" i="0" dirty="0">
-                <a:solidFill>
-                  <a:srgbClr val="FFFF00"/>
-                </a:solidFill>
-                <a:effectLst/>
-                <a:latin typeface="-apple-system"/>
-              </a:rPr>
-              <a:t>★これは確認用です、</a:t>
-            </a:r>
-            <a:r>
-              <a:rPr lang="en-US" altLang="ja-JP" sz="1400" b="0" i="0" dirty="0">
-                <a:solidFill>
-                  <a:srgbClr val="FFFF00"/>
-                </a:solidFill>
-                <a:effectLst/>
-                <a:latin typeface="-apple-system"/>
-              </a:rPr>
-              <a:t>PPT</a:t>
-            </a:r>
-            <a:r>
-              <a:rPr lang="ja-JP" altLang="en-US" sz="1400" b="0" i="0" dirty="0">
-                <a:solidFill>
-                  <a:srgbClr val="FFFF00"/>
-                </a:solidFill>
-                <a:effectLst/>
-                <a:latin typeface="-apple-system"/>
-              </a:rPr>
-              <a:t>シートの構成から外してください</a:t>
-            </a:r>
-            <a:br>
-              <a:rPr lang="en-US" altLang="ja-JP" sz="2400" b="0" i="0" u="sng" dirty="0">
-                <a:solidFill>
-                  <a:schemeClr val="bg1"/>
-                </a:solidFill>
-                <a:effectLst/>
-                <a:latin typeface="-apple-system"/>
-              </a:rPr>
-            </a:br>
-            <a:br>
-              <a:rPr lang="en-US" altLang="ja-JP" sz="2400" b="0" i="0" u="sng" dirty="0">
-                <a:solidFill>
-                  <a:schemeClr val="bg1"/>
-                </a:solidFill>
-                <a:effectLst/>
-                <a:latin typeface="-apple-system"/>
-              </a:rPr>
-            </a:br>
-            <a:r>
-              <a:rPr lang="ja-JP" altLang="en-US" sz="2400" b="0" i="0" u="sng" dirty="0">
-                <a:solidFill>
-                  <a:schemeClr val="bg1"/>
-                </a:solidFill>
-                <a:effectLst/>
-                <a:latin typeface="-apple-system"/>
-              </a:rPr>
-              <a:t>・</a:t>
-            </a:r>
-            <a:r>
-              <a:rPr lang="en-US" altLang="ja-JP" sz="2400" u="sng" dirty="0">
-                <a:solidFill>
-                  <a:schemeClr val="bg1"/>
-                </a:solidFill>
-                <a:latin typeface="-apple-system"/>
-              </a:rPr>
-              <a:t>09</a:t>
-            </a:r>
-            <a:r>
-              <a:rPr lang="en-US" altLang="ja-JP" sz="2400" b="0" i="0" u="sng" dirty="0">
-                <a:solidFill>
-                  <a:schemeClr val="bg1"/>
-                </a:solidFill>
-                <a:effectLst/>
-                <a:latin typeface="-apple-system"/>
-              </a:rPr>
-              <a:t>/12(</a:t>
-            </a:r>
-            <a:r>
-              <a:rPr lang="ja-JP" altLang="en-US" sz="2400" b="0" i="0" u="sng" dirty="0">
-                <a:solidFill>
-                  <a:schemeClr val="bg1"/>
-                </a:solidFill>
-                <a:effectLst/>
-                <a:latin typeface="-apple-system"/>
-              </a:rPr>
-              <a:t>金</a:t>
-            </a:r>
-            <a:r>
-              <a:rPr lang="en-US" altLang="ja-JP" sz="2400" b="0" i="0" u="sng" dirty="0">
-                <a:solidFill>
-                  <a:schemeClr val="bg1"/>
-                </a:solidFill>
-                <a:effectLst/>
-                <a:latin typeface="-apple-system"/>
-              </a:rPr>
-              <a:t>)1</a:t>
-            </a:r>
-            <a:r>
-              <a:rPr lang="ja-JP" altLang="en-US" sz="2400" b="0" i="0" u="sng" dirty="0">
-                <a:solidFill>
-                  <a:schemeClr val="bg1"/>
-                </a:solidFill>
-                <a:effectLst/>
-                <a:latin typeface="-apple-system"/>
-              </a:rPr>
-              <a:t>次審査作品提出</a:t>
-            </a:r>
             <a:endParaRPr lang="ja-JP" altLang="en-US" sz="2400" b="0" i="0" dirty="0">
               <a:solidFill>
                 <a:schemeClr val="bg1"/>
@@ -8406,344 +7064,6 @@
               <a:effectLst/>
               <a:latin typeface="-apple-system"/>
             </a:endParaRPr>
-          </a:p>
-          <a:p>
-            <a:pPr algn="l"/>
-            <a:r>
-              <a:rPr lang="ja-JP" altLang="en-US" sz="2400" b="0" i="0">
-                <a:solidFill>
-                  <a:srgbClr val="FF0000"/>
-                </a:solidFill>
-                <a:effectLst/>
-                <a:latin typeface="-apple-system"/>
-                <a:ea typeface="游ゴシック"/>
-              </a:rPr>
-              <a:t>・</a:t>
-            </a:r>
-            <a:r>
-              <a:rPr lang="ja-JP" altLang="en-US" sz="2400">
-                <a:solidFill>
-                  <a:srgbClr val="FF0000"/>
-                </a:solidFill>
-                <a:latin typeface="-apple-system"/>
-                <a:ea typeface="游ゴシック"/>
-              </a:rPr>
-              <a:t>10</a:t>
-            </a:r>
-            <a:r>
-              <a:rPr lang="en-US" altLang="ja-JP" sz="2400" dirty="0">
-                <a:solidFill>
-                  <a:srgbClr val="FF0000"/>
-                </a:solidFill>
-                <a:latin typeface="-apple-system"/>
-                <a:ea typeface="游ゴシック"/>
-              </a:rPr>
-              <a:t>/01(</a:t>
-            </a:r>
-            <a:r>
-              <a:rPr lang="ja-JP" altLang="en-US" sz="2400" b="0" i="0">
-                <a:solidFill>
-                  <a:srgbClr val="FF0000"/>
-                </a:solidFill>
-                <a:effectLst/>
-                <a:latin typeface="-apple-system"/>
-                <a:ea typeface="游ゴシック"/>
-              </a:rPr>
-              <a:t>水</a:t>
-            </a:r>
-            <a:r>
-              <a:rPr lang="en-US" altLang="ja-JP" sz="2400" b="0" i="0" dirty="0">
-                <a:solidFill>
-                  <a:srgbClr val="FF0000"/>
-                </a:solidFill>
-                <a:effectLst/>
-                <a:latin typeface="-apple-system"/>
-                <a:ea typeface="游ゴシック"/>
-              </a:rPr>
-              <a:t>)1</a:t>
-            </a:r>
-            <a:r>
-              <a:rPr lang="ja-JP" altLang="en-US" sz="2400" b="0" i="0">
-                <a:solidFill>
-                  <a:srgbClr val="FF0000"/>
-                </a:solidFill>
-                <a:effectLst/>
-                <a:latin typeface="-apple-system"/>
-                <a:ea typeface="游ゴシック"/>
-              </a:rPr>
-              <a:t>次審査発表</a:t>
-            </a:r>
-          </a:p>
-          <a:p>
-            <a:pPr algn="l"/>
-            <a:r>
-              <a:rPr lang="ja-JP" altLang="en-US" sz="2400" b="0" i="0" u="sng" dirty="0">
-                <a:solidFill>
-                  <a:schemeClr val="bg1"/>
-                </a:solidFill>
-                <a:effectLst/>
-                <a:latin typeface="-apple-system"/>
-              </a:rPr>
-              <a:t>・</a:t>
-            </a:r>
-            <a:r>
-              <a:rPr lang="en-US" altLang="ja-JP" sz="2400" u="sng" dirty="0">
-                <a:solidFill>
-                  <a:schemeClr val="bg1"/>
-                </a:solidFill>
-                <a:latin typeface="-apple-system"/>
-              </a:rPr>
-              <a:t>10</a:t>
-            </a:r>
-            <a:r>
-              <a:rPr lang="en-US" altLang="ja-JP" sz="2400" b="0" i="0" u="sng" dirty="0">
-                <a:solidFill>
-                  <a:schemeClr val="bg1"/>
-                </a:solidFill>
-                <a:effectLst/>
-                <a:latin typeface="-apple-system"/>
-              </a:rPr>
-              <a:t>/24(</a:t>
-            </a:r>
-            <a:r>
-              <a:rPr lang="ja-JP" altLang="en-US" sz="2400" b="0" i="0" u="sng" dirty="0">
-                <a:solidFill>
-                  <a:schemeClr val="bg1"/>
-                </a:solidFill>
-                <a:effectLst/>
-                <a:latin typeface="-apple-system"/>
-              </a:rPr>
-              <a:t>金</a:t>
-            </a:r>
-            <a:r>
-              <a:rPr lang="en-US" altLang="ja-JP" sz="2400" b="0" i="0" u="sng" dirty="0">
-                <a:solidFill>
-                  <a:schemeClr val="bg1"/>
-                </a:solidFill>
-                <a:effectLst/>
-                <a:latin typeface="-apple-system"/>
-              </a:rPr>
-              <a:t>)2</a:t>
-            </a:r>
-            <a:r>
-              <a:rPr lang="ja-JP" altLang="en-US" sz="2400" b="0" i="0" u="sng" dirty="0">
-                <a:solidFill>
-                  <a:schemeClr val="bg1"/>
-                </a:solidFill>
-                <a:effectLst/>
-                <a:latin typeface="-apple-system"/>
-              </a:rPr>
-              <a:t>次審査作品提出</a:t>
-            </a:r>
-            <a:endParaRPr lang="ja-JP" altLang="en-US" sz="2400" b="0" i="0" dirty="0">
-              <a:solidFill>
-                <a:schemeClr val="bg1"/>
-              </a:solidFill>
-              <a:effectLst/>
-              <a:latin typeface="-apple-system"/>
-            </a:endParaRPr>
-          </a:p>
-          <a:p>
-            <a:pPr algn="l"/>
-            <a:r>
-              <a:rPr lang="ja-JP" altLang="en-US" sz="2400" b="0" i="0" dirty="0">
-                <a:solidFill>
-                  <a:srgbClr val="FF0000"/>
-                </a:solidFill>
-                <a:effectLst/>
-                <a:latin typeface="-apple-system"/>
-              </a:rPr>
-              <a:t>・</a:t>
-            </a:r>
-            <a:r>
-              <a:rPr lang="en-US" altLang="ja-JP" sz="2400" dirty="0">
-                <a:solidFill>
-                  <a:srgbClr val="FF0000"/>
-                </a:solidFill>
-                <a:latin typeface="-apple-system"/>
-              </a:rPr>
-              <a:t>11</a:t>
-            </a:r>
-            <a:r>
-              <a:rPr lang="en-US" altLang="ja-JP" sz="2400" b="0" i="0" dirty="0">
-                <a:solidFill>
-                  <a:srgbClr val="FF0000"/>
-                </a:solidFill>
-                <a:effectLst/>
-                <a:latin typeface="-apple-system"/>
-              </a:rPr>
-              <a:t>/05(</a:t>
-            </a:r>
-            <a:r>
-              <a:rPr lang="ja-JP" altLang="en-US" sz="2400" b="0" i="0" dirty="0">
-                <a:solidFill>
-                  <a:srgbClr val="FF0000"/>
-                </a:solidFill>
-                <a:effectLst/>
-                <a:latin typeface="-apple-system"/>
-              </a:rPr>
-              <a:t>水</a:t>
-            </a:r>
-            <a:r>
-              <a:rPr lang="en-US" altLang="ja-JP" sz="2400" b="0" i="0" dirty="0">
-                <a:solidFill>
-                  <a:srgbClr val="FF0000"/>
-                </a:solidFill>
-                <a:effectLst/>
-                <a:latin typeface="-apple-system"/>
-              </a:rPr>
-              <a:t>)2</a:t>
-            </a:r>
-            <a:r>
-              <a:rPr lang="ja-JP" altLang="en-US" sz="2400" b="0" i="0" dirty="0">
-                <a:solidFill>
-                  <a:srgbClr val="FF0000"/>
-                </a:solidFill>
-                <a:effectLst/>
-                <a:latin typeface="-apple-system"/>
-              </a:rPr>
-              <a:t>次審査発表</a:t>
-            </a:r>
-          </a:p>
-          <a:p>
-            <a:pPr algn="l"/>
-            <a:r>
-              <a:rPr lang="ja-JP" altLang="en-US" sz="2400" b="0" i="0" u="sng" dirty="0">
-                <a:solidFill>
-                  <a:schemeClr val="bg1"/>
-                </a:solidFill>
-                <a:effectLst/>
-                <a:latin typeface="-apple-system"/>
-              </a:rPr>
-              <a:t>・</a:t>
-            </a:r>
-            <a:r>
-              <a:rPr lang="en-US" altLang="ja-JP" sz="2400" u="sng" dirty="0">
-                <a:solidFill>
-                  <a:schemeClr val="bg1"/>
-                </a:solidFill>
-                <a:latin typeface="-apple-system"/>
-              </a:rPr>
-              <a:t>12</a:t>
-            </a:r>
-            <a:r>
-              <a:rPr lang="en-US" altLang="ja-JP" sz="2400" b="0" i="0" u="sng" dirty="0">
-                <a:solidFill>
-                  <a:schemeClr val="bg1"/>
-                </a:solidFill>
-                <a:effectLst/>
-                <a:latin typeface="-apple-system"/>
-              </a:rPr>
-              <a:t>/</a:t>
-            </a:r>
-            <a:r>
-              <a:rPr lang="en-US" altLang="ja-JP" sz="2400" u="sng" dirty="0">
-                <a:solidFill>
-                  <a:schemeClr val="bg1"/>
-                </a:solidFill>
-                <a:latin typeface="-apple-system"/>
-              </a:rPr>
-              <a:t>12</a:t>
-            </a:r>
-            <a:r>
-              <a:rPr lang="en-US" altLang="ja-JP" sz="2400" b="0" i="0" u="sng" dirty="0">
-                <a:solidFill>
-                  <a:schemeClr val="bg1"/>
-                </a:solidFill>
-                <a:effectLst/>
-                <a:latin typeface="-apple-system"/>
-              </a:rPr>
-              <a:t>(</a:t>
-            </a:r>
-            <a:r>
-              <a:rPr lang="ja-JP" altLang="en-US" sz="2400" b="0" i="0" u="sng" dirty="0">
-                <a:solidFill>
-                  <a:schemeClr val="bg1"/>
-                </a:solidFill>
-                <a:effectLst/>
-                <a:latin typeface="-apple-system"/>
-              </a:rPr>
-              <a:t>金</a:t>
-            </a:r>
-            <a:r>
-              <a:rPr lang="en-US" altLang="ja-JP" sz="2400" b="0" i="0" u="sng" dirty="0">
-                <a:solidFill>
-                  <a:schemeClr val="bg1"/>
-                </a:solidFill>
-                <a:effectLst/>
-                <a:latin typeface="-apple-system"/>
-              </a:rPr>
-              <a:t>)</a:t>
-            </a:r>
-            <a:r>
-              <a:rPr lang="ja-JP" altLang="en-US" sz="2400" b="0" i="0" u="sng" dirty="0">
-                <a:solidFill>
-                  <a:schemeClr val="bg1"/>
-                </a:solidFill>
-                <a:effectLst/>
-                <a:latin typeface="-apple-system"/>
-              </a:rPr>
-              <a:t>最終審査作品提出</a:t>
-            </a:r>
-            <a:endParaRPr lang="ja-JP" altLang="en-US" sz="2400" b="0" i="0" dirty="0">
-              <a:solidFill>
-                <a:schemeClr val="bg1"/>
-              </a:solidFill>
-              <a:effectLst/>
-              <a:latin typeface="-apple-system"/>
-            </a:endParaRPr>
-          </a:p>
-          <a:p>
-            <a:pPr algn="l"/>
-            <a:r>
-              <a:rPr lang="ja-JP" altLang="en-US" sz="2400" b="0" i="0" dirty="0">
-                <a:solidFill>
-                  <a:srgbClr val="FF0000"/>
-                </a:solidFill>
-                <a:effectLst/>
-                <a:latin typeface="-apple-system"/>
-              </a:rPr>
-              <a:t>・</a:t>
-            </a:r>
-            <a:r>
-              <a:rPr lang="en-US" altLang="ja-JP" sz="2400" b="0" i="0" dirty="0">
-                <a:solidFill>
-                  <a:srgbClr val="FF0000"/>
-                </a:solidFill>
-                <a:effectLst/>
-                <a:latin typeface="-apple-system"/>
-              </a:rPr>
-              <a:t>12/17(</a:t>
-            </a:r>
-            <a:r>
-              <a:rPr lang="ja-JP" altLang="en-US" sz="2400" dirty="0">
-                <a:solidFill>
-                  <a:srgbClr val="FF0000"/>
-                </a:solidFill>
-                <a:latin typeface="-apple-system"/>
-              </a:rPr>
-              <a:t>水</a:t>
-            </a:r>
-            <a:r>
-              <a:rPr lang="en-US" altLang="ja-JP" sz="2400" b="0" i="0" dirty="0">
-                <a:solidFill>
-                  <a:srgbClr val="FF0000"/>
-                </a:solidFill>
-                <a:effectLst/>
-                <a:latin typeface="-apple-system"/>
-              </a:rPr>
-              <a:t>)</a:t>
-            </a:r>
-            <a:r>
-              <a:rPr lang="ja-JP" altLang="en-US" sz="2400" b="0" i="0" dirty="0">
-                <a:solidFill>
-                  <a:srgbClr val="FF0000"/>
-                </a:solidFill>
-                <a:effectLst/>
-                <a:latin typeface="-apple-system"/>
-              </a:rPr>
-              <a:t>最終審査発表</a:t>
-            </a:r>
           </a:p>
         </p:txBody>
       </p:sp>
@@ -9059,17 +7379,6 @@
 </file>
 
 <file path=customXml/item1.xml><?xml version="1.0" encoding="utf-8"?>
-<p:properties xmlns:p="http://schemas.microsoft.com/office/2006/metadata/properties" xmlns:xsi="http://www.w3.org/2001/XMLSchema-instance" xmlns:pc="http://schemas.microsoft.com/office/infopath/2007/PartnerControls">
-  <documentManagement>
-    <lcf76f155ced4ddcb4097134ff3c332f xmlns="d7a2ea18-1ea4-4cd6-8c3e-626499c8f82b">
-      <Terms xmlns="http://schemas.microsoft.com/office/infopath/2007/PartnerControls"/>
-    </lcf76f155ced4ddcb4097134ff3c332f>
-    <TaxCatchAll xmlns="f08c68da-d145-4647-b7b0-41852d50ec21" xsi:nil="true"/>
-  </documentManagement>
-</p:properties>
-</file>
-
-<file path=customXml/item2.xml><?xml version="1.0" encoding="utf-8"?>
 <ct:contentTypeSchema xmlns:ct="http://schemas.microsoft.com/office/2006/metadata/contentType" xmlns:ma="http://schemas.microsoft.com/office/2006/metadata/properties/metaAttributes" ct:_="" ma:_="" ma:contentTypeName="ドキュメント" ma:contentTypeID="0x0101006DAA2143A7117C49B4C9F8590216C20F" ma:contentTypeVersion="12" ma:contentTypeDescription="新しいドキュメントを作成します。" ma:contentTypeScope="" ma:versionID="cc3aded7008bc64947a264f7acc5aa9e">
   <xsd:schema xmlns:xsd="http://www.w3.org/2001/XMLSchema" xmlns:xs="http://www.w3.org/2001/XMLSchema" xmlns:p="http://schemas.microsoft.com/office/2006/metadata/properties" xmlns:ns2="d7a2ea18-1ea4-4cd6-8c3e-626499c8f82b" xmlns:ns3="f08c68da-d145-4647-b7b0-41852d50ec21" targetNamespace="http://schemas.microsoft.com/office/2006/metadata/properties" ma:root="true" ma:fieldsID="4161c5e7a0c4f05f3e7f581073882928" ns2:_="" ns3:_="">
     <xsd:import namespace="d7a2ea18-1ea4-4cd6-8c3e-626499c8f82b"/>
@@ -9270,6 +7579,17 @@
 </ct:contentTypeSchema>
 </file>
 
+<file path=customXml/item2.xml><?xml version="1.0" encoding="utf-8"?>
+<p:properties xmlns:p="http://schemas.microsoft.com/office/2006/metadata/properties" xmlns:xsi="http://www.w3.org/2001/XMLSchema-instance" xmlns:pc="http://schemas.microsoft.com/office/infopath/2007/PartnerControls">
+  <documentManagement>
+    <lcf76f155ced4ddcb4097134ff3c332f xmlns="d7a2ea18-1ea4-4cd6-8c3e-626499c8f82b">
+      <Terms xmlns="http://schemas.microsoft.com/office/infopath/2007/PartnerControls"/>
+    </lcf76f155ced4ddcb4097134ff3c332f>
+    <TaxCatchAll xmlns="f08c68da-d145-4647-b7b0-41852d50ec21" xsi:nil="true"/>
+  </documentManagement>
+</p:properties>
+</file>
+
 <file path=customXml/item3.xml><?xml version="1.0" encoding="utf-8"?>
 <?mso-contentType ?>
 <FormTemplates xmlns="http://schemas.microsoft.com/sharepoint/v3/contenttype/forms">
@@ -9280,19 +7600,6 @@
 </file>
 
 <file path=customXml/itemProps1.xml><?xml version="1.0" encoding="utf-8"?>
-<ds:datastoreItem xmlns:ds="http://schemas.openxmlformats.org/officeDocument/2006/customXml" ds:itemID="{94561E12-DD42-4580-91AA-2E56B6F36D47}">
-  <ds:schemaRefs>
-    <ds:schemaRef ds:uri="http://schemas.microsoft.com/office/2006/metadata/properties"/>
-    <ds:schemaRef ds:uri="http://schemas.microsoft.com/office/infopath/2007/PartnerControls"/>
-    <ds:schemaRef ds:uri="7e320a98-111e-4df1-b565-db8f036c2c07"/>
-    <ds:schemaRef ds:uri="d5e75185-ab09-4bd5-a24e-9040de8604a3"/>
-    <ds:schemaRef ds:uri="d7a2ea18-1ea4-4cd6-8c3e-626499c8f82b"/>
-    <ds:schemaRef ds:uri="f08c68da-d145-4647-b7b0-41852d50ec21"/>
-  </ds:schemaRefs>
-</ds:datastoreItem>
-</file>
-
-<file path=customXml/itemProps2.xml><?xml version="1.0" encoding="utf-8"?>
 <ds:datastoreItem xmlns:ds="http://schemas.openxmlformats.org/officeDocument/2006/customXml" ds:itemID="{A68EAD39-B5C6-48C1-A06D-E3B75FEE4AC3}">
   <ds:schemaRefs>
     <ds:schemaRef ds:uri="http://schemas.microsoft.com/office/2006/metadata/contentType"/>
@@ -9311,6 +7618,19 @@
 </ds:datastoreItem>
 </file>
 
+<file path=customXml/itemProps2.xml><?xml version="1.0" encoding="utf-8"?>
+<ds:datastoreItem xmlns:ds="http://schemas.openxmlformats.org/officeDocument/2006/customXml" ds:itemID="{94561E12-DD42-4580-91AA-2E56B6F36D47}">
+  <ds:schemaRefs>
+    <ds:schemaRef ds:uri="http://schemas.microsoft.com/office/2006/metadata/properties"/>
+    <ds:schemaRef ds:uri="http://schemas.microsoft.com/office/infopath/2007/PartnerControls"/>
+    <ds:schemaRef ds:uri="7e320a98-111e-4df1-b565-db8f036c2c07"/>
+    <ds:schemaRef ds:uri="d5e75185-ab09-4bd5-a24e-9040de8604a3"/>
+    <ds:schemaRef ds:uri="d7a2ea18-1ea4-4cd6-8c3e-626499c8f82b"/>
+    <ds:schemaRef ds:uri="f08c68da-d145-4647-b7b0-41852d50ec21"/>
+  </ds:schemaRefs>
+</ds:datastoreItem>
+</file>
+
 <file path=customXml/itemProps3.xml><?xml version="1.0" encoding="utf-8"?>
 <ds:datastoreItem xmlns:ds="http://schemas.openxmlformats.org/officeDocument/2006/customXml" ds:itemID="{E8216681-D782-45CA-A4C0-F2540F3F281E}">
   <ds:schemaRefs>

--- a/概要書.pptx
+++ b/概要書.pptx
@@ -8,11 +8,9 @@
     <p:sldId id="315" r:id="rId5"/>
     <p:sldId id="331" r:id="rId6"/>
     <p:sldId id="319" r:id="rId7"/>
-    <p:sldId id="320" r:id="rId8"/>
-    <p:sldId id="343" r:id="rId9"/>
-    <p:sldId id="342" r:id="rId10"/>
-    <p:sldId id="340" r:id="rId11"/>
-    <p:sldId id="339" r:id="rId12"/>
+    <p:sldId id="343" r:id="rId8"/>
+    <p:sldId id="342" r:id="rId9"/>
+    <p:sldId id="344" r:id="rId10"/>
   </p:sldIdLst>
   <p:sldSz cx="12192000" cy="6858000"/>
   <p:notesSz cx="6858000" cy="9144000"/>
@@ -351,7 +349,7 @@
           <a:p>
             <a:fld id="{F2E66AB1-B6F6-4B6F-865F-BEB26A9FE76A}" type="datetimeFigureOut">
               <a:rPr kumimoji="1" lang="ja-JP" altLang="en-US" smtClean="0"/>
-              <a:t>2025/9/6</a:t>
+              <a:t>2025/9/12</a:t>
             </a:fld>
             <a:endParaRPr kumimoji="1" lang="ja-JP" altLang="en-US"/>
           </a:p>
@@ -584,7 +582,7 @@
           <a:p>
             <a:fld id="{F2E66AB1-B6F6-4B6F-865F-BEB26A9FE76A}" type="datetimeFigureOut">
               <a:rPr kumimoji="1" lang="ja-JP" altLang="en-US" smtClean="0"/>
-              <a:t>2025/9/6</a:t>
+              <a:t>2025/9/12</a:t>
             </a:fld>
             <a:endParaRPr kumimoji="1" lang="ja-JP" altLang="en-US"/>
           </a:p>
@@ -827,7 +825,7 @@
           <a:p>
             <a:fld id="{F2E66AB1-B6F6-4B6F-865F-BEB26A9FE76A}" type="datetimeFigureOut">
               <a:rPr kumimoji="1" lang="ja-JP" altLang="en-US" smtClean="0"/>
-              <a:t>2025/9/6</a:t>
+              <a:t>2025/9/12</a:t>
             </a:fld>
             <a:endParaRPr kumimoji="1" lang="ja-JP" altLang="en-US"/>
           </a:p>
@@ -1060,7 +1058,7 @@
           <a:p>
             <a:fld id="{F2E66AB1-B6F6-4B6F-865F-BEB26A9FE76A}" type="datetimeFigureOut">
               <a:rPr kumimoji="1" lang="ja-JP" altLang="en-US" smtClean="0"/>
-              <a:t>2025/9/6</a:t>
+              <a:t>2025/9/12</a:t>
             </a:fld>
             <a:endParaRPr kumimoji="1" lang="ja-JP" altLang="en-US"/>
           </a:p>
@@ -1338,7 +1336,7 @@
           <a:p>
             <a:fld id="{F2E66AB1-B6F6-4B6F-865F-BEB26A9FE76A}" type="datetimeFigureOut">
               <a:rPr kumimoji="1" lang="ja-JP" altLang="en-US" smtClean="0"/>
-              <a:t>2025/9/6</a:t>
+              <a:t>2025/9/12</a:t>
             </a:fld>
             <a:endParaRPr kumimoji="1" lang="ja-JP" altLang="en-US"/>
           </a:p>
@@ -1670,7 +1668,7 @@
           <a:p>
             <a:fld id="{F2E66AB1-B6F6-4B6F-865F-BEB26A9FE76A}" type="datetimeFigureOut">
               <a:rPr kumimoji="1" lang="ja-JP" altLang="en-US" smtClean="0"/>
-              <a:t>2025/9/6</a:t>
+              <a:t>2025/9/12</a:t>
             </a:fld>
             <a:endParaRPr kumimoji="1" lang="ja-JP" altLang="en-US"/>
           </a:p>
@@ -2149,7 +2147,7 @@
           <a:p>
             <a:fld id="{F2E66AB1-B6F6-4B6F-865F-BEB26A9FE76A}" type="datetimeFigureOut">
               <a:rPr kumimoji="1" lang="ja-JP" altLang="en-US" smtClean="0"/>
-              <a:t>2025/9/6</a:t>
+              <a:t>2025/9/12</a:t>
             </a:fld>
             <a:endParaRPr kumimoji="1" lang="ja-JP" altLang="en-US"/>
           </a:p>
@@ -2293,7 +2291,7 @@
           <a:p>
             <a:fld id="{F2E66AB1-B6F6-4B6F-865F-BEB26A9FE76A}" type="datetimeFigureOut">
               <a:rPr kumimoji="1" lang="ja-JP" altLang="en-US" smtClean="0"/>
-              <a:t>2025/9/6</a:t>
+              <a:t>2025/9/12</a:t>
             </a:fld>
             <a:endParaRPr kumimoji="1" lang="ja-JP" altLang="en-US"/>
           </a:p>
@@ -2409,7 +2407,7 @@
           <a:p>
             <a:fld id="{F2E66AB1-B6F6-4B6F-865F-BEB26A9FE76A}" type="datetimeFigureOut">
               <a:rPr kumimoji="1" lang="ja-JP" altLang="en-US" smtClean="0"/>
-              <a:t>2025/9/6</a:t>
+              <a:t>2025/9/12</a:t>
             </a:fld>
             <a:endParaRPr kumimoji="1" lang="ja-JP" altLang="en-US"/>
           </a:p>
@@ -2755,7 +2753,7 @@
           <a:p>
             <a:fld id="{F2E66AB1-B6F6-4B6F-865F-BEB26A9FE76A}" type="datetimeFigureOut">
               <a:rPr kumimoji="1" lang="ja-JP" altLang="en-US" smtClean="0"/>
-              <a:t>2025/9/6</a:t>
+              <a:t>2025/9/12</a:t>
             </a:fld>
             <a:endParaRPr kumimoji="1" lang="ja-JP" altLang="en-US"/>
           </a:p>
@@ -3046,7 +3044,7 @@
           <a:p>
             <a:fld id="{F2E66AB1-B6F6-4B6F-865F-BEB26A9FE76A}" type="datetimeFigureOut">
               <a:rPr kumimoji="1" lang="ja-JP" altLang="en-US" smtClean="0"/>
-              <a:t>2025/9/6</a:t>
+              <a:t>2025/9/12</a:t>
             </a:fld>
             <a:endParaRPr kumimoji="1" lang="ja-JP" altLang="en-US"/>
           </a:p>
@@ -3322,7 +3320,7 @@
           <a:p>
             <a:fld id="{F2E66AB1-B6F6-4B6F-865F-BEB26A9FE76A}" type="datetimeFigureOut">
               <a:rPr kumimoji="1" lang="ja-JP" altLang="en-US" smtClean="0"/>
-              <a:t>2025/9/6</a:t>
+              <a:t>2025/9/12</a:t>
             </a:fld>
             <a:endParaRPr kumimoji="1" lang="ja-JP" altLang="en-US"/>
           </a:p>
@@ -3810,8 +3808,8 @@
         </p:nvSpPr>
         <p:spPr>
           <a:xfrm>
-            <a:off x="4546280" y="3702208"/>
-            <a:ext cx="3262432" cy="461665"/>
+            <a:off x="3383300" y="3702208"/>
+            <a:ext cx="5588389" cy="461665"/>
           </a:xfrm>
           <a:prstGeom prst="rect">
             <a:avLst/>
@@ -3825,6 +3823,17 @@
           <a:lstStyle/>
           <a:p>
             <a:pPr algn="ctr"/>
+            <a:r>
+              <a:rPr lang="ja-JP" altLang="en-US" sz="2400" b="0" cap="none" spc="0" dirty="0">
+                <a:ln w="0"/>
+                <a:solidFill>
+                  <a:schemeClr val="bg1"/>
+                </a:solidFill>
+                <a:latin typeface="ＭＳ Ｐゴシック" panose="020B0600070205080204" pitchFamily="50" charset="-128"/>
+                <a:ea typeface="ＭＳ Ｐゴシック" panose="020B0600070205080204" pitchFamily="50" charset="-128"/>
+              </a:rPr>
+              <a:t>スーパーゲームクリエーター専攻</a:t>
+            </a:r>
             <a:r>
               <a:rPr lang="ja-JP" altLang="en-US" sz="2400" dirty="0">
                 <a:ln w="0"/>
@@ -3834,19 +3843,48 @@
                 <a:latin typeface="ＭＳ Ｐゴシック" panose="020B0600070205080204" pitchFamily="50" charset="-128"/>
                 <a:ea typeface="ＭＳ Ｐゴシック" panose="020B0600070205080204" pitchFamily="50" charset="-128"/>
               </a:rPr>
-              <a:t>〇〇〇</a:t>
-            </a:r>
-            <a:r>
-              <a:rPr lang="ja-JP" altLang="en-US" sz="2400" b="0" cap="none" spc="0" dirty="0">
-                <a:ln w="0"/>
-                <a:solidFill>
-                  <a:schemeClr val="bg1"/>
-                </a:solidFill>
-                <a:latin typeface="ＭＳ Ｐゴシック" panose="020B0600070205080204" pitchFamily="50" charset="-128"/>
-                <a:ea typeface="ＭＳ Ｐゴシック" panose="020B0600070205080204" pitchFamily="50" charset="-128"/>
-              </a:rPr>
-              <a:t>〇専攻</a:t>
-            </a:r>
+              <a:t>（４年制）</a:t>
+            </a:r>
+            <a:endParaRPr lang="ja-JP" altLang="en-US" sz="2400" b="0" cap="none" spc="0" dirty="0">
+              <a:ln w="0"/>
+              <a:solidFill>
+                <a:schemeClr val="bg1"/>
+              </a:solidFill>
+              <a:latin typeface="ＭＳ Ｐゴシック" panose="020B0600070205080204" pitchFamily="50" charset="-128"/>
+              <a:ea typeface="ＭＳ Ｐゴシック" panose="020B0600070205080204" pitchFamily="50" charset="-128"/>
+            </a:endParaRPr>
+          </a:p>
+        </p:txBody>
+      </p:sp>
+      <p:sp>
+        <p:nvSpPr>
+          <p:cNvPr id="2" name="正方形/長方形 1">
+            <a:extLst>
+              <a:ext uri="{FF2B5EF4-FFF2-40B4-BE49-F238E27FC236}">
+                <a16:creationId xmlns:a16="http://schemas.microsoft.com/office/drawing/2014/main" id="{E3B816E1-4915-D765-9C00-9C690638A063}"/>
+              </a:ext>
+            </a:extLst>
+          </p:cNvPr>
+          <p:cNvSpPr/>
+          <p:nvPr/>
+        </p:nvSpPr>
+        <p:spPr>
+          <a:xfrm>
+            <a:off x="5826277" y="4258729"/>
+            <a:ext cx="702436" cy="461665"/>
+          </a:xfrm>
+          <a:prstGeom prst="rect">
+            <a:avLst/>
+          </a:prstGeom>
+          <a:noFill/>
+        </p:spPr>
+        <p:txBody>
+          <a:bodyPr wrap="none" lIns="91440" tIns="45720" rIns="91440" bIns="45720">
+            <a:spAutoFit/>
+          </a:bodyPr>
+          <a:lstStyle/>
+          <a:p>
+            <a:pPr algn="ctr"/>
             <a:r>
               <a:rPr lang="ja-JP" altLang="en-US" sz="2400" dirty="0">
                 <a:ln w="0"/>
@@ -3856,7 +3894,7 @@
                 <a:latin typeface="ＭＳ Ｐゴシック" panose="020B0600070205080204" pitchFamily="50" charset="-128"/>
                 <a:ea typeface="ＭＳ Ｐゴシック" panose="020B0600070205080204" pitchFamily="50" charset="-128"/>
               </a:rPr>
-              <a:t>（〇年制）</a:t>
+              <a:t>３年</a:t>
             </a:r>
             <a:endParaRPr lang="ja-JP" altLang="en-US" sz="2400" b="0" cap="none" spc="0" dirty="0">
               <a:ln w="0"/>
@@ -3871,10 +3909,10 @@
       </p:sp>
       <p:sp>
         <p:nvSpPr>
-          <p:cNvPr id="2" name="正方形/長方形 1">
-            <a:extLst>
-              <a:ext uri="{FF2B5EF4-FFF2-40B4-BE49-F238E27FC236}">
-                <a16:creationId xmlns:a16="http://schemas.microsoft.com/office/drawing/2014/main" id="{E3B816E1-4915-D765-9C00-9C690638A063}"/>
+          <p:cNvPr id="6" name="正方形/長方形 5">
+            <a:extLst>
+              <a:ext uri="{FF2B5EF4-FFF2-40B4-BE49-F238E27FC236}">
+                <a16:creationId xmlns:a16="http://schemas.microsoft.com/office/drawing/2014/main" id="{659AB5F6-B64C-D44C-5371-023163173899}"/>
               </a:ext>
             </a:extLst>
           </p:cNvPr>
@@ -3883,8 +3921,8 @@
         </p:nvSpPr>
         <p:spPr>
           <a:xfrm>
-            <a:off x="5777385" y="4258729"/>
-            <a:ext cx="800219" cy="461665"/>
+            <a:off x="4398810" y="4910106"/>
+            <a:ext cx="3557384" cy="461665"/>
           </a:xfrm>
           <a:prstGeom prst="rect">
             <a:avLst/>
@@ -3907,58 +3945,7 @@
                 <a:latin typeface="ＭＳ Ｐゴシック" panose="020B0600070205080204" pitchFamily="50" charset="-128"/>
                 <a:ea typeface="ＭＳ Ｐゴシック" panose="020B0600070205080204" pitchFamily="50" charset="-128"/>
               </a:rPr>
-              <a:t>〇年</a:t>
-            </a:r>
-            <a:endParaRPr lang="ja-JP" altLang="en-US" sz="2400" b="0" cap="none" spc="0" dirty="0">
-              <a:ln w="0"/>
-              <a:solidFill>
-                <a:schemeClr val="bg1"/>
-              </a:solidFill>
-              <a:latin typeface="ＭＳ Ｐゴシック" panose="020B0600070205080204" pitchFamily="50" charset="-128"/>
-              <a:ea typeface="ＭＳ Ｐゴシック" panose="020B0600070205080204" pitchFamily="50" charset="-128"/>
-            </a:endParaRPr>
-          </a:p>
-        </p:txBody>
-      </p:sp>
-      <p:sp>
-        <p:nvSpPr>
-          <p:cNvPr id="6" name="正方形/長方形 5">
-            <a:extLst>
-              <a:ext uri="{FF2B5EF4-FFF2-40B4-BE49-F238E27FC236}">
-                <a16:creationId xmlns:a16="http://schemas.microsoft.com/office/drawing/2014/main" id="{659AB5F6-B64C-D44C-5371-023163173899}"/>
-              </a:ext>
-            </a:extLst>
-          </p:cNvPr>
-          <p:cNvSpPr/>
-          <p:nvPr/>
-        </p:nvSpPr>
-        <p:spPr>
-          <a:xfrm>
-            <a:off x="4320262" y="4910106"/>
-            <a:ext cx="3714479" cy="461665"/>
-          </a:xfrm>
-          <a:prstGeom prst="rect">
-            <a:avLst/>
-          </a:prstGeom>
-          <a:noFill/>
-        </p:spPr>
-        <p:txBody>
-          <a:bodyPr wrap="none" lIns="91440" tIns="45720" rIns="91440" bIns="45720">
-            <a:spAutoFit/>
-          </a:bodyPr>
-          <a:lstStyle/>
-          <a:p>
-            <a:pPr algn="ctr"/>
-            <a:r>
-              <a:rPr lang="ja-JP" altLang="en-US" sz="2400" dirty="0">
-                <a:ln w="0"/>
-                <a:solidFill>
-                  <a:schemeClr val="bg1"/>
-                </a:solidFill>
-                <a:latin typeface="ＭＳ Ｐゴシック" panose="020B0600070205080204" pitchFamily="50" charset="-128"/>
-                <a:ea typeface="ＭＳ Ｐゴシック" panose="020B0600070205080204" pitchFamily="50" charset="-128"/>
-              </a:rPr>
-              <a:t>滋慶　太郎（じけい　たろう）</a:t>
+              <a:t>又吉　諒（またよし　りょう）</a:t>
             </a:r>
             <a:endParaRPr lang="ja-JP" altLang="en-US" sz="2400" b="0" cap="none" spc="0" dirty="0">
               <a:ln w="0"/>
@@ -4036,8 +4023,8 @@
         </p:nvSpPr>
         <p:spPr>
           <a:xfrm>
-            <a:off x="4509409" y="1659458"/>
-            <a:ext cx="3336170" cy="461665"/>
+            <a:off x="4641656" y="1659458"/>
+            <a:ext cx="3071675" cy="461665"/>
           </a:xfrm>
           <a:prstGeom prst="rect">
             <a:avLst/>
@@ -4060,7 +4047,51 @@
                 <a:latin typeface="ＭＳ Ｐゴシック"/>
                 <a:ea typeface="ＭＳ Ｐゴシック"/>
               </a:rPr>
-              <a:t>作品タイトル「〇〇〇〇」</a:t>
+              <a:t>作品タイトル「</a:t>
+            </a:r>
+            <a:r>
+              <a:rPr lang="en-US" altLang="ja-JP" sz="2400" dirty="0">
+                <a:ln w="0"/>
+                <a:solidFill>
+                  <a:schemeClr val="bg1"/>
+                </a:solidFill>
+                <a:latin typeface="ＭＳ Ｐゴシック"/>
+                <a:ea typeface="ＭＳ Ｐゴシック"/>
+              </a:rPr>
+              <a:t>Kill</a:t>
+            </a:r>
+            <a:r>
+              <a:rPr lang="ja-JP" altLang="en-US" sz="2400" dirty="0">
+                <a:ln w="0"/>
+                <a:solidFill>
+                  <a:schemeClr val="bg1"/>
+                </a:solidFill>
+                <a:latin typeface="ＭＳ Ｐゴシック"/>
+                <a:ea typeface="ＭＳ Ｐゴシック"/>
+              </a:rPr>
+              <a:t>　</a:t>
+            </a:r>
+            <a:r>
+              <a:rPr lang="en-US" altLang="ja-JP" sz="2400" dirty="0">
+                <a:ln w="0"/>
+                <a:solidFill>
+                  <a:schemeClr val="bg1"/>
+                </a:solidFill>
+                <a:latin typeface="ＭＳ Ｐゴシック"/>
+                <a:ea typeface="ＭＳ Ｐゴシック"/>
+              </a:rPr>
+              <a:t>me</a:t>
+            </a:r>
+            <a:r>
+              <a:rPr lang="ja-JP" altLang="en-US" sz="2400" dirty="0">
+                <a:ln w="0"/>
+                <a:solidFill>
+                  <a:schemeClr val="bg1"/>
+                </a:solidFill>
+                <a:latin typeface="ＭＳ Ｐゴシック"/>
+                <a:ea typeface="ＭＳ Ｐゴシック"/>
+              </a:rPr>
+              <a:t>」</a:t>
             </a:r>
             <a:endParaRPr lang="ja-JP" altLang="en-US" sz="2400" b="0" cap="none" spc="0" dirty="0">
               <a:ln w="0"/>
@@ -4353,7 +4384,7 @@
         <p:spPr>
           <a:xfrm>
             <a:off x="448407" y="1371262"/>
-            <a:ext cx="2890535" cy="1938992"/>
+            <a:ext cx="3392275" cy="1938992"/>
           </a:xfrm>
           <a:prstGeom prst="rect">
             <a:avLst/>
@@ -4375,7 +4406,7 @@
                 <a:latin typeface="ＭＳ Ｐゴシック" panose="020B0600070205080204" pitchFamily="50" charset="-128"/>
                 <a:ea typeface="ＭＳ Ｐゴシック" panose="020B0600070205080204" pitchFamily="50" charset="-128"/>
               </a:rPr>
-              <a:t>・ジャンル</a:t>
+              <a:t>・ジャンル　アクション</a:t>
             </a:r>
             <a:br>
               <a:rPr lang="en-US" altLang="ja-JP" sz="2400" b="0" cap="none" spc="0" dirty="0">
@@ -4396,7 +4427,7 @@
                 <a:latin typeface="ＭＳ Ｐゴシック" panose="020B0600070205080204" pitchFamily="50" charset="-128"/>
                 <a:ea typeface="ＭＳ Ｐゴシック" panose="020B0600070205080204" pitchFamily="50" charset="-128"/>
               </a:rPr>
-              <a:t>・ユーザー層</a:t>
+              <a:t>・ユーザー層　２０代男性</a:t>
             </a:r>
             <a:br>
               <a:rPr lang="en-US" altLang="ja-JP" sz="2400" b="0" cap="none" spc="0" dirty="0">
@@ -4439,7 +4470,7 @@
                 <a:latin typeface="ＭＳ Ｐゴシック" panose="020B0600070205080204" pitchFamily="50" charset="-128"/>
                 <a:ea typeface="ＭＳ Ｐゴシック" panose="020B0600070205080204" pitchFamily="50" charset="-128"/>
               </a:rPr>
-              <a:t>ゲームの売り</a:t>
+              <a:t>ゲームの売り　</a:t>
             </a:r>
             <a:br>
               <a:rPr lang="en-US" altLang="ja-JP" sz="2400" b="0" cap="none" spc="0" dirty="0">
@@ -4471,7 +4502,29 @@
                 <a:latin typeface="ＭＳ Ｐゴシック" panose="020B0600070205080204" pitchFamily="50" charset="-128"/>
                 <a:ea typeface="ＭＳ Ｐゴシック" panose="020B0600070205080204" pitchFamily="50" charset="-128"/>
               </a:rPr>
-              <a:t>操作系</a:t>
+              <a:t>操作系 </a:t>
+            </a:r>
+            <a:r>
+              <a:rPr lang="en-US" altLang="ja-JP" sz="2400" dirty="0">
+                <a:ln w="0"/>
+                <a:solidFill>
+                  <a:schemeClr val="bg1"/>
+                </a:solidFill>
+                <a:latin typeface="ＭＳ Ｐゴシック" panose="020B0600070205080204" pitchFamily="50" charset="-128"/>
+                <a:ea typeface="ＭＳ Ｐゴシック" panose="020B0600070205080204" pitchFamily="50" charset="-128"/>
+              </a:rPr>
+              <a:t>WSAD </a:t>
+            </a:r>
+            <a:r>
+              <a:rPr lang="ja-JP" altLang="en-US" sz="2400" dirty="0">
+                <a:ln w="0"/>
+                <a:solidFill>
+                  <a:schemeClr val="bg1"/>
+                </a:solidFill>
+                <a:latin typeface="ＭＳ Ｐゴシック" panose="020B0600070205080204" pitchFamily="50" charset="-128"/>
+                <a:ea typeface="ＭＳ Ｐゴシック" panose="020B0600070205080204" pitchFamily="50" charset="-128"/>
+              </a:rPr>
+              <a:t>マウス</a:t>
             </a:r>
             <a:br>
               <a:rPr lang="en-US" altLang="ja-JP" sz="2400" b="0" cap="none" spc="0" dirty="0">
@@ -4489,7 +4542,7 @@
                 <a:latin typeface="ＭＳ Ｐゴシック"/>
                 <a:ea typeface="ＭＳ Ｐゴシック"/>
               </a:rPr>
-              <a:t>・作品の注目ポイント</a:t>
+              <a:t>・作品の注目ポイント　</a:t>
             </a:r>
           </a:p>
         </p:txBody>
@@ -4787,98 +4840,100 @@
           </a:p>
         </p:txBody>
       </p:sp>
-      <p:sp>
-        <p:nvSpPr>
-          <p:cNvPr id="6" name="正方形/長方形 5">
-            <a:extLst>
-              <a:ext uri="{FF2B5EF4-FFF2-40B4-BE49-F238E27FC236}">
-                <a16:creationId xmlns:a16="http://schemas.microsoft.com/office/drawing/2014/main" id="{1146F050-F258-92D7-916A-BFA03B60CECB}"/>
-              </a:ext>
-            </a:extLst>
-          </p:cNvPr>
-          <p:cNvSpPr/>
+      <p:pic>
+        <p:nvPicPr>
+          <p:cNvPr id="1026" name="Picture 2" descr="モンハンワイルズの発売日や対応機種、店舗・予約特典情報まとめ【モンスターハンターワイルズ】| 予約トップ10">
+            <a:extLst>
+              <a:ext uri="{FF2B5EF4-FFF2-40B4-BE49-F238E27FC236}">
+                <a16:creationId xmlns:a16="http://schemas.microsoft.com/office/drawing/2014/main" id="{6ECB09CC-B652-948E-DE0B-59AA75805F55}"/>
+              </a:ext>
+            </a:extLst>
+          </p:cNvPr>
+          <p:cNvPicPr>
+            <a:picLocks noChangeAspect="1" noChangeArrowheads="1"/>
+          </p:cNvPicPr>
           <p:nvPr/>
-        </p:nvSpPr>
-        <p:spPr>
+        </p:nvPicPr>
+        <p:blipFill>
+          <a:blip r:embed="rId2">
+            <a:extLst>
+              <a:ext uri="{28A0092B-C50C-407E-A947-70E740481C1C}">
+                <a14:useLocalDpi xmlns:a14="http://schemas.microsoft.com/office/drawing/2010/main" val="0"/>
+              </a:ext>
+            </a:extLst>
+          </a:blip>
+          <a:srcRect/>
+          <a:stretch>
+            <a:fillRect/>
+          </a:stretch>
+        </p:blipFill>
+        <p:spPr bwMode="auto">
           <a:xfrm>
-            <a:off x="6394704" y="2139510"/>
-            <a:ext cx="2221992" cy="2953512"/>
+            <a:off x="457199" y="2139510"/>
+            <a:ext cx="5321809" cy="3210585"/>
           </a:xfrm>
           <a:prstGeom prst="rect">
             <a:avLst/>
           </a:prstGeom>
+          <a:noFill/>
+          <a:extLst>
+            <a:ext uri="{909E8E84-426E-40DD-AFC4-6F175D3DCCD1}">
+              <a14:hiddenFill xmlns:a14="http://schemas.microsoft.com/office/drawing/2010/main">
+                <a:solidFill>
+                  <a:srgbClr val="FFFFFF"/>
+                </a:solidFill>
+              </a14:hiddenFill>
+            </a:ext>
+          </a:extLst>
         </p:spPr>
-        <p:style>
-          <a:lnRef idx="2">
-            <a:schemeClr val="accent1">
-              <a:shade val="15000"/>
-            </a:schemeClr>
-          </a:lnRef>
-          <a:fillRef idx="1">
-            <a:schemeClr val="accent1"/>
-          </a:fillRef>
-          <a:effectRef idx="0">
-            <a:schemeClr val="accent1"/>
-          </a:effectRef>
-          <a:fontRef idx="minor">
-            <a:schemeClr val="lt1"/>
-          </a:fontRef>
-        </p:style>
-        <p:txBody>
-          <a:bodyPr rtlCol="0" anchor="ctr"/>
-          <a:lstStyle/>
-          <a:p>
-            <a:pPr algn="ctr"/>
-            <a:endParaRPr kumimoji="1" lang="ja-JP" altLang="en-US"/>
-          </a:p>
-        </p:txBody>
-      </p:sp>
-      <p:sp>
-        <p:nvSpPr>
-          <p:cNvPr id="8" name="正方形/長方形 7">
-            <a:extLst>
-              <a:ext uri="{FF2B5EF4-FFF2-40B4-BE49-F238E27FC236}">
-                <a16:creationId xmlns:a16="http://schemas.microsoft.com/office/drawing/2014/main" id="{642F1ED3-69E0-6EFA-4FE0-20415B531E65}"/>
-              </a:ext>
-            </a:extLst>
-          </p:cNvPr>
-          <p:cNvSpPr/>
+      </p:pic>
+      <p:pic>
+        <p:nvPicPr>
+          <p:cNvPr id="1032" name="Picture 8" descr="ゼンゼロ】アカウント作成・データ共有のやり方">
+            <a:extLst>
+              <a:ext uri="{FF2B5EF4-FFF2-40B4-BE49-F238E27FC236}">
+                <a16:creationId xmlns:a16="http://schemas.microsoft.com/office/drawing/2014/main" id="{EE39953F-0CA3-CAD5-1C7C-6FCE11C8D703}"/>
+              </a:ext>
+            </a:extLst>
+          </p:cNvPr>
+          <p:cNvPicPr>
+            <a:picLocks noChangeAspect="1" noChangeArrowheads="1"/>
+          </p:cNvPicPr>
           <p:nvPr/>
-        </p:nvSpPr>
-        <p:spPr>
+        </p:nvPicPr>
+        <p:blipFill>
+          <a:blip r:embed="rId3">
+            <a:extLst>
+              <a:ext uri="{28A0092B-C50C-407E-A947-70E740481C1C}">
+                <a14:useLocalDpi xmlns:a14="http://schemas.microsoft.com/office/drawing/2010/main" val="0"/>
+              </a:ext>
+            </a:extLst>
+          </a:blip>
+          <a:srcRect/>
+          <a:stretch>
+            <a:fillRect/>
+          </a:stretch>
+        </p:blipFill>
+        <p:spPr bwMode="auto">
           <a:xfrm>
-            <a:off x="9354312" y="2139510"/>
-            <a:ext cx="2221992" cy="2953512"/>
+            <a:off x="7232917" y="2544703"/>
+            <a:ext cx="2020405" cy="2143125"/>
           </a:xfrm>
           <a:prstGeom prst="rect">
             <a:avLst/>
           </a:prstGeom>
+          <a:noFill/>
+          <a:extLst>
+            <a:ext uri="{909E8E84-426E-40DD-AFC4-6F175D3DCCD1}">
+              <a14:hiddenFill xmlns:a14="http://schemas.microsoft.com/office/drawing/2010/main">
+                <a:solidFill>
+                  <a:srgbClr val="FFFFFF"/>
+                </a:solidFill>
+              </a14:hiddenFill>
+            </a:ext>
+          </a:extLst>
         </p:spPr>
-        <p:style>
-          <a:lnRef idx="2">
-            <a:schemeClr val="accent1">
-              <a:shade val="15000"/>
-            </a:schemeClr>
-          </a:lnRef>
-          <a:fillRef idx="1">
-            <a:schemeClr val="accent1"/>
-          </a:fillRef>
-          <a:effectRef idx="0">
-            <a:schemeClr val="accent1"/>
-          </a:effectRef>
-          <a:fontRef idx="minor">
-            <a:schemeClr val="lt1"/>
-          </a:fontRef>
-        </p:style>
-        <p:txBody>
-          <a:bodyPr rtlCol="0" anchor="ctr"/>
-          <a:lstStyle/>
-          <a:p>
-            <a:pPr algn="ctr"/>
-            <a:endParaRPr kumimoji="1" lang="ja-JP" altLang="en-US"/>
-          </a:p>
-        </p:txBody>
-      </p:sp>
+      </p:pic>
     </p:spTree>
     <p:extLst>
       <p:ext uri="{BB962C8B-B14F-4D97-AF65-F5344CB8AC3E}">
@@ -4914,74 +4969,20 @@
       </p:grpSpPr>
       <p:sp>
         <p:nvSpPr>
-          <p:cNvPr id="2" name="正方形/長方形 1">
-            <a:extLst>
-              <a:ext uri="{FF2B5EF4-FFF2-40B4-BE49-F238E27FC236}">
-                <a16:creationId xmlns:a16="http://schemas.microsoft.com/office/drawing/2014/main" id="{335E1CB8-E728-0D6C-1199-ADF9C830F8BE}"/>
-              </a:ext>
-            </a:extLst>
-          </p:cNvPr>
-          <p:cNvSpPr/>
+          <p:cNvPr id="2" name="テキスト ボックス 1">
+            <a:extLst>
+              <a:ext uri="{FF2B5EF4-FFF2-40B4-BE49-F238E27FC236}">
+                <a16:creationId xmlns:a16="http://schemas.microsoft.com/office/drawing/2014/main" id="{2E93FB6D-AD3E-0DBB-DF24-2085D59CE313}"/>
+              </a:ext>
+            </a:extLst>
+          </p:cNvPr>
+          <p:cNvSpPr txBox="1"/>
           <p:nvPr/>
         </p:nvSpPr>
         <p:spPr>
           <a:xfrm>
-            <a:off x="0" y="0"/>
-            <a:ext cx="12192000" cy="6858000"/>
-          </a:xfrm>
-          <a:prstGeom prst="rect">
-            <a:avLst/>
-          </a:prstGeom>
-          <a:solidFill>
-            <a:schemeClr val="tx1"/>
-          </a:solidFill>
-          <a:ln>
-            <a:solidFill>
-              <a:schemeClr val="tx1"/>
-            </a:solidFill>
-          </a:ln>
-        </p:spPr>
-        <p:style>
-          <a:lnRef idx="2">
-            <a:schemeClr val="accent1">
-              <a:shade val="15000"/>
-            </a:schemeClr>
-          </a:lnRef>
-          <a:fillRef idx="1">
-            <a:schemeClr val="accent1"/>
-          </a:fillRef>
-          <a:effectRef idx="0">
-            <a:schemeClr val="accent1"/>
-          </a:effectRef>
-          <a:fontRef idx="minor">
-            <a:schemeClr val="lt1"/>
-          </a:fontRef>
-        </p:style>
-        <p:txBody>
-          <a:bodyPr rtlCol="0" anchor="ctr"/>
-          <a:lstStyle/>
-          <a:p>
-            <a:pPr algn="ctr"/>
-            <a:endParaRPr kumimoji="1" lang="ja-JP" altLang="en-US"/>
-          </a:p>
-        </p:txBody>
-      </p:sp>
-      <p:sp>
-        <p:nvSpPr>
-          <p:cNvPr id="4" name="正方形/長方形 3">
-            <a:extLst>
-              <a:ext uri="{FF2B5EF4-FFF2-40B4-BE49-F238E27FC236}">
-                <a16:creationId xmlns:a16="http://schemas.microsoft.com/office/drawing/2014/main" id="{65D0E1D4-A7E4-6674-45EA-BE8E94FC0E73}"/>
-              </a:ext>
-            </a:extLst>
-          </p:cNvPr>
-          <p:cNvSpPr/>
-          <p:nvPr/>
-        </p:nvSpPr>
-        <p:spPr>
-          <a:xfrm>
-            <a:off x="271606" y="98492"/>
-            <a:ext cx="2691763" cy="461665"/>
+            <a:off x="435429" y="269966"/>
+            <a:ext cx="3840480" cy="369332"/>
           </a:xfrm>
           <a:prstGeom prst="rect">
             <a:avLst/>
@@ -4989,98 +4990,34 @@
           <a:noFill/>
         </p:spPr>
         <p:txBody>
-          <a:bodyPr wrap="none" lIns="91440" tIns="45720" rIns="91440" bIns="45720">
+          <a:bodyPr wrap="square" rtlCol="0">
             <a:spAutoFit/>
           </a:bodyPr>
           <a:lstStyle/>
           <a:p>
             <a:r>
-              <a:rPr lang="ja-JP" altLang="en-US" sz="2400" dirty="0">
-                <a:ln w="0"/>
-                <a:solidFill>
-                  <a:schemeClr val="bg1"/>
-                </a:solidFill>
-                <a:latin typeface="ＭＳ Ｐゴシック" panose="020B0600070205080204" pitchFamily="50" charset="-128"/>
-                <a:ea typeface="ＭＳ Ｐゴシック" panose="020B0600070205080204" pitchFamily="50" charset="-128"/>
-              </a:rPr>
-              <a:t>ゲーム</a:t>
-            </a:r>
-            <a:r>
-              <a:rPr lang="ja-JP" altLang="en-US" sz="2400" b="0" cap="none" spc="0" dirty="0">
-                <a:ln w="0"/>
-                <a:solidFill>
-                  <a:schemeClr val="bg1"/>
-                </a:solidFill>
-                <a:latin typeface="ＭＳ Ｐゴシック" panose="020B0600070205080204" pitchFamily="50" charset="-128"/>
-                <a:ea typeface="ＭＳ Ｐゴシック" panose="020B0600070205080204" pitchFamily="50" charset="-128"/>
-              </a:rPr>
-              <a:t>タイトル画面</a:t>
-            </a:r>
-          </a:p>
-        </p:txBody>
-      </p:sp>
-      <p:sp>
-        <p:nvSpPr>
-          <p:cNvPr id="3" name="正方形/長方形 2">
-            <a:extLst>
-              <a:ext uri="{FF2B5EF4-FFF2-40B4-BE49-F238E27FC236}">
-                <a16:creationId xmlns:a16="http://schemas.microsoft.com/office/drawing/2014/main" id="{A297B050-AB7A-B0F6-4238-A1FFC172F6C9}"/>
-              </a:ext>
-            </a:extLst>
-          </p:cNvPr>
-          <p:cNvSpPr/>
+              <a:rPr kumimoji="1" lang="ja-JP" altLang="en-US" dirty="0"/>
+              <a:t>ゲーム概要</a:t>
+            </a:r>
+          </a:p>
+        </p:txBody>
+      </p:sp>
+      <p:sp>
+        <p:nvSpPr>
+          <p:cNvPr id="3" name="テキスト ボックス 2">
+            <a:extLst>
+              <a:ext uri="{FF2B5EF4-FFF2-40B4-BE49-F238E27FC236}">
+                <a16:creationId xmlns:a16="http://schemas.microsoft.com/office/drawing/2014/main" id="{E36F84EE-8FD3-C154-D35E-C46FC4E9C924}"/>
+              </a:ext>
+            </a:extLst>
+          </p:cNvPr>
+          <p:cNvSpPr txBox="1"/>
           <p:nvPr/>
         </p:nvSpPr>
         <p:spPr>
           <a:xfrm>
-            <a:off x="1158240" y="761128"/>
-            <a:ext cx="9875520" cy="5703483"/>
-          </a:xfrm>
-          <a:prstGeom prst="rect">
-            <a:avLst/>
-          </a:prstGeom>
-        </p:spPr>
-        <p:style>
-          <a:lnRef idx="2">
-            <a:schemeClr val="accent1">
-              <a:shade val="15000"/>
-            </a:schemeClr>
-          </a:lnRef>
-          <a:fillRef idx="1">
-            <a:schemeClr val="accent1"/>
-          </a:fillRef>
-          <a:effectRef idx="0">
-            <a:schemeClr val="accent1"/>
-          </a:effectRef>
-          <a:fontRef idx="minor">
-            <a:schemeClr val="lt1"/>
-          </a:fontRef>
-        </p:style>
-        <p:txBody>
-          <a:bodyPr rtlCol="0" anchor="ctr"/>
-          <a:lstStyle/>
-          <a:p>
-            <a:pPr algn="ctr"/>
-            <a:endParaRPr kumimoji="1" lang="ja-JP" altLang="en-US"/>
-          </a:p>
-        </p:txBody>
-      </p:sp>
-      <p:sp>
-        <p:nvSpPr>
-          <p:cNvPr id="5" name="正方形/長方形 4">
-            <a:extLst>
-              <a:ext uri="{FF2B5EF4-FFF2-40B4-BE49-F238E27FC236}">
-                <a16:creationId xmlns:a16="http://schemas.microsoft.com/office/drawing/2014/main" id="{B37E96B5-BFC4-CDDF-7AEE-C233556CA2B8}"/>
-              </a:ext>
-            </a:extLst>
-          </p:cNvPr>
-          <p:cNvSpPr/>
-          <p:nvPr/>
-        </p:nvSpPr>
-        <p:spPr>
-          <a:xfrm>
-            <a:off x="2261303" y="2318657"/>
-            <a:ext cx="7459639" cy="1569660"/>
+            <a:off x="513806" y="792480"/>
+            <a:ext cx="5695405" cy="4524315"/>
           </a:xfrm>
           <a:prstGeom prst="rect">
             <a:avLst/>
@@ -5088,116 +5025,152 @@
           <a:noFill/>
         </p:spPr>
         <p:txBody>
-          <a:bodyPr wrap="square" lIns="91440" tIns="45720" rIns="91440" bIns="45720">
+          <a:bodyPr wrap="square" rtlCol="0">
             <a:spAutoFit/>
           </a:bodyPr>
           <a:lstStyle/>
           <a:p>
-            <a:pPr algn="ctr"/>
-            <a:r>
-              <a:rPr lang="en-US" altLang="ja-JP" sz="9600" b="0" cap="none" spc="0" dirty="0">
-                <a:ln w="0"/>
-                <a:solidFill>
-                  <a:schemeClr val="tx1"/>
-                </a:solidFill>
-                <a:effectLst>
-                  <a:outerShdw blurRad="38100" dist="19050" dir="2700000" algn="tl" rotWithShape="0">
-                    <a:schemeClr val="dk1">
-                      <a:alpha val="40000"/>
-                    </a:schemeClr>
-                  </a:outerShdw>
-                </a:effectLst>
-                <a:latin typeface="Impact" panose="020B0806030902050204" pitchFamily="34" charset="0"/>
-              </a:rPr>
-              <a:t>FUKUOKATECH</a:t>
-            </a:r>
-            <a:endParaRPr lang="ja-JP" altLang="en-US" sz="9600" b="0" cap="none" spc="0" dirty="0">
-              <a:ln w="0"/>
-              <a:solidFill>
-                <a:schemeClr val="tx1"/>
-              </a:solidFill>
-              <a:effectLst>
-                <a:outerShdw blurRad="38100" dist="19050" dir="2700000" algn="tl" rotWithShape="0">
-                  <a:schemeClr val="dk1">
-                    <a:alpha val="40000"/>
-                  </a:schemeClr>
-                </a:outerShdw>
-              </a:effectLst>
-              <a:latin typeface="Impact" panose="020B0806030902050204" pitchFamily="34" charset="0"/>
-            </a:endParaRPr>
-          </a:p>
-        </p:txBody>
-      </p:sp>
-      <p:sp>
-        <p:nvSpPr>
-          <p:cNvPr id="7" name="正方形/長方形 6">
-            <a:extLst>
-              <a:ext uri="{FF2B5EF4-FFF2-40B4-BE49-F238E27FC236}">
-                <a16:creationId xmlns:a16="http://schemas.microsoft.com/office/drawing/2014/main" id="{BD6CD3CC-C6B4-EEB3-0021-FFA2A30C14B3}"/>
-              </a:ext>
-            </a:extLst>
-          </p:cNvPr>
-          <p:cNvSpPr/>
-          <p:nvPr/>
-        </p:nvSpPr>
-        <p:spPr>
-          <a:xfrm>
-            <a:off x="2261302" y="4234666"/>
-            <a:ext cx="7459639" cy="2185214"/>
-          </a:xfrm>
-          <a:prstGeom prst="rect">
-            <a:avLst/>
-          </a:prstGeom>
-          <a:noFill/>
-        </p:spPr>
-        <p:txBody>
-          <a:bodyPr wrap="square" lIns="91440" tIns="45720" rIns="91440" bIns="45720">
-            <a:spAutoFit/>
-          </a:bodyPr>
-          <a:lstStyle/>
-          <a:p>
-            <a:pPr algn="ctr"/>
-            <a:r>
-              <a:rPr lang="en-US" altLang="ja-JP" sz="3600" b="0" cap="none" spc="0" dirty="0">
-                <a:ln w="0"/>
-                <a:solidFill>
-                  <a:schemeClr val="tx1"/>
-                </a:solidFill>
-                <a:effectLst>
-                  <a:outerShdw blurRad="38100" dist="19050" dir="2700000" algn="tl" rotWithShape="0">
-                    <a:schemeClr val="dk1">
-                      <a:alpha val="40000"/>
-                    </a:schemeClr>
-                  </a:outerShdw>
-                </a:effectLst>
-                <a:latin typeface="Impact" panose="020B0806030902050204" pitchFamily="34" charset="0"/>
-              </a:rPr>
-              <a:t>PUSH START BUTTON</a:t>
-            </a:r>
-          </a:p>
-          <a:p>
-            <a:pPr algn="ctr"/>
-            <a:endParaRPr lang="ja-JP" altLang="en-US" sz="9600" b="0" cap="none" spc="0" dirty="0">
-              <a:ln w="0"/>
-              <a:solidFill>
-                <a:schemeClr val="tx1"/>
-              </a:solidFill>
-              <a:effectLst>
-                <a:outerShdw blurRad="38100" dist="19050" dir="2700000" algn="tl" rotWithShape="0">
-                  <a:schemeClr val="dk1">
-                    <a:alpha val="40000"/>
-                  </a:schemeClr>
-                </a:outerShdw>
-              </a:effectLst>
-              <a:latin typeface="Impact" panose="020B0806030902050204" pitchFamily="34" charset="0"/>
-            </a:endParaRPr>
+            <a:r>
+              <a:rPr kumimoji="1" lang="ja-JP" altLang="en-US" dirty="0"/>
+              <a:t>敵とプレイヤーの１対１　リングでの対決</a:t>
+            </a:r>
+            <a:endParaRPr kumimoji="1" lang="en-US" altLang="ja-JP" dirty="0"/>
+          </a:p>
+          <a:p>
+            <a:r>
+              <a:rPr lang="ja-JP" altLang="en-US" dirty="0"/>
+              <a:t>どちらかの</a:t>
+            </a:r>
+            <a:r>
+              <a:rPr lang="en-US" altLang="ja-JP" dirty="0"/>
+              <a:t>Hp</a:t>
+            </a:r>
+            <a:r>
+              <a:rPr lang="ja-JP" altLang="en-US" dirty="0"/>
+              <a:t>がなくなったら決着</a:t>
+            </a:r>
+            <a:endParaRPr lang="en-US" altLang="ja-JP" dirty="0"/>
+          </a:p>
+          <a:p>
+            <a:r>
+              <a:rPr lang="ja-JP" altLang="en-US" dirty="0"/>
+              <a:t>敵の攻撃を回避しながら攻撃</a:t>
+            </a:r>
+            <a:endParaRPr lang="en-US" altLang="ja-JP" dirty="0"/>
+          </a:p>
+          <a:p>
+            <a:endParaRPr lang="en-US" altLang="ja-JP" dirty="0"/>
+          </a:p>
+          <a:p>
+            <a:r>
+              <a:rPr lang="ja-JP" altLang="en-US" dirty="0"/>
+              <a:t>プレイヤーの行動　</a:t>
+            </a:r>
+            <a:endParaRPr lang="en-US" altLang="ja-JP" dirty="0"/>
+          </a:p>
+          <a:p>
+            <a:pPr marL="285750" indent="-285750">
+              <a:buFont typeface="Arial" panose="020B0604020202020204" pitchFamily="34" charset="0"/>
+              <a:buChar char="•"/>
+            </a:pPr>
+            <a:r>
+              <a:rPr lang="ja-JP" altLang="en-US" dirty="0"/>
+              <a:t>通常攻撃</a:t>
+            </a:r>
+            <a:endParaRPr lang="en-US" altLang="ja-JP" dirty="0"/>
+          </a:p>
+          <a:p>
+            <a:pPr marL="285750" indent="-285750">
+              <a:buFont typeface="Arial" panose="020B0604020202020204" pitchFamily="34" charset="0"/>
+              <a:buChar char="•"/>
+            </a:pPr>
+            <a:r>
+              <a:rPr lang="ja-JP" altLang="en-US" dirty="0"/>
+              <a:t>必殺技</a:t>
+            </a:r>
+            <a:endParaRPr lang="en-US" altLang="ja-JP" dirty="0"/>
+          </a:p>
+          <a:p>
+            <a:pPr marL="285750" indent="-285750">
+              <a:buFont typeface="Arial" panose="020B0604020202020204" pitchFamily="34" charset="0"/>
+              <a:buChar char="•"/>
+            </a:pPr>
+            <a:r>
+              <a:rPr lang="ja-JP" altLang="en-US" dirty="0"/>
+              <a:t>回避（追加予定）</a:t>
+            </a:r>
+            <a:endParaRPr lang="en-US" altLang="ja-JP" dirty="0"/>
+          </a:p>
+          <a:p>
+            <a:pPr marL="285750" indent="-285750">
+              <a:buFont typeface="Arial" panose="020B0604020202020204" pitchFamily="34" charset="0"/>
+              <a:buChar char="•"/>
+            </a:pPr>
+            <a:r>
+              <a:rPr lang="ja-JP" altLang="en-US" dirty="0"/>
+              <a:t>攻撃を</a:t>
+            </a:r>
+            <a:r>
+              <a:rPr lang="en-US" altLang="ja-JP" dirty="0"/>
+              <a:t>5</a:t>
+            </a:r>
+            <a:r>
+              <a:rPr lang="ja-JP" altLang="en-US" dirty="0"/>
+              <a:t>秒受けないとじょじょに回復</a:t>
+            </a:r>
+            <a:endParaRPr lang="en-US" altLang="ja-JP" dirty="0"/>
+          </a:p>
+          <a:p>
+            <a:pPr marL="285750" indent="-285750">
+              <a:buFont typeface="Arial" panose="020B0604020202020204" pitchFamily="34" charset="0"/>
+              <a:buChar char="•"/>
+            </a:pPr>
+            <a:endParaRPr lang="en-US" altLang="ja-JP" dirty="0"/>
+          </a:p>
+          <a:p>
+            <a:endParaRPr lang="en-US" altLang="ja-JP" dirty="0"/>
+          </a:p>
+          <a:p>
+            <a:r>
+              <a:rPr lang="ja-JP" altLang="en-US" dirty="0"/>
+              <a:t>敵の行動</a:t>
+            </a:r>
+            <a:endParaRPr lang="en-US" altLang="ja-JP" dirty="0"/>
+          </a:p>
+          <a:p>
+            <a:pPr marL="285750" indent="-285750">
+              <a:buFont typeface="Arial" panose="020B0604020202020204" pitchFamily="34" charset="0"/>
+              <a:buChar char="•"/>
+            </a:pPr>
+            <a:r>
+              <a:rPr lang="ja-JP" altLang="en-US" dirty="0"/>
+              <a:t>突進</a:t>
+            </a:r>
+            <a:endParaRPr lang="en-US" altLang="ja-JP" dirty="0"/>
+          </a:p>
+          <a:p>
+            <a:pPr marL="285750" indent="-285750">
+              <a:buFont typeface="Arial" panose="020B0604020202020204" pitchFamily="34" charset="0"/>
+              <a:buChar char="•"/>
+            </a:pPr>
+            <a:r>
+              <a:rPr lang="ja-JP" altLang="en-US" dirty="0"/>
+              <a:t>振り下ろし</a:t>
+            </a:r>
+            <a:endParaRPr lang="en-US" altLang="ja-JP" dirty="0"/>
+          </a:p>
+          <a:p>
+            <a:endParaRPr lang="en-US" altLang="ja-JP" dirty="0"/>
+          </a:p>
+          <a:p>
+            <a:endParaRPr kumimoji="1" lang="ja-JP" altLang="en-US" dirty="0"/>
           </a:p>
         </p:txBody>
       </p:sp>
     </p:spTree>
     <p:extLst>
       <p:ext uri="{BB962C8B-B14F-4D97-AF65-F5344CB8AC3E}">
-        <p14:creationId xmlns:p14="http://schemas.microsoft.com/office/powerpoint/2010/main" val="3755320463"/>
+        <p14:creationId xmlns:p14="http://schemas.microsoft.com/office/powerpoint/2010/main" val="3966911292"/>
       </p:ext>
     </p:extLst>
   </p:cSld>
@@ -5232,7 +5205,7 @@
           <p:cNvPr id="2" name="テキスト ボックス 1">
             <a:extLst>
               <a:ext uri="{FF2B5EF4-FFF2-40B4-BE49-F238E27FC236}">
-                <a16:creationId xmlns:a16="http://schemas.microsoft.com/office/drawing/2014/main" id="{2E93FB6D-AD3E-0DBB-DF24-2085D59CE313}"/>
+                <a16:creationId xmlns:a16="http://schemas.microsoft.com/office/drawing/2014/main" id="{4CE7A60F-DFD4-7C8A-01B0-5803F76E3427}"/>
               </a:ext>
             </a:extLst>
           </p:cNvPr>
@@ -5241,8 +5214,8 @@
         </p:nvSpPr>
         <p:spPr>
           <a:xfrm>
-            <a:off x="435429" y="269966"/>
-            <a:ext cx="3840480" cy="369332"/>
+            <a:off x="218628" y="306150"/>
+            <a:ext cx="2425959" cy="369332"/>
           </a:xfrm>
           <a:prstGeom prst="rect">
             <a:avLst/>
@@ -5257,7 +5230,7 @@
           <a:p>
             <a:r>
               <a:rPr kumimoji="1" lang="ja-JP" altLang="en-US" dirty="0"/>
-              <a:t>ゲーム概要</a:t>
+              <a:t>必殺技　概要</a:t>
             </a:r>
           </a:p>
         </p:txBody>
@@ -5267,7 +5240,7 @@
           <p:cNvPr id="3" name="テキスト ボックス 2">
             <a:extLst>
               <a:ext uri="{FF2B5EF4-FFF2-40B4-BE49-F238E27FC236}">
-                <a16:creationId xmlns:a16="http://schemas.microsoft.com/office/drawing/2014/main" id="{E36F84EE-8FD3-C154-D35E-C46FC4E9C924}"/>
+                <a16:creationId xmlns:a16="http://schemas.microsoft.com/office/drawing/2014/main" id="{2B5BD5E2-D383-D8B9-8FA2-8C477CEED092}"/>
               </a:ext>
             </a:extLst>
           </p:cNvPr>
@@ -5276,8 +5249,8 @@
         </p:nvSpPr>
         <p:spPr>
           <a:xfrm>
-            <a:off x="513806" y="792480"/>
-            <a:ext cx="5695405" cy="3693319"/>
+            <a:off x="242595" y="793102"/>
+            <a:ext cx="7847045" cy="369332"/>
           </a:xfrm>
           <a:prstGeom prst="rect">
             <a:avLst/>
@@ -5291,34 +5264,56 @@
           <a:lstStyle/>
           <a:p>
             <a:r>
+              <a:rPr lang="ja-JP" altLang="en-US" dirty="0"/>
+              <a:t>発生後　無敵の強い攻撃　自動</a:t>
+            </a:r>
+            <a:r>
+              <a:rPr lang="en-US" altLang="ja-JP" dirty="0"/>
+              <a:t>HIT</a:t>
+            </a:r>
+            <a:r>
+              <a:rPr lang="ja-JP" altLang="en-US" dirty="0"/>
+              <a:t>　必中</a:t>
+            </a:r>
+            <a:endParaRPr kumimoji="1" lang="en-US" altLang="ja-JP" dirty="0"/>
+          </a:p>
+        </p:txBody>
+      </p:sp>
+      <p:sp>
+        <p:nvSpPr>
+          <p:cNvPr id="5" name="テキスト ボックス 4">
+            <a:extLst>
+              <a:ext uri="{FF2B5EF4-FFF2-40B4-BE49-F238E27FC236}">
+                <a16:creationId xmlns:a16="http://schemas.microsoft.com/office/drawing/2014/main" id="{879BFEC1-67A9-0A0A-8480-F98BE5EBF864}"/>
+              </a:ext>
+            </a:extLst>
+          </p:cNvPr>
+          <p:cNvSpPr txBox="1"/>
+          <p:nvPr/>
+        </p:nvSpPr>
+        <p:spPr>
+          <a:xfrm>
+            <a:off x="242594" y="1397675"/>
+            <a:ext cx="11786760" cy="4524315"/>
+          </a:xfrm>
+          <a:prstGeom prst="rect">
+            <a:avLst/>
+          </a:prstGeom>
+          <a:noFill/>
+        </p:spPr>
+        <p:txBody>
+          <a:bodyPr wrap="square" rtlCol="0">
+            <a:spAutoFit/>
+          </a:bodyPr>
+          <a:lstStyle/>
+          <a:p>
+            <a:r>
               <a:rPr kumimoji="1" lang="ja-JP" altLang="en-US" dirty="0"/>
-              <a:t>敵とプレイヤーの１対１</a:t>
+              <a:t>挙動</a:t>
             </a:r>
             <a:endParaRPr kumimoji="1" lang="en-US" altLang="ja-JP" dirty="0"/>
           </a:p>
           <a:p>
-            <a:r>
-              <a:rPr lang="ja-JP" altLang="en-US" dirty="0"/>
-              <a:t>どちらかの</a:t>
-            </a:r>
-            <a:r>
-              <a:rPr lang="en-US" altLang="ja-JP" dirty="0"/>
-              <a:t>Hp</a:t>
-            </a:r>
-            <a:r>
-              <a:rPr lang="ja-JP" altLang="en-US" dirty="0"/>
-              <a:t>がなくなったら決着</a:t>
-            </a:r>
-            <a:endParaRPr lang="en-US" altLang="ja-JP" dirty="0"/>
-          </a:p>
-          <a:p>
-            <a:endParaRPr lang="en-US" altLang="ja-JP" dirty="0"/>
-          </a:p>
-          <a:p>
-            <a:r>
-              <a:rPr lang="ja-JP" altLang="en-US" dirty="0"/>
-              <a:t>プレイヤーの行動　</a:t>
-            </a:r>
             <a:endParaRPr lang="en-US" altLang="ja-JP" dirty="0"/>
           </a:p>
           <a:p>
@@ -5327,10 +5322,30 @@
               <a:buChar char="•"/>
             </a:pPr>
             <a:r>
+              <a:rPr kumimoji="1" lang="ja-JP" altLang="en-US" dirty="0"/>
+              <a:t>ジャンプの準備挙動　　</a:t>
+            </a:r>
+            <a:endParaRPr kumimoji="1" lang="en-US" altLang="ja-JP" dirty="0"/>
+          </a:p>
+          <a:p>
+            <a:r>
+              <a:rPr kumimoji="1" lang="ja-JP" altLang="en-US" dirty="0"/>
+              <a:t>　この時間は攻撃が通り当たると必殺キャンセル　会うアニメションを探し中</a:t>
+            </a:r>
+            <a:endParaRPr kumimoji="1" lang="en-US" altLang="ja-JP" dirty="0"/>
+          </a:p>
+          <a:p>
+            <a:r>
               <a:rPr lang="ja-JP" altLang="en-US" dirty="0"/>
-              <a:t>通常攻撃</a:t>
-            </a:r>
+              <a:t>　通常カメラ</a:t>
+            </a:r>
+            <a:endParaRPr kumimoji="1" lang="en-US" altLang="ja-JP" dirty="0"/>
+          </a:p>
+          <a:p>
             <a:endParaRPr lang="en-US" altLang="ja-JP" dirty="0"/>
+          </a:p>
+          <a:p>
+            <a:endParaRPr kumimoji="1" lang="en-US" altLang="ja-JP" dirty="0"/>
           </a:p>
           <a:p>
             <a:pPr marL="285750" indent="-285750">
@@ -5339,7 +5354,15 @@
             </a:pPr>
             <a:r>
               <a:rPr lang="ja-JP" altLang="en-US" dirty="0"/>
-              <a:t>必殺技</a:t>
+              <a:t>飛び上がり　　　　　　</a:t>
+            </a:r>
+            <a:r>
+              <a:rPr lang="en-US" altLang="ja-JP" dirty="0"/>
+              <a:t>player</a:t>
+            </a:r>
+            <a:r>
+              <a:rPr lang="ja-JP" altLang="en-US" dirty="0"/>
+              <a:t>の足元のカメラ　　　　　　　　ここから敵の行動を停止</a:t>
             </a:r>
             <a:endParaRPr lang="en-US" altLang="ja-JP" dirty="0"/>
           </a:p>
@@ -5348,20 +5371,6 @@
               <a:buFont typeface="Arial" panose="020B0604020202020204" pitchFamily="34" charset="0"/>
               <a:buChar char="•"/>
             </a:pPr>
-            <a:r>
-              <a:rPr lang="ja-JP" altLang="en-US" dirty="0"/>
-              <a:t>回避（追加予定）</a:t>
-            </a:r>
-            <a:endParaRPr lang="en-US" altLang="ja-JP" dirty="0"/>
-          </a:p>
-          <a:p>
-            <a:endParaRPr lang="en-US" altLang="ja-JP" dirty="0"/>
-          </a:p>
-          <a:p>
-            <a:r>
-              <a:rPr lang="ja-JP" altLang="en-US" dirty="0"/>
-              <a:t>敵の行動</a:t>
-            </a:r>
             <a:endParaRPr lang="en-US" altLang="ja-JP" dirty="0"/>
           </a:p>
           <a:p>
@@ -5369,10 +5378,6 @@
               <a:buFont typeface="Arial" panose="020B0604020202020204" pitchFamily="34" charset="0"/>
               <a:buChar char="•"/>
             </a:pPr>
-            <a:r>
-              <a:rPr lang="ja-JP" altLang="en-US" dirty="0"/>
-              <a:t>突進</a:t>
-            </a:r>
             <a:endParaRPr lang="en-US" altLang="ja-JP" dirty="0"/>
           </a:p>
           <a:p>
@@ -5381,23 +5386,128 @@
               <a:buChar char="•"/>
             </a:pPr>
             <a:r>
+              <a:rPr kumimoji="1" lang="ja-JP" altLang="en-US" dirty="0"/>
+              <a:t>空中で敵視点ぐらいからよる　　　　　　この時点で敵の上に移動</a:t>
+            </a:r>
+            <a:endParaRPr kumimoji="1" lang="en-US" altLang="ja-JP" dirty="0"/>
+          </a:p>
+          <a:p>
+            <a:pPr marL="285750" indent="-285750">
+              <a:buFont typeface="Arial" panose="020B0604020202020204" pitchFamily="34" charset="0"/>
+              <a:buChar char="•"/>
+            </a:pPr>
+            <a:endParaRPr kumimoji="1" lang="en-US" altLang="ja-JP" dirty="0"/>
+          </a:p>
+          <a:p>
+            <a:pPr marL="285750" indent="-285750">
+              <a:buFont typeface="Arial" panose="020B0604020202020204" pitchFamily="34" charset="0"/>
+              <a:buChar char="•"/>
+            </a:pPr>
+            <a:r>
               <a:rPr lang="ja-JP" altLang="en-US" dirty="0"/>
-              <a:t>振り下ろし</a:t>
+              <a:t>敵めがけて動く　通常カメラ　　　攻撃とダメージが入る　ヒット時　点滅と拡大縮小　ダメージ　仮１００　通常４０</a:t>
             </a:r>
             <a:endParaRPr lang="en-US" altLang="ja-JP" dirty="0"/>
           </a:p>
           <a:p>
+            <a:pPr marL="285750" indent="-285750">
+              <a:buFont typeface="Arial" panose="020B0604020202020204" pitchFamily="34" charset="0"/>
+              <a:buChar char="•"/>
+            </a:pPr>
             <a:endParaRPr lang="en-US" altLang="ja-JP" dirty="0"/>
           </a:p>
           <a:p>
-            <a:endParaRPr kumimoji="1" lang="ja-JP" altLang="en-US" dirty="0"/>
+            <a:pPr marL="285750" indent="-285750">
+              <a:buFont typeface="Arial" panose="020B0604020202020204" pitchFamily="34" charset="0"/>
+              <a:buChar char="•"/>
+            </a:pPr>
+            <a:r>
+              <a:rPr lang="ja-JP" altLang="en-US" dirty="0"/>
+              <a:t>定位置に戻り終わり　　敵は吹っ飛ぶ</a:t>
+            </a:r>
+            <a:endParaRPr lang="en-US" altLang="ja-JP" dirty="0"/>
+          </a:p>
+        </p:txBody>
+      </p:sp>
+      <p:sp>
+        <p:nvSpPr>
+          <p:cNvPr id="6" name="テキスト ボックス 5">
+            <a:extLst>
+              <a:ext uri="{FF2B5EF4-FFF2-40B4-BE49-F238E27FC236}">
+                <a16:creationId xmlns:a16="http://schemas.microsoft.com/office/drawing/2014/main" id="{8455609B-B179-8CCF-F7A0-30CA3EBEC491}"/>
+              </a:ext>
+            </a:extLst>
+          </p:cNvPr>
+          <p:cNvSpPr txBox="1"/>
+          <p:nvPr/>
+        </p:nvSpPr>
+        <p:spPr>
+          <a:xfrm>
+            <a:off x="416142" y="5880232"/>
+            <a:ext cx="6407454" cy="369332"/>
+          </a:xfrm>
+          <a:prstGeom prst="rect">
+            <a:avLst/>
+          </a:prstGeom>
+          <a:noFill/>
+        </p:spPr>
+        <p:txBody>
+          <a:bodyPr wrap="square" rtlCol="0">
+            <a:spAutoFit/>
+          </a:bodyPr>
+          <a:lstStyle/>
+          <a:p>
+            <a:r>
+              <a:rPr kumimoji="1" lang="ja-JP" altLang="en-US" dirty="0"/>
+              <a:t>所要時間　</a:t>
+            </a:r>
+            <a:r>
+              <a:rPr lang="ja-JP" altLang="en-US" dirty="0"/>
+              <a:t>４</a:t>
+            </a:r>
+            <a:r>
+              <a:rPr kumimoji="1" lang="ja-JP" altLang="en-US" dirty="0"/>
+              <a:t>秒程度　各　１</a:t>
+            </a:r>
+            <a:r>
+              <a:rPr kumimoji="1" lang="en-US" altLang="ja-JP" dirty="0"/>
+              <a:t>.</a:t>
+            </a:r>
+            <a:r>
+              <a:rPr kumimoji="1" lang="ja-JP" altLang="en-US" dirty="0"/>
+              <a:t>５</a:t>
+            </a:r>
+            <a:r>
+              <a:rPr kumimoji="1" lang="en-US" altLang="ja-JP" dirty="0"/>
+              <a:t>,</a:t>
+            </a:r>
+            <a:r>
+              <a:rPr kumimoji="1" lang="ja-JP" altLang="en-US" dirty="0"/>
+              <a:t>０</a:t>
+            </a:r>
+            <a:r>
+              <a:rPr kumimoji="1" lang="en-US" altLang="ja-JP" dirty="0"/>
+              <a:t>.</a:t>
+            </a:r>
+            <a:r>
+              <a:rPr kumimoji="1" lang="ja-JP" altLang="en-US" dirty="0"/>
+              <a:t>５</a:t>
+            </a:r>
+            <a:r>
+              <a:rPr kumimoji="1" lang="en-US" altLang="ja-JP" dirty="0"/>
+              <a:t>,1,</a:t>
+            </a:r>
+            <a:r>
+              <a:rPr kumimoji="1" lang="ja-JP" altLang="en-US" dirty="0"/>
+              <a:t>１</a:t>
+            </a:r>
           </a:p>
         </p:txBody>
       </p:sp>
     </p:spTree>
     <p:extLst>
       <p:ext uri="{BB962C8B-B14F-4D97-AF65-F5344CB8AC3E}">
-        <p14:creationId xmlns:p14="http://schemas.microsoft.com/office/powerpoint/2010/main" val="3966911292"/>
+        <p14:creationId xmlns:p14="http://schemas.microsoft.com/office/powerpoint/2010/main" val="2502149341"/>
       </p:ext>
     </p:extLst>
   </p:cSld>
@@ -5464,10 +5574,10 @@
       </p:sp>
       <p:sp>
         <p:nvSpPr>
-          <p:cNvPr id="3" name="テキスト ボックス 2">
-            <a:extLst>
-              <a:ext uri="{FF2B5EF4-FFF2-40B4-BE49-F238E27FC236}">
-                <a16:creationId xmlns:a16="http://schemas.microsoft.com/office/drawing/2014/main" id="{2B5BD5E2-D383-D8B9-8FA2-8C477CEED092}"/>
+          <p:cNvPr id="7" name="テキスト ボックス 6">
+            <a:extLst>
+              <a:ext uri="{FF2B5EF4-FFF2-40B4-BE49-F238E27FC236}">
+                <a16:creationId xmlns:a16="http://schemas.microsoft.com/office/drawing/2014/main" id="{9CEDE7C0-A716-9185-9B51-3631FCE11AEC}"/>
               </a:ext>
             </a:extLst>
           </p:cNvPr>
@@ -5476,220 +5586,7 @@
         </p:nvSpPr>
         <p:spPr>
           <a:xfrm>
-            <a:off x="242595" y="793102"/>
-            <a:ext cx="7847045" cy="369332"/>
-          </a:xfrm>
-          <a:prstGeom prst="rect">
-            <a:avLst/>
-          </a:prstGeom>
-          <a:noFill/>
-        </p:spPr>
-        <p:txBody>
-          <a:bodyPr wrap="square" rtlCol="0">
-            <a:spAutoFit/>
-          </a:bodyPr>
-          <a:lstStyle/>
-          <a:p>
-            <a:r>
-              <a:rPr lang="ja-JP" altLang="en-US" dirty="0"/>
-              <a:t>発生後　無敵の強い攻撃　自動</a:t>
-            </a:r>
-            <a:r>
-              <a:rPr lang="en-US" altLang="ja-JP" dirty="0"/>
-              <a:t>HIT</a:t>
-            </a:r>
-            <a:r>
-              <a:rPr lang="ja-JP" altLang="en-US" dirty="0"/>
-              <a:t>　必中</a:t>
-            </a:r>
-            <a:endParaRPr kumimoji="1" lang="en-US" altLang="ja-JP" dirty="0"/>
-          </a:p>
-        </p:txBody>
-      </p:sp>
-      <p:sp>
-        <p:nvSpPr>
-          <p:cNvPr id="5" name="テキスト ボックス 4">
-            <a:extLst>
-              <a:ext uri="{FF2B5EF4-FFF2-40B4-BE49-F238E27FC236}">
-                <a16:creationId xmlns:a16="http://schemas.microsoft.com/office/drawing/2014/main" id="{879BFEC1-67A9-0A0A-8480-F98BE5EBF864}"/>
-              </a:ext>
-            </a:extLst>
-          </p:cNvPr>
-          <p:cNvSpPr txBox="1"/>
-          <p:nvPr/>
-        </p:nvSpPr>
-        <p:spPr>
-          <a:xfrm>
-            <a:off x="242594" y="1397675"/>
-            <a:ext cx="11786760" cy="2031325"/>
-          </a:xfrm>
-          <a:prstGeom prst="rect">
-            <a:avLst/>
-          </a:prstGeom>
-          <a:noFill/>
-        </p:spPr>
-        <p:txBody>
-          <a:bodyPr wrap="square" rtlCol="0">
-            <a:spAutoFit/>
-          </a:bodyPr>
-          <a:lstStyle/>
-          <a:p>
-            <a:r>
-              <a:rPr kumimoji="1" lang="ja-JP" altLang="en-US" dirty="0"/>
-              <a:t>挙動</a:t>
-            </a:r>
-            <a:endParaRPr kumimoji="1" lang="en-US" altLang="ja-JP" dirty="0"/>
-          </a:p>
-          <a:p>
-            <a:endParaRPr lang="en-US" altLang="ja-JP" dirty="0"/>
-          </a:p>
-          <a:p>
-            <a:pPr marL="285750" indent="-285750">
-              <a:buFont typeface="Arial" panose="020B0604020202020204" pitchFamily="34" charset="0"/>
-              <a:buChar char="•"/>
-            </a:pPr>
-            <a:r>
-              <a:rPr kumimoji="1" lang="ja-JP" altLang="en-US" dirty="0"/>
-              <a:t>ジャンプの準備挙動　　　　　　この時間は攻撃が通り当たると必殺キャンセル　会うアニメションを探し中</a:t>
-            </a:r>
-            <a:endParaRPr kumimoji="1" lang="en-US" altLang="ja-JP" dirty="0"/>
-          </a:p>
-          <a:p>
-            <a:pPr marL="285750" indent="-285750">
-              <a:buFont typeface="Arial" panose="020B0604020202020204" pitchFamily="34" charset="0"/>
-              <a:buChar char="•"/>
-            </a:pPr>
-            <a:r>
-              <a:rPr lang="ja-JP" altLang="en-US" dirty="0"/>
-              <a:t>飛び上がり　　　　　　　　　　　　　　ここから敵の行動を停止</a:t>
-            </a:r>
-            <a:endParaRPr lang="en-US" altLang="ja-JP" dirty="0"/>
-          </a:p>
-          <a:p>
-            <a:pPr marL="285750" indent="-285750">
-              <a:buFont typeface="Arial" panose="020B0604020202020204" pitchFamily="34" charset="0"/>
-              <a:buChar char="•"/>
-            </a:pPr>
-            <a:r>
-              <a:rPr kumimoji="1" lang="ja-JP" altLang="en-US" dirty="0"/>
-              <a:t>空中で敵視点ぐらいからよる　　　　　　この時点で敵の上に移動</a:t>
-            </a:r>
-            <a:endParaRPr kumimoji="1" lang="en-US" altLang="ja-JP" dirty="0"/>
-          </a:p>
-          <a:p>
-            <a:pPr marL="285750" indent="-285750">
-              <a:buFont typeface="Arial" panose="020B0604020202020204" pitchFamily="34" charset="0"/>
-              <a:buChar char="•"/>
-            </a:pPr>
-            <a:r>
-              <a:rPr lang="ja-JP" altLang="en-US" dirty="0"/>
-              <a:t>敵めがけて動く　　　　攻撃とダメージが入る　ヒット時　点滅と拡大縮小　ダメージ　仮１００　通常４０</a:t>
-            </a:r>
-            <a:endParaRPr lang="en-US" altLang="ja-JP" dirty="0"/>
-          </a:p>
-          <a:p>
-            <a:pPr marL="285750" indent="-285750">
-              <a:buFont typeface="Arial" panose="020B0604020202020204" pitchFamily="34" charset="0"/>
-              <a:buChar char="•"/>
-            </a:pPr>
-            <a:r>
-              <a:rPr lang="ja-JP" altLang="en-US" dirty="0"/>
-              <a:t>定位置に戻り終わり　　敵は吹っ飛ぶ</a:t>
-            </a:r>
-            <a:endParaRPr lang="en-US" altLang="ja-JP" dirty="0"/>
-          </a:p>
-        </p:txBody>
-      </p:sp>
-      <p:sp>
-        <p:nvSpPr>
-          <p:cNvPr id="6" name="テキスト ボックス 5">
-            <a:extLst>
-              <a:ext uri="{FF2B5EF4-FFF2-40B4-BE49-F238E27FC236}">
-                <a16:creationId xmlns:a16="http://schemas.microsoft.com/office/drawing/2014/main" id="{8455609B-B179-8CCF-F7A0-30CA3EBEC491}"/>
-              </a:ext>
-            </a:extLst>
-          </p:cNvPr>
-          <p:cNvSpPr txBox="1"/>
-          <p:nvPr/>
-        </p:nvSpPr>
-        <p:spPr>
-          <a:xfrm>
-            <a:off x="162646" y="3479575"/>
-            <a:ext cx="6407454" cy="369332"/>
-          </a:xfrm>
-          <a:prstGeom prst="rect">
-            <a:avLst/>
-          </a:prstGeom>
-          <a:noFill/>
-        </p:spPr>
-        <p:txBody>
-          <a:bodyPr wrap="square" rtlCol="0">
-            <a:spAutoFit/>
-          </a:bodyPr>
-          <a:lstStyle/>
-          <a:p>
-            <a:r>
-              <a:rPr kumimoji="1" lang="ja-JP" altLang="en-US" dirty="0"/>
-              <a:t>所要時間　</a:t>
-            </a:r>
-            <a:r>
-              <a:rPr lang="ja-JP" altLang="en-US" dirty="0"/>
-              <a:t>４</a:t>
-            </a:r>
-            <a:r>
-              <a:rPr kumimoji="1" lang="ja-JP" altLang="en-US" dirty="0"/>
-              <a:t>秒程度　各　１</a:t>
-            </a:r>
-            <a:r>
-              <a:rPr kumimoji="1" lang="en-US" altLang="ja-JP" dirty="0"/>
-              <a:t>.</a:t>
-            </a:r>
-            <a:r>
-              <a:rPr kumimoji="1" lang="ja-JP" altLang="en-US" dirty="0"/>
-              <a:t>５</a:t>
-            </a:r>
-            <a:r>
-              <a:rPr kumimoji="1" lang="en-US" altLang="ja-JP" dirty="0"/>
-              <a:t>,</a:t>
-            </a:r>
-            <a:r>
-              <a:rPr kumimoji="1" lang="ja-JP" altLang="en-US" dirty="0"/>
-              <a:t>０</a:t>
-            </a:r>
-            <a:r>
-              <a:rPr kumimoji="1" lang="en-US" altLang="ja-JP" dirty="0"/>
-              <a:t>.</a:t>
-            </a:r>
-            <a:r>
-              <a:rPr kumimoji="1" lang="ja-JP" altLang="en-US" dirty="0"/>
-              <a:t>５</a:t>
-            </a:r>
-            <a:r>
-              <a:rPr kumimoji="1" lang="en-US" altLang="ja-JP" dirty="0"/>
-              <a:t>,1,</a:t>
-            </a:r>
-            <a:r>
-              <a:rPr kumimoji="1" lang="ja-JP" altLang="en-US" dirty="0"/>
-              <a:t>１</a:t>
-            </a:r>
-          </a:p>
-        </p:txBody>
-      </p:sp>
-      <p:sp>
-        <p:nvSpPr>
-          <p:cNvPr id="7" name="テキスト ボックス 6">
-            <a:extLst>
-              <a:ext uri="{FF2B5EF4-FFF2-40B4-BE49-F238E27FC236}">
-                <a16:creationId xmlns:a16="http://schemas.microsoft.com/office/drawing/2014/main" id="{9CEDE7C0-A716-9185-9B51-3631FCE11AEC}"/>
-              </a:ext>
-            </a:extLst>
-          </p:cNvPr>
-          <p:cNvSpPr txBox="1"/>
-          <p:nvPr/>
-        </p:nvSpPr>
-        <p:spPr>
-          <a:xfrm>
-            <a:off x="307910" y="4040155"/>
+            <a:off x="218628" y="3335673"/>
             <a:ext cx="4086808" cy="646331"/>
           </a:xfrm>
           <a:prstGeom prst="rect">
@@ -5732,7 +5629,7 @@
         </p:nvSpPr>
         <p:spPr>
           <a:xfrm>
-            <a:off x="300592" y="4877734"/>
+            <a:off x="158314" y="4205618"/>
             <a:ext cx="6131561" cy="923330"/>
           </a:xfrm>
           <a:prstGeom prst="rect">
@@ -5794,7 +5691,7 @@
         </p:nvSpPr>
         <p:spPr>
           <a:xfrm>
-            <a:off x="307909" y="5807646"/>
+            <a:off x="90626" y="5405994"/>
             <a:ext cx="9731830" cy="369332"/>
           </a:xfrm>
           <a:prstGeom prst="rect">
@@ -5837,7 +5734,7 @@
         </p:nvSpPr>
         <p:spPr>
           <a:xfrm>
-            <a:off x="307909" y="6275893"/>
+            <a:off x="90626" y="6052372"/>
             <a:ext cx="5430418" cy="369332"/>
           </a:xfrm>
           <a:prstGeom prst="rect">
@@ -5872,7 +5769,7 @@
         </p:nvSpPr>
         <p:spPr>
           <a:xfrm>
-            <a:off x="6251510" y="3479575"/>
+            <a:off x="218628" y="948241"/>
             <a:ext cx="2258008" cy="369332"/>
           </a:xfrm>
           <a:prstGeom prst="rect">
@@ -5907,7 +5804,7 @@
         </p:nvSpPr>
         <p:spPr>
           <a:xfrm>
-            <a:off x="6095999" y="3899482"/>
+            <a:off x="218628" y="1486066"/>
             <a:ext cx="5569597" cy="646331"/>
           </a:xfrm>
           <a:prstGeom prst="rect">
@@ -5945,7 +5842,7 @@
         </p:nvSpPr>
         <p:spPr>
           <a:xfrm>
-            <a:off x="5931800" y="4604975"/>
+            <a:off x="218628" y="2439944"/>
             <a:ext cx="6097554" cy="646331"/>
           </a:xfrm>
           <a:prstGeom prst="rect">
@@ -5972,1105 +5869,7 @@
     </p:spTree>
     <p:extLst>
       <p:ext uri="{BB962C8B-B14F-4D97-AF65-F5344CB8AC3E}">
-        <p14:creationId xmlns:p14="http://schemas.microsoft.com/office/powerpoint/2010/main" val="2502149341"/>
-      </p:ext>
-    </p:extLst>
-  </p:cSld>
-  <p:clrMapOvr>
-    <a:masterClrMapping/>
-  </p:clrMapOvr>
-  <p:transition spd="slow" advClick="0">
-    <p:fade thruBlk="1"/>
-  </p:transition>
-</p:sld>
-</file>
-
-<file path=ppt/slides/slide7.xml><?xml version="1.0" encoding="utf-8"?>
-<p:sld xmlns:a="http://schemas.openxmlformats.org/drawingml/2006/main" xmlns:r="http://schemas.openxmlformats.org/officeDocument/2006/relationships" xmlns:p="http://schemas.openxmlformats.org/presentationml/2006/main">
-  <p:cSld>
-    <p:spTree>
-      <p:nvGrpSpPr>
-        <p:cNvPr id="1" name=""/>
-        <p:cNvGrpSpPr/>
-        <p:nvPr/>
-      </p:nvGrpSpPr>
-      <p:grpSpPr>
-        <a:xfrm>
-          <a:off x="0" y="0"/>
-          <a:ext cx="0" cy="0"/>
-          <a:chOff x="0" y="0"/>
-          <a:chExt cx="0" cy="0"/>
-        </a:xfrm>
-      </p:grpSpPr>
-      <p:sp>
-        <p:nvSpPr>
-          <p:cNvPr id="2" name="正方形/長方形 1">
-            <a:extLst>
-              <a:ext uri="{FF2B5EF4-FFF2-40B4-BE49-F238E27FC236}">
-                <a16:creationId xmlns:a16="http://schemas.microsoft.com/office/drawing/2014/main" id="{335E1CB8-E728-0D6C-1199-ADF9C830F8BE}"/>
-              </a:ext>
-            </a:extLst>
-          </p:cNvPr>
-          <p:cNvSpPr/>
-          <p:nvPr/>
-        </p:nvSpPr>
-        <p:spPr>
-          <a:xfrm>
-            <a:off x="0" y="0"/>
-            <a:ext cx="12192000" cy="6858000"/>
-          </a:xfrm>
-          <a:prstGeom prst="rect">
-            <a:avLst/>
-          </a:prstGeom>
-          <a:solidFill>
-            <a:schemeClr val="tx1"/>
-          </a:solidFill>
-          <a:ln>
-            <a:solidFill>
-              <a:schemeClr val="tx1"/>
-            </a:solidFill>
-          </a:ln>
-        </p:spPr>
-        <p:style>
-          <a:lnRef idx="2">
-            <a:schemeClr val="accent1">
-              <a:shade val="15000"/>
-            </a:schemeClr>
-          </a:lnRef>
-          <a:fillRef idx="1">
-            <a:schemeClr val="accent1"/>
-          </a:fillRef>
-          <a:effectRef idx="0">
-            <a:schemeClr val="accent1"/>
-          </a:effectRef>
-          <a:fontRef idx="minor">
-            <a:schemeClr val="lt1"/>
-          </a:fontRef>
-        </p:style>
-        <p:txBody>
-          <a:bodyPr rtlCol="0" anchor="ctr"/>
-          <a:lstStyle/>
-          <a:p>
-            <a:pPr algn="ctr"/>
-            <a:endParaRPr kumimoji="1" lang="ja-JP" altLang="en-US"/>
-          </a:p>
-        </p:txBody>
-      </p:sp>
-      <p:sp>
-        <p:nvSpPr>
-          <p:cNvPr id="4" name="正方形/長方形 3">
-            <a:extLst>
-              <a:ext uri="{FF2B5EF4-FFF2-40B4-BE49-F238E27FC236}">
-                <a16:creationId xmlns:a16="http://schemas.microsoft.com/office/drawing/2014/main" id="{65D0E1D4-A7E4-6674-45EA-BE8E94FC0E73}"/>
-              </a:ext>
-            </a:extLst>
-          </p:cNvPr>
-          <p:cNvSpPr/>
-          <p:nvPr/>
-        </p:nvSpPr>
-        <p:spPr>
-          <a:xfrm>
-            <a:off x="271606" y="98492"/>
-            <a:ext cx="2739853" cy="461665"/>
-          </a:xfrm>
-          <a:prstGeom prst="rect">
-            <a:avLst/>
-          </a:prstGeom>
-          <a:noFill/>
-        </p:spPr>
-        <p:txBody>
-          <a:bodyPr wrap="none" lIns="91440" tIns="45720" rIns="91440" bIns="45720">
-            <a:spAutoFit/>
-          </a:bodyPr>
-          <a:lstStyle/>
-          <a:p>
-            <a:r>
-              <a:rPr lang="ja-JP" altLang="en-US" sz="2400" dirty="0">
-                <a:ln w="0"/>
-                <a:solidFill>
-                  <a:schemeClr val="bg1"/>
-                </a:solidFill>
-                <a:latin typeface="ＭＳ Ｐゴシック" panose="020B0600070205080204" pitchFamily="50" charset="-128"/>
-                <a:ea typeface="ＭＳ Ｐゴシック" panose="020B0600070205080204" pitchFamily="50" charset="-128"/>
-              </a:rPr>
-              <a:t>ゲームリザルト画面</a:t>
-            </a:r>
-            <a:endParaRPr lang="ja-JP" altLang="en-US" sz="2400" b="0" cap="none" spc="0" dirty="0">
-              <a:ln w="0"/>
-              <a:solidFill>
-                <a:schemeClr val="bg1"/>
-              </a:solidFill>
-              <a:latin typeface="ＭＳ Ｐゴシック" panose="020B0600070205080204" pitchFamily="50" charset="-128"/>
-              <a:ea typeface="ＭＳ Ｐゴシック" panose="020B0600070205080204" pitchFamily="50" charset="-128"/>
-            </a:endParaRPr>
-          </a:p>
-        </p:txBody>
-      </p:sp>
-      <p:sp>
-        <p:nvSpPr>
-          <p:cNvPr id="3" name="正方形/長方形 2">
-            <a:extLst>
-              <a:ext uri="{FF2B5EF4-FFF2-40B4-BE49-F238E27FC236}">
-                <a16:creationId xmlns:a16="http://schemas.microsoft.com/office/drawing/2014/main" id="{A297B050-AB7A-B0F6-4238-A1FFC172F6C9}"/>
-              </a:ext>
-            </a:extLst>
-          </p:cNvPr>
-          <p:cNvSpPr/>
-          <p:nvPr/>
-        </p:nvSpPr>
-        <p:spPr>
-          <a:xfrm>
-            <a:off x="1239134" y="750242"/>
-            <a:ext cx="9875520" cy="5703483"/>
-          </a:xfrm>
-          <a:prstGeom prst="rect">
-            <a:avLst/>
-          </a:prstGeom>
-        </p:spPr>
-        <p:style>
-          <a:lnRef idx="2">
-            <a:schemeClr val="accent1">
-              <a:shade val="15000"/>
-            </a:schemeClr>
-          </a:lnRef>
-          <a:fillRef idx="1">
-            <a:schemeClr val="accent1"/>
-          </a:fillRef>
-          <a:effectRef idx="0">
-            <a:schemeClr val="accent1"/>
-          </a:effectRef>
-          <a:fontRef idx="minor">
-            <a:schemeClr val="lt1"/>
-          </a:fontRef>
-        </p:style>
-        <p:txBody>
-          <a:bodyPr rtlCol="0" anchor="ctr"/>
-          <a:lstStyle/>
-          <a:p>
-            <a:pPr algn="ctr"/>
-            <a:endParaRPr kumimoji="1" lang="ja-JP" altLang="en-US" dirty="0"/>
-          </a:p>
-        </p:txBody>
-      </p:sp>
-      <p:sp>
-        <p:nvSpPr>
-          <p:cNvPr id="5" name="正方形/長方形 4">
-            <a:extLst>
-              <a:ext uri="{FF2B5EF4-FFF2-40B4-BE49-F238E27FC236}">
-                <a16:creationId xmlns:a16="http://schemas.microsoft.com/office/drawing/2014/main" id="{A036CB12-7BA5-1ECE-35E3-9A8A7A45911E}"/>
-              </a:ext>
-            </a:extLst>
-          </p:cNvPr>
-          <p:cNvSpPr/>
-          <p:nvPr/>
-        </p:nvSpPr>
-        <p:spPr>
-          <a:xfrm>
-            <a:off x="2152446" y="1045025"/>
-            <a:ext cx="7459639" cy="830997"/>
-          </a:xfrm>
-          <a:prstGeom prst="rect">
-            <a:avLst/>
-          </a:prstGeom>
-          <a:noFill/>
-        </p:spPr>
-        <p:txBody>
-          <a:bodyPr wrap="square" lIns="91440" tIns="45720" rIns="91440" bIns="45720">
-            <a:spAutoFit/>
-          </a:bodyPr>
-          <a:lstStyle/>
-          <a:p>
-            <a:pPr algn="ctr"/>
-            <a:r>
-              <a:rPr lang="en-US" altLang="ja-JP" sz="4800" b="0" cap="none" spc="0" dirty="0">
-                <a:ln w="0"/>
-                <a:solidFill>
-                  <a:schemeClr val="tx1"/>
-                </a:solidFill>
-                <a:effectLst>
-                  <a:outerShdw blurRad="38100" dist="19050" dir="2700000" algn="tl" rotWithShape="0">
-                    <a:schemeClr val="dk1">
-                      <a:alpha val="40000"/>
-                    </a:schemeClr>
-                  </a:outerShdw>
-                </a:effectLst>
-                <a:latin typeface="Impact" panose="020B0806030902050204" pitchFamily="34" charset="0"/>
-              </a:rPr>
-              <a:t>BEST</a:t>
-            </a:r>
-            <a:r>
-              <a:rPr lang="ja-JP" altLang="en-US" sz="4800" dirty="0">
-                <a:ln w="0"/>
-                <a:effectLst>
-                  <a:outerShdw blurRad="38100" dist="19050" dir="2700000" algn="tl" rotWithShape="0">
-                    <a:schemeClr val="dk1">
-                      <a:alpha val="40000"/>
-                    </a:schemeClr>
-                  </a:outerShdw>
-                </a:effectLst>
-                <a:latin typeface="Impact" panose="020B0806030902050204" pitchFamily="34" charset="0"/>
-              </a:rPr>
-              <a:t> </a:t>
-            </a:r>
-            <a:r>
-              <a:rPr lang="en-US" altLang="ja-JP" sz="4800" b="0" cap="none" spc="0" dirty="0">
-                <a:ln w="0"/>
-                <a:solidFill>
-                  <a:schemeClr val="tx1"/>
-                </a:solidFill>
-                <a:effectLst>
-                  <a:outerShdw blurRad="38100" dist="19050" dir="2700000" algn="tl" rotWithShape="0">
-                    <a:schemeClr val="dk1">
-                      <a:alpha val="40000"/>
-                    </a:schemeClr>
-                  </a:outerShdw>
-                </a:effectLst>
-                <a:latin typeface="Impact" panose="020B0806030902050204" pitchFamily="34" charset="0"/>
-              </a:rPr>
-              <a:t>SCORE</a:t>
-            </a:r>
-            <a:endParaRPr lang="ja-JP" altLang="en-US" sz="4800" b="0" cap="none" spc="0" dirty="0">
-              <a:ln w="0"/>
-              <a:solidFill>
-                <a:schemeClr val="tx1"/>
-              </a:solidFill>
-              <a:effectLst>
-                <a:outerShdw blurRad="38100" dist="19050" dir="2700000" algn="tl" rotWithShape="0">
-                  <a:schemeClr val="dk1">
-                    <a:alpha val="40000"/>
-                  </a:schemeClr>
-                </a:outerShdw>
-              </a:effectLst>
-              <a:latin typeface="Impact" panose="020B0806030902050204" pitchFamily="34" charset="0"/>
-            </a:endParaRPr>
-          </a:p>
-        </p:txBody>
-      </p:sp>
-      <p:sp>
-        <p:nvSpPr>
-          <p:cNvPr id="6" name="正方形/長方形 5">
-            <a:extLst>
-              <a:ext uri="{FF2B5EF4-FFF2-40B4-BE49-F238E27FC236}">
-                <a16:creationId xmlns:a16="http://schemas.microsoft.com/office/drawing/2014/main" id="{5963673E-02D9-DC80-5E4D-68F0D3FA45C1}"/>
-              </a:ext>
-            </a:extLst>
-          </p:cNvPr>
-          <p:cNvSpPr/>
-          <p:nvPr/>
-        </p:nvSpPr>
-        <p:spPr>
-          <a:xfrm>
-            <a:off x="2447075" y="1946361"/>
-            <a:ext cx="7459639" cy="830997"/>
-          </a:xfrm>
-          <a:prstGeom prst="rect">
-            <a:avLst/>
-          </a:prstGeom>
-          <a:noFill/>
-        </p:spPr>
-        <p:txBody>
-          <a:bodyPr wrap="square" lIns="91440" tIns="45720" rIns="91440" bIns="45720">
-            <a:spAutoFit/>
-          </a:bodyPr>
-          <a:lstStyle/>
-          <a:p>
-            <a:r>
-              <a:rPr lang="ja-JP" altLang="en-US" sz="4800" dirty="0">
-                <a:ln w="0"/>
-                <a:effectLst>
-                  <a:outerShdw blurRad="38100" dist="19050" dir="2700000" algn="tl" rotWithShape="0">
-                    <a:schemeClr val="dk1">
-                      <a:alpha val="40000"/>
-                    </a:schemeClr>
-                  </a:outerShdw>
-                </a:effectLst>
-                <a:latin typeface="Impact" panose="020B0806030902050204" pitchFamily="34" charset="0"/>
-              </a:rPr>
-              <a:t>■        </a:t>
-            </a:r>
-            <a:r>
-              <a:rPr lang="en-US" altLang="ja-JP" sz="4800" dirty="0">
-                <a:ln w="0"/>
-                <a:effectLst>
-                  <a:outerShdw blurRad="38100" dist="19050" dir="2700000" algn="tl" rotWithShape="0">
-                    <a:schemeClr val="dk1">
-                      <a:alpha val="40000"/>
-                    </a:schemeClr>
-                  </a:outerShdw>
-                </a:effectLst>
-                <a:latin typeface="Impact" panose="020B0806030902050204" pitchFamily="34" charset="0"/>
-              </a:rPr>
-              <a:t>AAAA</a:t>
-            </a:r>
-            <a:r>
-              <a:rPr lang="en-US" altLang="ja-JP" sz="4800" b="0" cap="none" spc="0" dirty="0">
-                <a:ln w="0"/>
-                <a:solidFill>
-                  <a:schemeClr val="tx1"/>
-                </a:solidFill>
-                <a:effectLst>
-                  <a:outerShdw blurRad="38100" dist="19050" dir="2700000" algn="tl" rotWithShape="0">
-                    <a:schemeClr val="dk1">
-                      <a:alpha val="40000"/>
-                    </a:schemeClr>
-                  </a:outerShdw>
-                </a:effectLst>
-                <a:latin typeface="Impact" panose="020B0806030902050204" pitchFamily="34" charset="0"/>
-              </a:rPr>
-              <a:t>           00000000</a:t>
-            </a:r>
-            <a:endParaRPr lang="ja-JP" altLang="en-US" sz="4800" b="0" cap="none" spc="0" dirty="0">
-              <a:ln w="0"/>
-              <a:solidFill>
-                <a:schemeClr val="tx1"/>
-              </a:solidFill>
-              <a:effectLst>
-                <a:outerShdw blurRad="38100" dist="19050" dir="2700000" algn="tl" rotWithShape="0">
-                  <a:schemeClr val="dk1">
-                    <a:alpha val="40000"/>
-                  </a:schemeClr>
-                </a:outerShdw>
-              </a:effectLst>
-              <a:latin typeface="Impact" panose="020B0806030902050204" pitchFamily="34" charset="0"/>
-            </a:endParaRPr>
-          </a:p>
-        </p:txBody>
-      </p:sp>
-      <p:sp>
-        <p:nvSpPr>
-          <p:cNvPr id="7" name="正方形/長方形 6">
-            <a:extLst>
-              <a:ext uri="{FF2B5EF4-FFF2-40B4-BE49-F238E27FC236}">
-                <a16:creationId xmlns:a16="http://schemas.microsoft.com/office/drawing/2014/main" id="{601C509D-BDA2-518A-8CA4-AC610A763A73}"/>
-              </a:ext>
-            </a:extLst>
-          </p:cNvPr>
-          <p:cNvSpPr/>
-          <p:nvPr/>
-        </p:nvSpPr>
-        <p:spPr>
-          <a:xfrm>
-            <a:off x="2447075" y="2733316"/>
-            <a:ext cx="7459639" cy="830997"/>
-          </a:xfrm>
-          <a:prstGeom prst="rect">
-            <a:avLst/>
-          </a:prstGeom>
-          <a:noFill/>
-        </p:spPr>
-        <p:txBody>
-          <a:bodyPr wrap="square" lIns="91440" tIns="45720" rIns="91440" bIns="45720">
-            <a:spAutoFit/>
-          </a:bodyPr>
-          <a:lstStyle/>
-          <a:p>
-            <a:r>
-              <a:rPr lang="ja-JP" altLang="en-US" sz="4800" dirty="0">
-                <a:ln w="0"/>
-                <a:effectLst>
-                  <a:outerShdw blurRad="38100" dist="19050" dir="2700000" algn="tl" rotWithShape="0">
-                    <a:schemeClr val="dk1">
-                      <a:alpha val="40000"/>
-                    </a:schemeClr>
-                  </a:outerShdw>
-                </a:effectLst>
-                <a:latin typeface="Impact" panose="020B0806030902050204" pitchFamily="34" charset="0"/>
-              </a:rPr>
-              <a:t>■        </a:t>
-            </a:r>
-            <a:r>
-              <a:rPr lang="en-US" altLang="ja-JP" sz="4800" dirty="0">
-                <a:ln w="0"/>
-                <a:effectLst>
-                  <a:outerShdw blurRad="38100" dist="19050" dir="2700000" algn="tl" rotWithShape="0">
-                    <a:schemeClr val="dk1">
-                      <a:alpha val="40000"/>
-                    </a:schemeClr>
-                  </a:outerShdw>
-                </a:effectLst>
-                <a:latin typeface="Impact" panose="020B0806030902050204" pitchFamily="34" charset="0"/>
-              </a:rPr>
-              <a:t>AAAA</a:t>
-            </a:r>
-            <a:r>
-              <a:rPr lang="en-US" altLang="ja-JP" sz="4800" b="0" cap="none" spc="0" dirty="0">
-                <a:ln w="0"/>
-                <a:solidFill>
-                  <a:schemeClr val="tx1"/>
-                </a:solidFill>
-                <a:effectLst>
-                  <a:outerShdw blurRad="38100" dist="19050" dir="2700000" algn="tl" rotWithShape="0">
-                    <a:schemeClr val="dk1">
-                      <a:alpha val="40000"/>
-                    </a:schemeClr>
-                  </a:outerShdw>
-                </a:effectLst>
-                <a:latin typeface="Impact" panose="020B0806030902050204" pitchFamily="34" charset="0"/>
-              </a:rPr>
-              <a:t>           00000000</a:t>
-            </a:r>
-            <a:endParaRPr lang="ja-JP" altLang="en-US" sz="4800" b="0" cap="none" spc="0" dirty="0">
-              <a:ln w="0"/>
-              <a:solidFill>
-                <a:schemeClr val="tx1"/>
-              </a:solidFill>
-              <a:effectLst>
-                <a:outerShdw blurRad="38100" dist="19050" dir="2700000" algn="tl" rotWithShape="0">
-                  <a:schemeClr val="dk1">
-                    <a:alpha val="40000"/>
-                  </a:schemeClr>
-                </a:outerShdw>
-              </a:effectLst>
-              <a:latin typeface="Impact" panose="020B0806030902050204" pitchFamily="34" charset="0"/>
-            </a:endParaRPr>
-          </a:p>
-        </p:txBody>
-      </p:sp>
-      <p:sp>
-        <p:nvSpPr>
-          <p:cNvPr id="8" name="正方形/長方形 7">
-            <a:extLst>
-              <a:ext uri="{FF2B5EF4-FFF2-40B4-BE49-F238E27FC236}">
-                <a16:creationId xmlns:a16="http://schemas.microsoft.com/office/drawing/2014/main" id="{8547D60E-FAB4-CA1C-D0B3-1F44DF407778}"/>
-              </a:ext>
-            </a:extLst>
-          </p:cNvPr>
-          <p:cNvSpPr/>
-          <p:nvPr/>
-        </p:nvSpPr>
-        <p:spPr>
-          <a:xfrm>
-            <a:off x="2447075" y="3520271"/>
-            <a:ext cx="7459639" cy="830997"/>
-          </a:xfrm>
-          <a:prstGeom prst="rect">
-            <a:avLst/>
-          </a:prstGeom>
-          <a:noFill/>
-        </p:spPr>
-        <p:txBody>
-          <a:bodyPr wrap="square" lIns="91440" tIns="45720" rIns="91440" bIns="45720">
-            <a:spAutoFit/>
-          </a:bodyPr>
-          <a:lstStyle/>
-          <a:p>
-            <a:r>
-              <a:rPr lang="ja-JP" altLang="en-US" sz="4800" dirty="0">
-                <a:ln w="0"/>
-                <a:effectLst>
-                  <a:outerShdw blurRad="38100" dist="19050" dir="2700000" algn="tl" rotWithShape="0">
-                    <a:schemeClr val="dk1">
-                      <a:alpha val="40000"/>
-                    </a:schemeClr>
-                  </a:outerShdw>
-                </a:effectLst>
-                <a:latin typeface="Impact" panose="020B0806030902050204" pitchFamily="34" charset="0"/>
-              </a:rPr>
-              <a:t>■        </a:t>
-            </a:r>
-            <a:r>
-              <a:rPr lang="en-US" altLang="ja-JP" sz="4800" dirty="0">
-                <a:ln w="0"/>
-                <a:effectLst>
-                  <a:outerShdw blurRad="38100" dist="19050" dir="2700000" algn="tl" rotWithShape="0">
-                    <a:schemeClr val="dk1">
-                      <a:alpha val="40000"/>
-                    </a:schemeClr>
-                  </a:outerShdw>
-                </a:effectLst>
-                <a:latin typeface="Impact" panose="020B0806030902050204" pitchFamily="34" charset="0"/>
-              </a:rPr>
-              <a:t>AAAA</a:t>
-            </a:r>
-            <a:r>
-              <a:rPr lang="en-US" altLang="ja-JP" sz="4800" b="0" cap="none" spc="0" dirty="0">
-                <a:ln w="0"/>
-                <a:solidFill>
-                  <a:schemeClr val="tx1"/>
-                </a:solidFill>
-                <a:effectLst>
-                  <a:outerShdw blurRad="38100" dist="19050" dir="2700000" algn="tl" rotWithShape="0">
-                    <a:schemeClr val="dk1">
-                      <a:alpha val="40000"/>
-                    </a:schemeClr>
-                  </a:outerShdw>
-                </a:effectLst>
-                <a:latin typeface="Impact" panose="020B0806030902050204" pitchFamily="34" charset="0"/>
-              </a:rPr>
-              <a:t>           00000000</a:t>
-            </a:r>
-            <a:endParaRPr lang="ja-JP" altLang="en-US" sz="4800" b="0" cap="none" spc="0" dirty="0">
-              <a:ln w="0"/>
-              <a:solidFill>
-                <a:schemeClr val="tx1"/>
-              </a:solidFill>
-              <a:effectLst>
-                <a:outerShdw blurRad="38100" dist="19050" dir="2700000" algn="tl" rotWithShape="0">
-                  <a:schemeClr val="dk1">
-                    <a:alpha val="40000"/>
-                  </a:schemeClr>
-                </a:outerShdw>
-              </a:effectLst>
-              <a:latin typeface="Impact" panose="020B0806030902050204" pitchFamily="34" charset="0"/>
-            </a:endParaRPr>
-          </a:p>
-        </p:txBody>
-      </p:sp>
-      <p:sp>
-        <p:nvSpPr>
-          <p:cNvPr id="9" name="正方形/長方形 8">
-            <a:extLst>
-              <a:ext uri="{FF2B5EF4-FFF2-40B4-BE49-F238E27FC236}">
-                <a16:creationId xmlns:a16="http://schemas.microsoft.com/office/drawing/2014/main" id="{51A024A0-FD88-86E3-8B93-DA59CC8AF68B}"/>
-              </a:ext>
-            </a:extLst>
-          </p:cNvPr>
-          <p:cNvSpPr/>
-          <p:nvPr/>
-        </p:nvSpPr>
-        <p:spPr>
-          <a:xfrm>
-            <a:off x="2447075" y="4351268"/>
-            <a:ext cx="7459639" cy="830997"/>
-          </a:xfrm>
-          <a:prstGeom prst="rect">
-            <a:avLst/>
-          </a:prstGeom>
-          <a:noFill/>
-        </p:spPr>
-        <p:txBody>
-          <a:bodyPr wrap="square" lIns="91440" tIns="45720" rIns="91440" bIns="45720">
-            <a:spAutoFit/>
-          </a:bodyPr>
-          <a:lstStyle/>
-          <a:p>
-            <a:r>
-              <a:rPr lang="ja-JP" altLang="en-US" sz="4800" dirty="0">
-                <a:ln w="0"/>
-                <a:effectLst>
-                  <a:outerShdw blurRad="38100" dist="19050" dir="2700000" algn="tl" rotWithShape="0">
-                    <a:schemeClr val="dk1">
-                      <a:alpha val="40000"/>
-                    </a:schemeClr>
-                  </a:outerShdw>
-                </a:effectLst>
-                <a:latin typeface="Impact" panose="020B0806030902050204" pitchFamily="34" charset="0"/>
-              </a:rPr>
-              <a:t>■        </a:t>
-            </a:r>
-            <a:r>
-              <a:rPr lang="en-US" altLang="ja-JP" sz="4800" dirty="0">
-                <a:ln w="0"/>
-                <a:effectLst>
-                  <a:outerShdw blurRad="38100" dist="19050" dir="2700000" algn="tl" rotWithShape="0">
-                    <a:schemeClr val="dk1">
-                      <a:alpha val="40000"/>
-                    </a:schemeClr>
-                  </a:outerShdw>
-                </a:effectLst>
-                <a:latin typeface="Impact" panose="020B0806030902050204" pitchFamily="34" charset="0"/>
-              </a:rPr>
-              <a:t>AAAA</a:t>
-            </a:r>
-            <a:r>
-              <a:rPr lang="en-US" altLang="ja-JP" sz="4800" b="0" cap="none" spc="0" dirty="0">
-                <a:ln w="0"/>
-                <a:solidFill>
-                  <a:schemeClr val="tx1"/>
-                </a:solidFill>
-                <a:effectLst>
-                  <a:outerShdw blurRad="38100" dist="19050" dir="2700000" algn="tl" rotWithShape="0">
-                    <a:schemeClr val="dk1">
-                      <a:alpha val="40000"/>
-                    </a:schemeClr>
-                  </a:outerShdw>
-                </a:effectLst>
-                <a:latin typeface="Impact" panose="020B0806030902050204" pitchFamily="34" charset="0"/>
-              </a:rPr>
-              <a:t>           00000000</a:t>
-            </a:r>
-            <a:endParaRPr lang="ja-JP" altLang="en-US" sz="4800" b="0" cap="none" spc="0" dirty="0">
-              <a:ln w="0"/>
-              <a:solidFill>
-                <a:schemeClr val="tx1"/>
-              </a:solidFill>
-              <a:effectLst>
-                <a:outerShdw blurRad="38100" dist="19050" dir="2700000" algn="tl" rotWithShape="0">
-                  <a:schemeClr val="dk1">
-                    <a:alpha val="40000"/>
-                  </a:schemeClr>
-                </a:outerShdw>
-              </a:effectLst>
-              <a:latin typeface="Impact" panose="020B0806030902050204" pitchFamily="34" charset="0"/>
-            </a:endParaRPr>
-          </a:p>
-        </p:txBody>
-      </p:sp>
-      <p:sp>
-        <p:nvSpPr>
-          <p:cNvPr id="10" name="正方形/長方形 9">
-            <a:extLst>
-              <a:ext uri="{FF2B5EF4-FFF2-40B4-BE49-F238E27FC236}">
-                <a16:creationId xmlns:a16="http://schemas.microsoft.com/office/drawing/2014/main" id="{FAD89E22-0983-C12B-4870-1D717531147C}"/>
-              </a:ext>
-            </a:extLst>
-          </p:cNvPr>
-          <p:cNvSpPr/>
-          <p:nvPr/>
-        </p:nvSpPr>
-        <p:spPr>
-          <a:xfrm>
-            <a:off x="2447075" y="5197346"/>
-            <a:ext cx="7459639" cy="830997"/>
-          </a:xfrm>
-          <a:prstGeom prst="rect">
-            <a:avLst/>
-          </a:prstGeom>
-          <a:noFill/>
-        </p:spPr>
-        <p:txBody>
-          <a:bodyPr wrap="square" lIns="91440" tIns="45720" rIns="91440" bIns="45720">
-            <a:spAutoFit/>
-          </a:bodyPr>
-          <a:lstStyle/>
-          <a:p>
-            <a:r>
-              <a:rPr lang="ja-JP" altLang="en-US" sz="4800" dirty="0">
-                <a:ln w="0"/>
-                <a:effectLst>
-                  <a:outerShdw blurRad="38100" dist="19050" dir="2700000" algn="tl" rotWithShape="0">
-                    <a:schemeClr val="dk1">
-                      <a:alpha val="40000"/>
-                    </a:schemeClr>
-                  </a:outerShdw>
-                </a:effectLst>
-                <a:latin typeface="Impact" panose="020B0806030902050204" pitchFamily="34" charset="0"/>
-              </a:rPr>
-              <a:t>■        </a:t>
-            </a:r>
-            <a:r>
-              <a:rPr lang="en-US" altLang="ja-JP" sz="4800" dirty="0">
-                <a:ln w="0"/>
-                <a:effectLst>
-                  <a:outerShdw blurRad="38100" dist="19050" dir="2700000" algn="tl" rotWithShape="0">
-                    <a:schemeClr val="dk1">
-                      <a:alpha val="40000"/>
-                    </a:schemeClr>
-                  </a:outerShdw>
-                </a:effectLst>
-                <a:latin typeface="Impact" panose="020B0806030902050204" pitchFamily="34" charset="0"/>
-              </a:rPr>
-              <a:t>AAAA</a:t>
-            </a:r>
-            <a:r>
-              <a:rPr lang="en-US" altLang="ja-JP" sz="4800" b="0" cap="none" spc="0" dirty="0">
-                <a:ln w="0"/>
-                <a:solidFill>
-                  <a:schemeClr val="tx1"/>
-                </a:solidFill>
-                <a:effectLst>
-                  <a:outerShdw blurRad="38100" dist="19050" dir="2700000" algn="tl" rotWithShape="0">
-                    <a:schemeClr val="dk1">
-                      <a:alpha val="40000"/>
-                    </a:schemeClr>
-                  </a:outerShdw>
-                </a:effectLst>
-                <a:latin typeface="Impact" panose="020B0806030902050204" pitchFamily="34" charset="0"/>
-              </a:rPr>
-              <a:t>           00000000</a:t>
-            </a:r>
-            <a:endParaRPr lang="ja-JP" altLang="en-US" sz="4800" b="0" cap="none" spc="0" dirty="0">
-              <a:ln w="0"/>
-              <a:solidFill>
-                <a:schemeClr val="tx1"/>
-              </a:solidFill>
-              <a:effectLst>
-                <a:outerShdw blurRad="38100" dist="19050" dir="2700000" algn="tl" rotWithShape="0">
-                  <a:schemeClr val="dk1">
-                    <a:alpha val="40000"/>
-                  </a:schemeClr>
-                </a:outerShdw>
-              </a:effectLst>
-              <a:latin typeface="Impact" panose="020B0806030902050204" pitchFamily="34" charset="0"/>
-            </a:endParaRPr>
-          </a:p>
-        </p:txBody>
-      </p:sp>
-    </p:spTree>
-    <p:extLst>
-      <p:ext uri="{BB962C8B-B14F-4D97-AF65-F5344CB8AC3E}">
-        <p14:creationId xmlns:p14="http://schemas.microsoft.com/office/powerpoint/2010/main" val="1169875834"/>
-      </p:ext>
-    </p:extLst>
-  </p:cSld>
-  <p:clrMapOvr>
-    <a:masterClrMapping/>
-  </p:clrMapOvr>
-  <p:transition spd="slow" advClick="0">
-    <p:fade thruBlk="1"/>
-  </p:transition>
-</p:sld>
-</file>
-
-<file path=ppt/slides/slide8.xml><?xml version="1.0" encoding="utf-8"?>
-<p:sld xmlns:a="http://schemas.openxmlformats.org/drawingml/2006/main" xmlns:r="http://schemas.openxmlformats.org/officeDocument/2006/relationships" xmlns:p="http://schemas.openxmlformats.org/presentationml/2006/main">
-  <p:cSld>
-    <p:spTree>
-      <p:nvGrpSpPr>
-        <p:cNvPr id="1" name=""/>
-        <p:cNvGrpSpPr/>
-        <p:nvPr/>
-      </p:nvGrpSpPr>
-      <p:grpSpPr>
-        <a:xfrm>
-          <a:off x="0" y="0"/>
-          <a:ext cx="0" cy="0"/>
-          <a:chOff x="0" y="0"/>
-          <a:chExt cx="0" cy="0"/>
-        </a:xfrm>
-      </p:grpSpPr>
-      <p:sp>
-        <p:nvSpPr>
-          <p:cNvPr id="2" name="正方形/長方形 1">
-            <a:extLst>
-              <a:ext uri="{FF2B5EF4-FFF2-40B4-BE49-F238E27FC236}">
-                <a16:creationId xmlns:a16="http://schemas.microsoft.com/office/drawing/2014/main" id="{335E1CB8-E728-0D6C-1199-ADF9C830F8BE}"/>
-              </a:ext>
-            </a:extLst>
-          </p:cNvPr>
-          <p:cNvSpPr/>
-          <p:nvPr/>
-        </p:nvSpPr>
-        <p:spPr>
-          <a:xfrm>
-            <a:off x="-106205" y="-15365"/>
-            <a:ext cx="12192000" cy="6858000"/>
-          </a:xfrm>
-          <a:prstGeom prst="rect">
-            <a:avLst/>
-          </a:prstGeom>
-          <a:solidFill>
-            <a:schemeClr val="tx1"/>
-          </a:solidFill>
-          <a:ln>
-            <a:solidFill>
-              <a:schemeClr val="tx1"/>
-            </a:solidFill>
-          </a:ln>
-        </p:spPr>
-        <p:style>
-          <a:lnRef idx="2">
-            <a:schemeClr val="accent1">
-              <a:shade val="15000"/>
-            </a:schemeClr>
-          </a:lnRef>
-          <a:fillRef idx="1">
-            <a:schemeClr val="accent1"/>
-          </a:fillRef>
-          <a:effectRef idx="0">
-            <a:schemeClr val="accent1"/>
-          </a:effectRef>
-          <a:fontRef idx="minor">
-            <a:schemeClr val="lt1"/>
-          </a:fontRef>
-        </p:style>
-        <p:txBody>
-          <a:bodyPr rtlCol="0" anchor="ctr"/>
-          <a:lstStyle/>
-          <a:p>
-            <a:pPr algn="ctr"/>
-            <a:endParaRPr kumimoji="1" lang="ja-JP" altLang="en-US"/>
-          </a:p>
-        </p:txBody>
-      </p:sp>
-      <p:sp>
-        <p:nvSpPr>
-          <p:cNvPr id="4" name="正方形/長方形 3">
-            <a:extLst>
-              <a:ext uri="{FF2B5EF4-FFF2-40B4-BE49-F238E27FC236}">
-                <a16:creationId xmlns:a16="http://schemas.microsoft.com/office/drawing/2014/main" id="{65D0E1D4-A7E4-6674-45EA-BE8E94FC0E73}"/>
-              </a:ext>
-            </a:extLst>
-          </p:cNvPr>
-          <p:cNvSpPr/>
-          <p:nvPr/>
-        </p:nvSpPr>
-        <p:spPr>
-          <a:xfrm>
-            <a:off x="271606" y="98492"/>
-            <a:ext cx="2339102" cy="461665"/>
-          </a:xfrm>
-          <a:prstGeom prst="rect">
-            <a:avLst/>
-          </a:prstGeom>
-          <a:noFill/>
-        </p:spPr>
-        <p:txBody>
-          <a:bodyPr wrap="none" lIns="91440" tIns="45720" rIns="91440" bIns="45720">
-            <a:spAutoFit/>
-          </a:bodyPr>
-          <a:lstStyle/>
-          <a:p>
-            <a:r>
-              <a:rPr lang="ja-JP" altLang="en-US" sz="2400" b="0" cap="none" spc="0" dirty="0">
-                <a:ln w="0"/>
-                <a:solidFill>
-                  <a:schemeClr val="bg1"/>
-                </a:solidFill>
-                <a:latin typeface="ＭＳ Ｐゴシック" panose="020B0600070205080204" pitchFamily="50" charset="-128"/>
-                <a:ea typeface="ＭＳ Ｐゴシック" panose="020B0600070205080204" pitchFamily="50" charset="-128"/>
-              </a:rPr>
-              <a:t>今後の進行予定</a:t>
-            </a:r>
-          </a:p>
-        </p:txBody>
-      </p:sp>
-      <p:sp>
-        <p:nvSpPr>
-          <p:cNvPr id="6" name="正方形/長方形 5">
-            <a:extLst>
-              <a:ext uri="{FF2B5EF4-FFF2-40B4-BE49-F238E27FC236}">
-                <a16:creationId xmlns:a16="http://schemas.microsoft.com/office/drawing/2014/main" id="{C97BEE27-579C-0514-9E76-58F84A896CCB}"/>
-              </a:ext>
-            </a:extLst>
-          </p:cNvPr>
-          <p:cNvSpPr/>
-          <p:nvPr/>
-        </p:nvSpPr>
-        <p:spPr>
-          <a:xfrm>
-            <a:off x="1781752" y="2082877"/>
-            <a:ext cx="3334567" cy="461665"/>
-          </a:xfrm>
-          <a:prstGeom prst="rect">
-            <a:avLst/>
-          </a:prstGeom>
-          <a:noFill/>
-        </p:spPr>
-        <p:txBody>
-          <a:bodyPr wrap="none" lIns="91440" tIns="45720" rIns="91440" bIns="45720">
-            <a:spAutoFit/>
-          </a:bodyPr>
-          <a:lstStyle/>
-          <a:p>
-            <a:r>
-              <a:rPr lang="ja-JP" altLang="en-US" sz="2400" b="0" cap="none" spc="0" dirty="0">
-                <a:ln w="0"/>
-                <a:solidFill>
-                  <a:schemeClr val="bg1"/>
-                </a:solidFill>
-                <a:latin typeface="ＭＳ Ｐゴシック" panose="020B0600070205080204" pitchFamily="50" charset="-128"/>
-                <a:ea typeface="ＭＳ Ｐゴシック" panose="020B0600070205080204" pitchFamily="50" charset="-128"/>
-              </a:rPr>
-              <a:t>予定：〇までに●●予定</a:t>
-            </a:r>
-          </a:p>
-        </p:txBody>
-      </p:sp>
-      <p:sp>
-        <p:nvSpPr>
-          <p:cNvPr id="7" name="正方形/長方形 6">
-            <a:extLst>
-              <a:ext uri="{FF2B5EF4-FFF2-40B4-BE49-F238E27FC236}">
-                <a16:creationId xmlns:a16="http://schemas.microsoft.com/office/drawing/2014/main" id="{19862AEE-1FFE-FEEC-8316-4D66E7366590}"/>
-              </a:ext>
-            </a:extLst>
-          </p:cNvPr>
-          <p:cNvSpPr/>
-          <p:nvPr/>
-        </p:nvSpPr>
-        <p:spPr>
-          <a:xfrm>
-            <a:off x="1794450" y="2951970"/>
-            <a:ext cx="1947969" cy="461665"/>
-          </a:xfrm>
-          <a:prstGeom prst="rect">
-            <a:avLst/>
-          </a:prstGeom>
-          <a:noFill/>
-        </p:spPr>
-        <p:txBody>
-          <a:bodyPr wrap="none" lIns="91440" tIns="45720" rIns="91440" bIns="45720">
-            <a:spAutoFit/>
-          </a:bodyPr>
-          <a:lstStyle/>
-          <a:p>
-            <a:r>
-              <a:rPr lang="en-US" altLang="ja-JP" sz="2400" b="0" cap="none" spc="0" dirty="0">
-                <a:ln w="0"/>
-                <a:solidFill>
-                  <a:schemeClr val="bg1"/>
-                </a:solidFill>
-                <a:latin typeface="ＭＳ Ｐゴシック" panose="020B0600070205080204" pitchFamily="50" charset="-128"/>
-                <a:ea typeface="ＭＳ Ｐゴシック" panose="020B0600070205080204" pitchFamily="50" charset="-128"/>
-              </a:rPr>
-              <a:t>※</a:t>
-            </a:r>
-            <a:r>
-              <a:rPr lang="ja-JP" altLang="en-US" sz="2400" b="0" cap="none" spc="0" dirty="0">
-                <a:ln w="0"/>
-                <a:solidFill>
-                  <a:schemeClr val="bg1"/>
-                </a:solidFill>
-                <a:latin typeface="ＭＳ Ｐゴシック" panose="020B0600070205080204" pitchFamily="50" charset="-128"/>
-                <a:ea typeface="ＭＳ Ｐゴシック" panose="020B0600070205080204" pitchFamily="50" charset="-128"/>
-              </a:rPr>
-              <a:t>頑張った所</a:t>
-            </a:r>
-          </a:p>
-        </p:txBody>
-      </p:sp>
-      <p:sp>
-        <p:nvSpPr>
-          <p:cNvPr id="8" name="正方形/長方形 7">
-            <a:extLst>
-              <a:ext uri="{FF2B5EF4-FFF2-40B4-BE49-F238E27FC236}">
-                <a16:creationId xmlns:a16="http://schemas.microsoft.com/office/drawing/2014/main" id="{39A255D6-B2EF-7B18-0260-B2B97EBE5619}"/>
-              </a:ext>
-            </a:extLst>
-          </p:cNvPr>
-          <p:cNvSpPr/>
-          <p:nvPr/>
-        </p:nvSpPr>
-        <p:spPr>
-          <a:xfrm>
-            <a:off x="1808842" y="3843620"/>
-            <a:ext cx="4180953" cy="461665"/>
-          </a:xfrm>
-          <a:prstGeom prst="rect">
-            <a:avLst/>
-          </a:prstGeom>
-          <a:noFill/>
-        </p:spPr>
-        <p:txBody>
-          <a:bodyPr wrap="none" lIns="91440" tIns="45720" rIns="91440" bIns="45720">
-            <a:spAutoFit/>
-          </a:bodyPr>
-          <a:lstStyle/>
-          <a:p>
-            <a:r>
-              <a:rPr lang="en-US" altLang="ja-JP" sz="2400" b="0" cap="none" spc="0" dirty="0">
-                <a:ln w="0"/>
-                <a:solidFill>
-                  <a:schemeClr val="bg1"/>
-                </a:solidFill>
-                <a:latin typeface="ＭＳ Ｐゴシック" panose="020B0600070205080204" pitchFamily="50" charset="-128"/>
-                <a:ea typeface="ＭＳ Ｐゴシック" panose="020B0600070205080204" pitchFamily="50" charset="-128"/>
-              </a:rPr>
-              <a:t>※</a:t>
-            </a:r>
-            <a:r>
-              <a:rPr lang="ja-JP" altLang="en-US" sz="2400" b="0" cap="none" spc="0" dirty="0">
-                <a:ln w="0"/>
-                <a:solidFill>
-                  <a:schemeClr val="bg1"/>
-                </a:solidFill>
-                <a:latin typeface="ＭＳ Ｐゴシック" panose="020B0600070205080204" pitchFamily="50" charset="-128"/>
-                <a:ea typeface="ＭＳ Ｐゴシック" panose="020B0600070205080204" pitchFamily="50" charset="-128"/>
-              </a:rPr>
-              <a:t>苦労した所（苦労しそうな所）</a:t>
-            </a:r>
-          </a:p>
-        </p:txBody>
-      </p:sp>
-      <p:sp>
-        <p:nvSpPr>
-          <p:cNvPr id="9" name="正方形/長方形 8">
-            <a:extLst>
-              <a:ext uri="{FF2B5EF4-FFF2-40B4-BE49-F238E27FC236}">
-                <a16:creationId xmlns:a16="http://schemas.microsoft.com/office/drawing/2014/main" id="{353DD8CA-D70F-E721-5044-29ADD2E8DF82}"/>
-              </a:ext>
-            </a:extLst>
-          </p:cNvPr>
-          <p:cNvSpPr/>
-          <p:nvPr/>
-        </p:nvSpPr>
-        <p:spPr>
-          <a:xfrm>
-            <a:off x="1808842" y="4873615"/>
-            <a:ext cx="1107996" cy="461665"/>
-          </a:xfrm>
-          <a:prstGeom prst="rect">
-            <a:avLst/>
-          </a:prstGeom>
-          <a:noFill/>
-        </p:spPr>
-        <p:txBody>
-          <a:bodyPr wrap="none" lIns="91440" tIns="45720" rIns="91440" bIns="45720">
-            <a:spAutoFit/>
-          </a:bodyPr>
-          <a:lstStyle/>
-          <a:p>
-            <a:r>
-              <a:rPr lang="en-US" altLang="ja-JP" sz="2400" b="0" cap="none" spc="0" dirty="0">
-                <a:ln w="0"/>
-                <a:solidFill>
-                  <a:schemeClr val="bg1"/>
-                </a:solidFill>
-                <a:latin typeface="ＭＳ Ｐゴシック" panose="020B0600070205080204" pitchFamily="50" charset="-128"/>
-                <a:ea typeface="ＭＳ Ｐゴシック" panose="020B0600070205080204" pitchFamily="50" charset="-128"/>
-              </a:rPr>
-              <a:t>※</a:t>
-            </a:r>
-            <a:r>
-              <a:rPr lang="ja-JP" altLang="en-US" sz="2400" b="0" cap="none" spc="0" dirty="0">
-                <a:ln w="0"/>
-                <a:solidFill>
-                  <a:schemeClr val="bg1"/>
-                </a:solidFill>
-                <a:latin typeface="ＭＳ Ｐゴシック" panose="020B0600070205080204" pitchFamily="50" charset="-128"/>
-                <a:ea typeface="ＭＳ Ｐゴシック" panose="020B0600070205080204" pitchFamily="50" charset="-128"/>
-              </a:rPr>
-              <a:t>質問</a:t>
-            </a:r>
-          </a:p>
-        </p:txBody>
-      </p:sp>
-      <p:sp>
-        <p:nvSpPr>
-          <p:cNvPr id="3" name="正方形/長方形 2">
-            <a:extLst>
-              <a:ext uri="{FF2B5EF4-FFF2-40B4-BE49-F238E27FC236}">
-                <a16:creationId xmlns:a16="http://schemas.microsoft.com/office/drawing/2014/main" id="{2CA32A28-392A-FFA8-9FBE-0BF1FC82913A}"/>
-              </a:ext>
-            </a:extLst>
-          </p:cNvPr>
-          <p:cNvSpPr/>
-          <p:nvPr/>
-        </p:nvSpPr>
-        <p:spPr>
-          <a:xfrm>
-            <a:off x="6096000" y="4702516"/>
-            <a:ext cx="2978331" cy="461665"/>
-          </a:xfrm>
-          <a:prstGeom prst="rect">
-            <a:avLst/>
-          </a:prstGeom>
-          <a:solidFill>
-            <a:srgbClr val="0070C0"/>
-          </a:solidFill>
-        </p:spPr>
-        <p:txBody>
-          <a:bodyPr wrap="square" lIns="91440" tIns="45720" rIns="91440" bIns="45720" anchor="t">
-            <a:spAutoFit/>
-          </a:bodyPr>
-          <a:lstStyle/>
-          <a:p>
-            <a:pPr algn="l"/>
-            <a:endParaRPr lang="ja-JP" altLang="en-US" sz="2400" b="0" i="0" dirty="0">
-              <a:solidFill>
-                <a:schemeClr val="bg1"/>
-              </a:solidFill>
-              <a:effectLst/>
-              <a:latin typeface="-apple-system"/>
-            </a:endParaRPr>
-          </a:p>
-        </p:txBody>
-      </p:sp>
-    </p:spTree>
-    <p:extLst>
-      <p:ext uri="{BB962C8B-B14F-4D97-AF65-F5344CB8AC3E}">
-        <p14:creationId xmlns:p14="http://schemas.microsoft.com/office/powerpoint/2010/main" val="738029369"/>
+        <p14:creationId xmlns:p14="http://schemas.microsoft.com/office/powerpoint/2010/main" val="1677717371"/>
       </p:ext>
     </p:extLst>
   </p:cSld>
@@ -7379,6 +6178,26 @@
 </file>
 
 <file path=customXml/item1.xml><?xml version="1.0" encoding="utf-8"?>
+<p:properties xmlns:p="http://schemas.microsoft.com/office/2006/metadata/properties" xmlns:xsi="http://www.w3.org/2001/XMLSchema-instance" xmlns:pc="http://schemas.microsoft.com/office/infopath/2007/PartnerControls">
+  <documentManagement>
+    <lcf76f155ced4ddcb4097134ff3c332f xmlns="d7a2ea18-1ea4-4cd6-8c3e-626499c8f82b">
+      <Terms xmlns="http://schemas.microsoft.com/office/infopath/2007/PartnerControls"/>
+    </lcf76f155ced4ddcb4097134ff3c332f>
+    <TaxCatchAll xmlns="f08c68da-d145-4647-b7b0-41852d50ec21" xsi:nil="true"/>
+  </documentManagement>
+</p:properties>
+</file>
+
+<file path=customXml/item2.xml><?xml version="1.0" encoding="utf-8"?>
+<?mso-contentType ?>
+<FormTemplates xmlns="http://schemas.microsoft.com/sharepoint/v3/contenttype/forms">
+  <Display>DocumentLibraryForm</Display>
+  <Edit>DocumentLibraryForm</Edit>
+  <New>DocumentLibraryForm</New>
+</FormTemplates>
+</file>
+
+<file path=customXml/item3.xml><?xml version="1.0" encoding="utf-8"?>
 <ct:contentTypeSchema xmlns:ct="http://schemas.microsoft.com/office/2006/metadata/contentType" xmlns:ma="http://schemas.microsoft.com/office/2006/metadata/properties/metaAttributes" ct:_="" ma:_="" ma:contentTypeName="ドキュメント" ma:contentTypeID="0x0101006DAA2143A7117C49B4C9F8590216C20F" ma:contentTypeVersion="12" ma:contentTypeDescription="新しいドキュメントを作成します。" ma:contentTypeScope="" ma:versionID="cc3aded7008bc64947a264f7acc5aa9e">
   <xsd:schema xmlns:xsd="http://www.w3.org/2001/XMLSchema" xmlns:xs="http://www.w3.org/2001/XMLSchema" xmlns:p="http://schemas.microsoft.com/office/2006/metadata/properties" xmlns:ns2="d7a2ea18-1ea4-4cd6-8c3e-626499c8f82b" xmlns:ns3="f08c68da-d145-4647-b7b0-41852d50ec21" targetNamespace="http://schemas.microsoft.com/office/2006/metadata/properties" ma:root="true" ma:fieldsID="4161c5e7a0c4f05f3e7f581073882928" ns2:_="" ns3:_="">
     <xsd:import namespace="d7a2ea18-1ea4-4cd6-8c3e-626499c8f82b"/>
@@ -7579,27 +6398,28 @@
 </ct:contentTypeSchema>
 </file>
 
-<file path=customXml/item2.xml><?xml version="1.0" encoding="utf-8"?>
-<p:properties xmlns:p="http://schemas.microsoft.com/office/2006/metadata/properties" xmlns:xsi="http://www.w3.org/2001/XMLSchema-instance" xmlns:pc="http://schemas.microsoft.com/office/infopath/2007/PartnerControls">
-  <documentManagement>
-    <lcf76f155ced4ddcb4097134ff3c332f xmlns="d7a2ea18-1ea4-4cd6-8c3e-626499c8f82b">
-      <Terms xmlns="http://schemas.microsoft.com/office/infopath/2007/PartnerControls"/>
-    </lcf76f155ced4ddcb4097134ff3c332f>
-    <TaxCatchAll xmlns="f08c68da-d145-4647-b7b0-41852d50ec21" xsi:nil="true"/>
-  </documentManagement>
-</p:properties>
+<file path=customXml/itemProps1.xml><?xml version="1.0" encoding="utf-8"?>
+<ds:datastoreItem xmlns:ds="http://schemas.openxmlformats.org/officeDocument/2006/customXml" ds:itemID="{94561E12-DD42-4580-91AA-2E56B6F36D47}">
+  <ds:schemaRefs>
+    <ds:schemaRef ds:uri="http://schemas.microsoft.com/office/2006/metadata/properties"/>
+    <ds:schemaRef ds:uri="http://schemas.microsoft.com/office/infopath/2007/PartnerControls"/>
+    <ds:schemaRef ds:uri="7e320a98-111e-4df1-b565-db8f036c2c07"/>
+    <ds:schemaRef ds:uri="d5e75185-ab09-4bd5-a24e-9040de8604a3"/>
+    <ds:schemaRef ds:uri="d7a2ea18-1ea4-4cd6-8c3e-626499c8f82b"/>
+    <ds:schemaRef ds:uri="f08c68da-d145-4647-b7b0-41852d50ec21"/>
+  </ds:schemaRefs>
+</ds:datastoreItem>
 </file>
 
-<file path=customXml/item3.xml><?xml version="1.0" encoding="utf-8"?>
-<?mso-contentType ?>
-<FormTemplates xmlns="http://schemas.microsoft.com/sharepoint/v3/contenttype/forms">
-  <Display>DocumentLibraryForm</Display>
-  <Edit>DocumentLibraryForm</Edit>
-  <New>DocumentLibraryForm</New>
-</FormTemplates>
+<file path=customXml/itemProps2.xml><?xml version="1.0" encoding="utf-8"?>
+<ds:datastoreItem xmlns:ds="http://schemas.openxmlformats.org/officeDocument/2006/customXml" ds:itemID="{E8216681-D782-45CA-A4C0-F2540F3F281E}">
+  <ds:schemaRefs>
+    <ds:schemaRef ds:uri="http://schemas.microsoft.com/sharepoint/v3/contenttype/forms"/>
+  </ds:schemaRefs>
+</ds:datastoreItem>
 </file>
 
-<file path=customXml/itemProps1.xml><?xml version="1.0" encoding="utf-8"?>
+<file path=customXml/itemProps3.xml><?xml version="1.0" encoding="utf-8"?>
 <ds:datastoreItem xmlns:ds="http://schemas.openxmlformats.org/officeDocument/2006/customXml" ds:itemID="{A68EAD39-B5C6-48C1-A06D-E3B75FEE4AC3}">
   <ds:schemaRefs>
     <ds:schemaRef ds:uri="http://schemas.microsoft.com/office/2006/metadata/contentType"/>
@@ -7616,25 +6436,4 @@
     <ds:schemaRef ds:uri="http://schemas.microsoft.com/internal/obd"/>
   </ds:schemaRefs>
 </ds:datastoreItem>
-</file>
-
-<file path=customXml/itemProps2.xml><?xml version="1.0" encoding="utf-8"?>
-<ds:datastoreItem xmlns:ds="http://schemas.openxmlformats.org/officeDocument/2006/customXml" ds:itemID="{94561E12-DD42-4580-91AA-2E56B6F36D47}">
-  <ds:schemaRefs>
-    <ds:schemaRef ds:uri="http://schemas.microsoft.com/office/2006/metadata/properties"/>
-    <ds:schemaRef ds:uri="http://schemas.microsoft.com/office/infopath/2007/PartnerControls"/>
-    <ds:schemaRef ds:uri="7e320a98-111e-4df1-b565-db8f036c2c07"/>
-    <ds:schemaRef ds:uri="d5e75185-ab09-4bd5-a24e-9040de8604a3"/>
-    <ds:schemaRef ds:uri="d7a2ea18-1ea4-4cd6-8c3e-626499c8f82b"/>
-    <ds:schemaRef ds:uri="f08c68da-d145-4647-b7b0-41852d50ec21"/>
-  </ds:schemaRefs>
-</ds:datastoreItem>
-</file>
-
-<file path=customXml/itemProps3.xml><?xml version="1.0" encoding="utf-8"?>
-<ds:datastoreItem xmlns:ds="http://schemas.openxmlformats.org/officeDocument/2006/customXml" ds:itemID="{E8216681-D782-45CA-A4C0-F2540F3F281E}">
-  <ds:schemaRefs>
-    <ds:schemaRef ds:uri="http://schemas.microsoft.com/sharepoint/v3/contenttype/forms"/>
-  </ds:schemaRefs>
-</ds:datastoreItem>
 </file>
--- a/概要書.pptx
+++ b/概要書.pptx
@@ -349,7 +349,7 @@
           <a:p>
             <a:fld id="{F2E66AB1-B6F6-4B6F-865F-BEB26A9FE76A}" type="datetimeFigureOut">
               <a:rPr kumimoji="1" lang="ja-JP" altLang="en-US" smtClean="0"/>
-              <a:t>2025/9/12</a:t>
+              <a:t>2025/12/6</a:t>
             </a:fld>
             <a:endParaRPr kumimoji="1" lang="ja-JP" altLang="en-US"/>
           </a:p>
@@ -582,7 +582,7 @@
           <a:p>
             <a:fld id="{F2E66AB1-B6F6-4B6F-865F-BEB26A9FE76A}" type="datetimeFigureOut">
               <a:rPr kumimoji="1" lang="ja-JP" altLang="en-US" smtClean="0"/>
-              <a:t>2025/9/12</a:t>
+              <a:t>2025/12/6</a:t>
             </a:fld>
             <a:endParaRPr kumimoji="1" lang="ja-JP" altLang="en-US"/>
           </a:p>
@@ -825,7 +825,7 @@
           <a:p>
             <a:fld id="{F2E66AB1-B6F6-4B6F-865F-BEB26A9FE76A}" type="datetimeFigureOut">
               <a:rPr kumimoji="1" lang="ja-JP" altLang="en-US" smtClean="0"/>
-              <a:t>2025/9/12</a:t>
+              <a:t>2025/12/6</a:t>
             </a:fld>
             <a:endParaRPr kumimoji="1" lang="ja-JP" altLang="en-US"/>
           </a:p>
@@ -1058,7 +1058,7 @@
           <a:p>
             <a:fld id="{F2E66AB1-B6F6-4B6F-865F-BEB26A9FE76A}" type="datetimeFigureOut">
               <a:rPr kumimoji="1" lang="ja-JP" altLang="en-US" smtClean="0"/>
-              <a:t>2025/9/12</a:t>
+              <a:t>2025/12/6</a:t>
             </a:fld>
             <a:endParaRPr kumimoji="1" lang="ja-JP" altLang="en-US"/>
           </a:p>
@@ -1336,7 +1336,7 @@
           <a:p>
             <a:fld id="{F2E66AB1-B6F6-4B6F-865F-BEB26A9FE76A}" type="datetimeFigureOut">
               <a:rPr kumimoji="1" lang="ja-JP" altLang="en-US" smtClean="0"/>
-              <a:t>2025/9/12</a:t>
+              <a:t>2025/12/6</a:t>
             </a:fld>
             <a:endParaRPr kumimoji="1" lang="ja-JP" altLang="en-US"/>
           </a:p>
@@ -1668,7 +1668,7 @@
           <a:p>
             <a:fld id="{F2E66AB1-B6F6-4B6F-865F-BEB26A9FE76A}" type="datetimeFigureOut">
               <a:rPr kumimoji="1" lang="ja-JP" altLang="en-US" smtClean="0"/>
-              <a:t>2025/9/12</a:t>
+              <a:t>2025/12/6</a:t>
             </a:fld>
             <a:endParaRPr kumimoji="1" lang="ja-JP" altLang="en-US"/>
           </a:p>
@@ -2147,7 +2147,7 @@
           <a:p>
             <a:fld id="{F2E66AB1-B6F6-4B6F-865F-BEB26A9FE76A}" type="datetimeFigureOut">
               <a:rPr kumimoji="1" lang="ja-JP" altLang="en-US" smtClean="0"/>
-              <a:t>2025/9/12</a:t>
+              <a:t>2025/12/6</a:t>
             </a:fld>
             <a:endParaRPr kumimoji="1" lang="ja-JP" altLang="en-US"/>
           </a:p>
@@ -2291,7 +2291,7 @@
           <a:p>
             <a:fld id="{F2E66AB1-B6F6-4B6F-865F-BEB26A9FE76A}" type="datetimeFigureOut">
               <a:rPr kumimoji="1" lang="ja-JP" altLang="en-US" smtClean="0"/>
-              <a:t>2025/9/12</a:t>
+              <a:t>2025/12/6</a:t>
             </a:fld>
             <a:endParaRPr kumimoji="1" lang="ja-JP" altLang="en-US"/>
           </a:p>
@@ -2407,7 +2407,7 @@
           <a:p>
             <a:fld id="{F2E66AB1-B6F6-4B6F-865F-BEB26A9FE76A}" type="datetimeFigureOut">
               <a:rPr kumimoji="1" lang="ja-JP" altLang="en-US" smtClean="0"/>
-              <a:t>2025/9/12</a:t>
+              <a:t>2025/12/6</a:t>
             </a:fld>
             <a:endParaRPr kumimoji="1" lang="ja-JP" altLang="en-US"/>
           </a:p>
@@ -2753,7 +2753,7 @@
           <a:p>
             <a:fld id="{F2E66AB1-B6F6-4B6F-865F-BEB26A9FE76A}" type="datetimeFigureOut">
               <a:rPr kumimoji="1" lang="ja-JP" altLang="en-US" smtClean="0"/>
-              <a:t>2025/9/12</a:t>
+              <a:t>2025/12/6</a:t>
             </a:fld>
             <a:endParaRPr kumimoji="1" lang="ja-JP" altLang="en-US"/>
           </a:p>
@@ -3044,7 +3044,7 @@
           <a:p>
             <a:fld id="{F2E66AB1-B6F6-4B6F-865F-BEB26A9FE76A}" type="datetimeFigureOut">
               <a:rPr kumimoji="1" lang="ja-JP" altLang="en-US" smtClean="0"/>
-              <a:t>2025/9/12</a:t>
+              <a:t>2025/12/6</a:t>
             </a:fld>
             <a:endParaRPr kumimoji="1" lang="ja-JP" altLang="en-US"/>
           </a:p>
@@ -3320,7 +3320,7 @@
           <a:p>
             <a:fld id="{F2E66AB1-B6F6-4B6F-865F-BEB26A9FE76A}" type="datetimeFigureOut">
               <a:rPr kumimoji="1" lang="ja-JP" altLang="en-US" smtClean="0"/>
-              <a:t>2025/9/12</a:t>
+              <a:t>2025/12/6</a:t>
             </a:fld>
             <a:endParaRPr kumimoji="1" lang="ja-JP" altLang="en-US"/>
           </a:p>
@@ -3754,7 +3754,7 @@
         </p:nvSpPr>
         <p:spPr>
           <a:xfrm>
-            <a:off x="-1" y="0"/>
+            <a:off x="0" y="0"/>
             <a:ext cx="12192000" cy="6858000"/>
           </a:xfrm>
           <a:prstGeom prst="rect">
@@ -5017,7 +5017,7 @@
         <p:spPr>
           <a:xfrm>
             <a:off x="513806" y="792480"/>
-            <a:ext cx="5695405" cy="4524315"/>
+            <a:ext cx="5695405" cy="5355312"/>
           </a:xfrm>
           <a:prstGeom prst="rect">
             <a:avLst/>
@@ -5039,6 +5039,26 @@
           <a:p>
             <a:r>
               <a:rPr lang="ja-JP" altLang="en-US" dirty="0"/>
+              <a:t>操作</a:t>
+            </a:r>
+            <a:endParaRPr lang="en-US" altLang="ja-JP" dirty="0"/>
+          </a:p>
+          <a:p>
+            <a:r>
+              <a:rPr kumimoji="1" lang="ja-JP" altLang="en-US" dirty="0"/>
+              <a:t>コントローラー</a:t>
+            </a:r>
+            <a:endParaRPr kumimoji="1" lang="en-US" altLang="ja-JP" dirty="0"/>
+          </a:p>
+          <a:p>
+            <a:endParaRPr lang="en-US" altLang="ja-JP" dirty="0"/>
+          </a:p>
+          <a:p>
+            <a:endParaRPr kumimoji="1" lang="en-US" altLang="ja-JP" dirty="0"/>
+          </a:p>
+          <a:p>
+            <a:r>
+              <a:rPr lang="ja-JP" altLang="en-US" dirty="0"/>
               <a:t>どちらかの</a:t>
             </a:r>
             <a:r>
@@ -5097,26 +5117,7 @@
             </a:pPr>
             <a:r>
               <a:rPr lang="ja-JP" altLang="en-US" dirty="0"/>
-              <a:t>回避（追加予定）</a:t>
-            </a:r>
-            <a:endParaRPr lang="en-US" altLang="ja-JP" dirty="0"/>
-          </a:p>
-          <a:p>
-            <a:pPr marL="285750" indent="-285750">
-              <a:buFont typeface="Arial" panose="020B0604020202020204" pitchFamily="34" charset="0"/>
-              <a:buChar char="•"/>
-            </a:pPr>
-            <a:r>
-              <a:rPr lang="ja-JP" altLang="en-US" dirty="0"/>
-              <a:t>攻撃を</a:t>
-            </a:r>
-            <a:r>
-              <a:rPr lang="en-US" altLang="ja-JP" dirty="0"/>
-              <a:t>5</a:t>
-            </a:r>
-            <a:r>
-              <a:rPr lang="ja-JP" altLang="en-US" dirty="0"/>
-              <a:t>秒受けないとじょじょに回復</a:t>
+              <a:t>回避</a:t>
             </a:r>
             <a:endParaRPr lang="en-US" altLang="ja-JP" dirty="0"/>
           </a:p>
@@ -6189,15 +6190,6 @@
 </file>
 
 <file path=customXml/item2.xml><?xml version="1.0" encoding="utf-8"?>
-<?mso-contentType ?>
-<FormTemplates xmlns="http://schemas.microsoft.com/sharepoint/v3/contenttype/forms">
-  <Display>DocumentLibraryForm</Display>
-  <Edit>DocumentLibraryForm</Edit>
-  <New>DocumentLibraryForm</New>
-</FormTemplates>
-</file>
-
-<file path=customXml/item3.xml><?xml version="1.0" encoding="utf-8"?>
 <ct:contentTypeSchema xmlns:ct="http://schemas.microsoft.com/office/2006/metadata/contentType" xmlns:ma="http://schemas.microsoft.com/office/2006/metadata/properties/metaAttributes" ct:_="" ma:_="" ma:contentTypeName="ドキュメント" ma:contentTypeID="0x0101006DAA2143A7117C49B4C9F8590216C20F" ma:contentTypeVersion="12" ma:contentTypeDescription="新しいドキュメントを作成します。" ma:contentTypeScope="" ma:versionID="cc3aded7008bc64947a264f7acc5aa9e">
   <xsd:schema xmlns:xsd="http://www.w3.org/2001/XMLSchema" xmlns:xs="http://www.w3.org/2001/XMLSchema" xmlns:p="http://schemas.microsoft.com/office/2006/metadata/properties" xmlns:ns2="d7a2ea18-1ea4-4cd6-8c3e-626499c8f82b" xmlns:ns3="f08c68da-d145-4647-b7b0-41852d50ec21" targetNamespace="http://schemas.microsoft.com/office/2006/metadata/properties" ma:root="true" ma:fieldsID="4161c5e7a0c4f05f3e7f581073882928" ns2:_="" ns3:_="">
     <xsd:import namespace="d7a2ea18-1ea4-4cd6-8c3e-626499c8f82b"/>
@@ -6398,6 +6390,15 @@
 </ct:contentTypeSchema>
 </file>
 
+<file path=customXml/item3.xml><?xml version="1.0" encoding="utf-8"?>
+<?mso-contentType ?>
+<FormTemplates xmlns="http://schemas.microsoft.com/sharepoint/v3/contenttype/forms">
+  <Display>DocumentLibraryForm</Display>
+  <Edit>DocumentLibraryForm</Edit>
+  <New>DocumentLibraryForm</New>
+</FormTemplates>
+</file>
+
 <file path=customXml/itemProps1.xml><?xml version="1.0" encoding="utf-8"?>
 <ds:datastoreItem xmlns:ds="http://schemas.openxmlformats.org/officeDocument/2006/customXml" ds:itemID="{94561E12-DD42-4580-91AA-2E56B6F36D47}">
   <ds:schemaRefs>
@@ -6412,14 +6413,6 @@
 </file>
 
 <file path=customXml/itemProps2.xml><?xml version="1.0" encoding="utf-8"?>
-<ds:datastoreItem xmlns:ds="http://schemas.openxmlformats.org/officeDocument/2006/customXml" ds:itemID="{E8216681-D782-45CA-A4C0-F2540F3F281E}">
-  <ds:schemaRefs>
-    <ds:schemaRef ds:uri="http://schemas.microsoft.com/sharepoint/v3/contenttype/forms"/>
-  </ds:schemaRefs>
-</ds:datastoreItem>
-</file>
-
-<file path=customXml/itemProps3.xml><?xml version="1.0" encoding="utf-8"?>
 <ds:datastoreItem xmlns:ds="http://schemas.openxmlformats.org/officeDocument/2006/customXml" ds:itemID="{A68EAD39-B5C6-48C1-A06D-E3B75FEE4AC3}">
   <ds:schemaRefs>
     <ds:schemaRef ds:uri="http://schemas.microsoft.com/office/2006/metadata/contentType"/>
@@ -6436,4 +6429,12 @@
     <ds:schemaRef ds:uri="http://schemas.microsoft.com/internal/obd"/>
   </ds:schemaRefs>
 </ds:datastoreItem>
+</file>
+
+<file path=customXml/itemProps3.xml><?xml version="1.0" encoding="utf-8"?>
+<ds:datastoreItem xmlns:ds="http://schemas.openxmlformats.org/officeDocument/2006/customXml" ds:itemID="{E8216681-D782-45CA-A4C0-F2540F3F281E}">
+  <ds:schemaRefs>
+    <ds:schemaRef ds:uri="http://schemas.microsoft.com/sharepoint/v3/contenttype/forms"/>
+  </ds:schemaRefs>
+</ds:datastoreItem>
 </file>
--- a/概要書.pptx
+++ b/概要書.pptx
@@ -11,6 +11,7 @@
     <p:sldId id="343" r:id="rId8"/>
     <p:sldId id="342" r:id="rId9"/>
     <p:sldId id="344" r:id="rId10"/>
+    <p:sldId id="345" r:id="rId11"/>
   </p:sldIdLst>
   <p:sldSz cx="12192000" cy="6858000"/>
   <p:notesSz cx="6858000" cy="9144000"/>
@@ -349,7 +350,7 @@
           <a:p>
             <a:fld id="{F2E66AB1-B6F6-4B6F-865F-BEB26A9FE76A}" type="datetimeFigureOut">
               <a:rPr kumimoji="1" lang="ja-JP" altLang="en-US" smtClean="0"/>
-              <a:t>2025/12/6</a:t>
+              <a:t>2025/12/13</a:t>
             </a:fld>
             <a:endParaRPr kumimoji="1" lang="ja-JP" altLang="en-US"/>
           </a:p>
@@ -582,7 +583,7 @@
           <a:p>
             <a:fld id="{F2E66AB1-B6F6-4B6F-865F-BEB26A9FE76A}" type="datetimeFigureOut">
               <a:rPr kumimoji="1" lang="ja-JP" altLang="en-US" smtClean="0"/>
-              <a:t>2025/12/6</a:t>
+              <a:t>2025/12/13</a:t>
             </a:fld>
             <a:endParaRPr kumimoji="1" lang="ja-JP" altLang="en-US"/>
           </a:p>
@@ -825,7 +826,7 @@
           <a:p>
             <a:fld id="{F2E66AB1-B6F6-4B6F-865F-BEB26A9FE76A}" type="datetimeFigureOut">
               <a:rPr kumimoji="1" lang="ja-JP" altLang="en-US" smtClean="0"/>
-              <a:t>2025/12/6</a:t>
+              <a:t>2025/12/13</a:t>
             </a:fld>
             <a:endParaRPr kumimoji="1" lang="ja-JP" altLang="en-US"/>
           </a:p>
@@ -1058,7 +1059,7 @@
           <a:p>
             <a:fld id="{F2E66AB1-B6F6-4B6F-865F-BEB26A9FE76A}" type="datetimeFigureOut">
               <a:rPr kumimoji="1" lang="ja-JP" altLang="en-US" smtClean="0"/>
-              <a:t>2025/12/6</a:t>
+              <a:t>2025/12/13</a:t>
             </a:fld>
             <a:endParaRPr kumimoji="1" lang="ja-JP" altLang="en-US"/>
           </a:p>
@@ -1336,7 +1337,7 @@
           <a:p>
             <a:fld id="{F2E66AB1-B6F6-4B6F-865F-BEB26A9FE76A}" type="datetimeFigureOut">
               <a:rPr kumimoji="1" lang="ja-JP" altLang="en-US" smtClean="0"/>
-              <a:t>2025/12/6</a:t>
+              <a:t>2025/12/13</a:t>
             </a:fld>
             <a:endParaRPr kumimoji="1" lang="ja-JP" altLang="en-US"/>
           </a:p>
@@ -1668,7 +1669,7 @@
           <a:p>
             <a:fld id="{F2E66AB1-B6F6-4B6F-865F-BEB26A9FE76A}" type="datetimeFigureOut">
               <a:rPr kumimoji="1" lang="ja-JP" altLang="en-US" smtClean="0"/>
-              <a:t>2025/12/6</a:t>
+              <a:t>2025/12/13</a:t>
             </a:fld>
             <a:endParaRPr kumimoji="1" lang="ja-JP" altLang="en-US"/>
           </a:p>
@@ -2147,7 +2148,7 @@
           <a:p>
             <a:fld id="{F2E66AB1-B6F6-4B6F-865F-BEB26A9FE76A}" type="datetimeFigureOut">
               <a:rPr kumimoji="1" lang="ja-JP" altLang="en-US" smtClean="0"/>
-              <a:t>2025/12/6</a:t>
+              <a:t>2025/12/13</a:t>
             </a:fld>
             <a:endParaRPr kumimoji="1" lang="ja-JP" altLang="en-US"/>
           </a:p>
@@ -2291,7 +2292,7 @@
           <a:p>
             <a:fld id="{F2E66AB1-B6F6-4B6F-865F-BEB26A9FE76A}" type="datetimeFigureOut">
               <a:rPr kumimoji="1" lang="ja-JP" altLang="en-US" smtClean="0"/>
-              <a:t>2025/12/6</a:t>
+              <a:t>2025/12/13</a:t>
             </a:fld>
             <a:endParaRPr kumimoji="1" lang="ja-JP" altLang="en-US"/>
           </a:p>
@@ -2407,7 +2408,7 @@
           <a:p>
             <a:fld id="{F2E66AB1-B6F6-4B6F-865F-BEB26A9FE76A}" type="datetimeFigureOut">
               <a:rPr kumimoji="1" lang="ja-JP" altLang="en-US" smtClean="0"/>
-              <a:t>2025/12/6</a:t>
+              <a:t>2025/12/13</a:t>
             </a:fld>
             <a:endParaRPr kumimoji="1" lang="ja-JP" altLang="en-US"/>
           </a:p>
@@ -2753,7 +2754,7 @@
           <a:p>
             <a:fld id="{F2E66AB1-B6F6-4B6F-865F-BEB26A9FE76A}" type="datetimeFigureOut">
               <a:rPr kumimoji="1" lang="ja-JP" altLang="en-US" smtClean="0"/>
-              <a:t>2025/12/6</a:t>
+              <a:t>2025/12/13</a:t>
             </a:fld>
             <a:endParaRPr kumimoji="1" lang="ja-JP" altLang="en-US"/>
           </a:p>
@@ -3044,7 +3045,7 @@
           <a:p>
             <a:fld id="{F2E66AB1-B6F6-4B6F-865F-BEB26A9FE76A}" type="datetimeFigureOut">
               <a:rPr kumimoji="1" lang="ja-JP" altLang="en-US" smtClean="0"/>
-              <a:t>2025/12/6</a:t>
+              <a:t>2025/12/13</a:t>
             </a:fld>
             <a:endParaRPr kumimoji="1" lang="ja-JP" altLang="en-US"/>
           </a:p>
@@ -3320,7 +3321,7 @@
           <a:p>
             <a:fld id="{F2E66AB1-B6F6-4B6F-865F-BEB26A9FE76A}" type="datetimeFigureOut">
               <a:rPr kumimoji="1" lang="ja-JP" altLang="en-US" smtClean="0"/>
-              <a:t>2025/12/6</a:t>
+              <a:t>2025/12/13</a:t>
             </a:fld>
             <a:endParaRPr kumimoji="1" lang="ja-JP" altLang="en-US"/>
           </a:p>
@@ -5883,6 +5884,102 @@
 </p:sld>
 </file>
 
+<file path=ppt/slides/slide7.xml><?xml version="1.0" encoding="utf-8"?>
+<p:sld xmlns:a="http://schemas.openxmlformats.org/drawingml/2006/main" xmlns:r="http://schemas.openxmlformats.org/officeDocument/2006/relationships" xmlns:p="http://schemas.openxmlformats.org/presentationml/2006/main">
+  <p:cSld>
+    <p:spTree>
+      <p:nvGrpSpPr>
+        <p:cNvPr id="1" name=""/>
+        <p:cNvGrpSpPr/>
+        <p:nvPr/>
+      </p:nvGrpSpPr>
+      <p:grpSpPr>
+        <a:xfrm>
+          <a:off x="0" y="0"/>
+          <a:ext cx="0" cy="0"/>
+          <a:chOff x="0" y="0"/>
+          <a:chExt cx="0" cy="0"/>
+        </a:xfrm>
+      </p:grpSpPr>
+      <p:sp>
+        <p:nvSpPr>
+          <p:cNvPr id="2" name="タイトル 1">
+            <a:extLst>
+              <a:ext uri="{FF2B5EF4-FFF2-40B4-BE49-F238E27FC236}">
+                <a16:creationId xmlns:a16="http://schemas.microsoft.com/office/drawing/2014/main" id="{0F762027-9418-BE6B-F731-43336C61A998}"/>
+              </a:ext>
+            </a:extLst>
+          </p:cNvPr>
+          <p:cNvSpPr>
+            <a:spLocks noGrp="1"/>
+          </p:cNvSpPr>
+          <p:nvPr>
+            <p:ph type="title"/>
+          </p:nvPr>
+        </p:nvSpPr>
+        <p:spPr/>
+        <p:txBody>
+          <a:bodyPr/>
+          <a:lstStyle/>
+          <a:p>
+            <a:r>
+              <a:rPr kumimoji="1" lang="ja-JP" altLang="en-US" dirty="0"/>
+              <a:t>こだわり</a:t>
+            </a:r>
+          </a:p>
+        </p:txBody>
+      </p:sp>
+      <p:sp>
+        <p:nvSpPr>
+          <p:cNvPr id="3" name="テキスト ボックス 2">
+            <a:extLst>
+              <a:ext uri="{FF2B5EF4-FFF2-40B4-BE49-F238E27FC236}">
+                <a16:creationId xmlns:a16="http://schemas.microsoft.com/office/drawing/2014/main" id="{AA172321-620A-CAEF-01AD-EBDFE9ABF79B}"/>
+              </a:ext>
+            </a:extLst>
+          </p:cNvPr>
+          <p:cNvSpPr txBox="1"/>
+          <p:nvPr/>
+        </p:nvSpPr>
+        <p:spPr>
+          <a:xfrm>
+            <a:off x="933061" y="1690688"/>
+            <a:ext cx="6885992" cy="369332"/>
+          </a:xfrm>
+          <a:prstGeom prst="rect">
+            <a:avLst/>
+          </a:prstGeom>
+          <a:noFill/>
+        </p:spPr>
+        <p:txBody>
+          <a:bodyPr wrap="square" rtlCol="0">
+            <a:spAutoFit/>
+          </a:bodyPr>
+          <a:lstStyle/>
+          <a:p>
+            <a:r>
+              <a:rPr kumimoji="1" lang="ja-JP" altLang="en-US" dirty="0"/>
+              <a:t>必殺技のシーンをいっぱい作った</a:t>
+            </a:r>
+          </a:p>
+        </p:txBody>
+      </p:sp>
+    </p:spTree>
+    <p:extLst>
+      <p:ext uri="{BB962C8B-B14F-4D97-AF65-F5344CB8AC3E}">
+        <p14:creationId xmlns:p14="http://schemas.microsoft.com/office/powerpoint/2010/main" val="2707800218"/>
+      </p:ext>
+    </p:extLst>
+  </p:cSld>
+  <p:clrMapOvr>
+    <a:masterClrMapping/>
+  </p:clrMapOvr>
+  <p:transition spd="slow" advClick="0">
+    <p:fade thruBlk="1"/>
+  </p:transition>
+</p:sld>
+</file>
+
 <file path=ppt/theme/theme1.xml><?xml version="1.0" encoding="utf-8"?>
 <a:theme xmlns:a="http://schemas.openxmlformats.org/drawingml/2006/main" name="Office テーマ">
   <a:themeElements>
@@ -6190,6 +6287,15 @@
 </file>
 
 <file path=customXml/item2.xml><?xml version="1.0" encoding="utf-8"?>
+<?mso-contentType ?>
+<FormTemplates xmlns="http://schemas.microsoft.com/sharepoint/v3/contenttype/forms">
+  <Display>DocumentLibraryForm</Display>
+  <Edit>DocumentLibraryForm</Edit>
+  <New>DocumentLibraryForm</New>
+</FormTemplates>
+</file>
+
+<file path=customXml/item3.xml><?xml version="1.0" encoding="utf-8"?>
 <ct:contentTypeSchema xmlns:ct="http://schemas.microsoft.com/office/2006/metadata/contentType" xmlns:ma="http://schemas.microsoft.com/office/2006/metadata/properties/metaAttributes" ct:_="" ma:_="" ma:contentTypeName="ドキュメント" ma:contentTypeID="0x0101006DAA2143A7117C49B4C9F8590216C20F" ma:contentTypeVersion="12" ma:contentTypeDescription="新しいドキュメントを作成します。" ma:contentTypeScope="" ma:versionID="cc3aded7008bc64947a264f7acc5aa9e">
   <xsd:schema xmlns:xsd="http://www.w3.org/2001/XMLSchema" xmlns:xs="http://www.w3.org/2001/XMLSchema" xmlns:p="http://schemas.microsoft.com/office/2006/metadata/properties" xmlns:ns2="d7a2ea18-1ea4-4cd6-8c3e-626499c8f82b" xmlns:ns3="f08c68da-d145-4647-b7b0-41852d50ec21" targetNamespace="http://schemas.microsoft.com/office/2006/metadata/properties" ma:root="true" ma:fieldsID="4161c5e7a0c4f05f3e7f581073882928" ns2:_="" ns3:_="">
     <xsd:import namespace="d7a2ea18-1ea4-4cd6-8c3e-626499c8f82b"/>
@@ -6390,15 +6496,6 @@
 </ct:contentTypeSchema>
 </file>
 
-<file path=customXml/item3.xml><?xml version="1.0" encoding="utf-8"?>
-<?mso-contentType ?>
-<FormTemplates xmlns="http://schemas.microsoft.com/sharepoint/v3/contenttype/forms">
-  <Display>DocumentLibraryForm</Display>
-  <Edit>DocumentLibraryForm</Edit>
-  <New>DocumentLibraryForm</New>
-</FormTemplates>
-</file>
-
 <file path=customXml/itemProps1.xml><?xml version="1.0" encoding="utf-8"?>
 <ds:datastoreItem xmlns:ds="http://schemas.openxmlformats.org/officeDocument/2006/customXml" ds:itemID="{94561E12-DD42-4580-91AA-2E56B6F36D47}">
   <ds:schemaRefs>
@@ -6413,6 +6510,14 @@
 </file>
 
 <file path=customXml/itemProps2.xml><?xml version="1.0" encoding="utf-8"?>
+<ds:datastoreItem xmlns:ds="http://schemas.openxmlformats.org/officeDocument/2006/customXml" ds:itemID="{E8216681-D782-45CA-A4C0-F2540F3F281E}">
+  <ds:schemaRefs>
+    <ds:schemaRef ds:uri="http://schemas.microsoft.com/sharepoint/v3/contenttype/forms"/>
+  </ds:schemaRefs>
+</ds:datastoreItem>
+</file>
+
+<file path=customXml/itemProps3.xml><?xml version="1.0" encoding="utf-8"?>
 <ds:datastoreItem xmlns:ds="http://schemas.openxmlformats.org/officeDocument/2006/customXml" ds:itemID="{A68EAD39-B5C6-48C1-A06D-E3B75FEE4AC3}">
   <ds:schemaRefs>
     <ds:schemaRef ds:uri="http://schemas.microsoft.com/office/2006/metadata/contentType"/>
@@ -6429,12 +6534,4 @@
     <ds:schemaRef ds:uri="http://schemas.microsoft.com/internal/obd"/>
   </ds:schemaRefs>
 </ds:datastoreItem>
-</file>
-
-<file path=customXml/itemProps3.xml><?xml version="1.0" encoding="utf-8"?>
-<ds:datastoreItem xmlns:ds="http://schemas.openxmlformats.org/officeDocument/2006/customXml" ds:itemID="{E8216681-D782-45CA-A4C0-F2540F3F281E}">
-  <ds:schemaRefs>
-    <ds:schemaRef ds:uri="http://schemas.microsoft.com/sharepoint/v3/contenttype/forms"/>
-  </ds:schemaRefs>
-</ds:datastoreItem>
 </file>
--- a/概要書.pptx
+++ b/概要書.pptx
@@ -4503,29 +4503,7 @@
                 <a:latin typeface="ＭＳ Ｐゴシック" panose="020B0600070205080204" pitchFamily="50" charset="-128"/>
                 <a:ea typeface="ＭＳ Ｐゴシック" panose="020B0600070205080204" pitchFamily="50" charset="-128"/>
               </a:rPr>
-              <a:t>操作系 </a:t>
-            </a:r>
-            <a:r>
-              <a:rPr lang="en-US" altLang="ja-JP" sz="2400" dirty="0">
-                <a:ln w="0"/>
-                <a:solidFill>
-                  <a:schemeClr val="bg1"/>
-                </a:solidFill>
-                <a:latin typeface="ＭＳ Ｐゴシック" panose="020B0600070205080204" pitchFamily="50" charset="-128"/>
-                <a:ea typeface="ＭＳ Ｐゴシック" panose="020B0600070205080204" pitchFamily="50" charset="-128"/>
-              </a:rPr>
-              <a:t>WSAD </a:t>
-            </a:r>
-            <a:r>
-              <a:rPr lang="ja-JP" altLang="en-US" sz="2400" dirty="0">
-                <a:ln w="0"/>
-                <a:solidFill>
-                  <a:schemeClr val="bg1"/>
-                </a:solidFill>
-                <a:latin typeface="ＭＳ Ｐゴシック" panose="020B0600070205080204" pitchFamily="50" charset="-128"/>
-                <a:ea typeface="ＭＳ Ｐゴシック" panose="020B0600070205080204" pitchFamily="50" charset="-128"/>
-              </a:rPr>
-              <a:t>マウス</a:t>
+              <a:t>操作系 コントローラー</a:t>
             </a:r>
             <a:br>
               <a:rPr lang="en-US" altLang="ja-JP" sz="2400" b="0" cap="none" spc="0" dirty="0">
@@ -5924,7 +5902,7 @@
           <a:p>
             <a:r>
               <a:rPr kumimoji="1" lang="ja-JP" altLang="en-US" dirty="0"/>
-              <a:t>こだわり</a:t>
+              <a:t>こだわり（頑張ったこと）</a:t>
             </a:r>
           </a:p>
         </p:txBody>
@@ -5944,7 +5922,7 @@
         <p:spPr>
           <a:xfrm>
             <a:off x="933061" y="1690688"/>
-            <a:ext cx="6885992" cy="369332"/>
+            <a:ext cx="11372150" cy="2862322"/>
           </a:xfrm>
           <a:prstGeom prst="rect">
             <a:avLst/>
@@ -5959,8 +5937,80 @@
           <a:p>
             <a:r>
               <a:rPr kumimoji="1" lang="ja-JP" altLang="en-US" dirty="0"/>
-              <a:t>必殺技のシーンをいっぱい作った</a:t>
-            </a:r>
+              <a:t>必殺技のシーンを時間で管理した</a:t>
+            </a:r>
+            <a:endParaRPr kumimoji="1" lang="en-US" altLang="ja-JP" dirty="0"/>
+          </a:p>
+          <a:p>
+            <a:r>
+              <a:rPr lang="ja-JP" altLang="en-US" dirty="0"/>
+              <a:t>必殺技をクラスで一括管理</a:t>
+            </a:r>
+            <a:endParaRPr kumimoji="1" lang="en-US" altLang="ja-JP" dirty="0"/>
+          </a:p>
+          <a:p>
+            <a:r>
+              <a:rPr lang="ja-JP" altLang="en-US" dirty="0"/>
+              <a:t>アニメーションの終わり際に座標を合わせるようにした</a:t>
+            </a:r>
+            <a:endParaRPr lang="en-US" altLang="ja-JP" dirty="0"/>
+          </a:p>
+          <a:p>
+            <a:r>
+              <a:rPr kumimoji="1" lang="ja-JP" altLang="en-US" dirty="0"/>
+              <a:t>必殺技の残像</a:t>
+            </a:r>
+            <a:endParaRPr kumimoji="1" lang="en-US" altLang="ja-JP" dirty="0"/>
+          </a:p>
+          <a:p>
+            <a:r>
+              <a:rPr lang="ja-JP" altLang="en-US" dirty="0"/>
+              <a:t>エフェクトマネージャ（オーバーロードで細かいシュチュエーションに対応）</a:t>
+            </a:r>
+            <a:endParaRPr lang="en-US" altLang="ja-JP" dirty="0"/>
+          </a:p>
+          <a:p>
+            <a:r>
+              <a:rPr lang="ja-JP" altLang="en-US" dirty="0"/>
+              <a:t>　　　　　　　　　　（プールを終わり削除　満杯時は</a:t>
+            </a:r>
+            <a:r>
+              <a:rPr lang="en-US" altLang="ja-JP" dirty="0"/>
+              <a:t>1</a:t>
+            </a:r>
+            <a:r>
+              <a:rPr lang="ja-JP" altLang="en-US" dirty="0"/>
+              <a:t>番古い物を削除し追加）</a:t>
+            </a:r>
+            <a:endParaRPr lang="en-US" altLang="ja-JP" dirty="0"/>
+          </a:p>
+          <a:p>
+            <a:r>
+              <a:rPr kumimoji="1" lang="ja-JP" altLang="en-US" dirty="0"/>
+              <a:t>サウンドクラス　　　（軽いステレオ音源化　音源に制限あり）</a:t>
+            </a:r>
+            <a:endParaRPr kumimoji="1" lang="en-US" altLang="ja-JP" dirty="0"/>
+          </a:p>
+          <a:p>
+            <a:r>
+              <a:rPr lang="ja-JP" altLang="en-US" dirty="0"/>
+              <a:t>カメラクラス　　　　（基本的なカメラクラスを実装）</a:t>
+            </a:r>
+            <a:endParaRPr lang="en-US" altLang="ja-JP" dirty="0"/>
+          </a:p>
+          <a:p>
+            <a:r>
+              <a:rPr kumimoji="1" lang="ja-JP" altLang="en-US" dirty="0"/>
+              <a:t>ヒット時以外にも細かく振動する　（攻撃　受けた時　食らわせた時　ゲージがたまり切った時）</a:t>
+            </a:r>
+            <a:endParaRPr kumimoji="1" lang="en-US" altLang="ja-JP" dirty="0"/>
+          </a:p>
+          <a:p>
+            <a:r>
+              <a:rPr lang="ja-JP" altLang="en-US" dirty="0"/>
+              <a:t>最終的な更新をアップデートにまとめる　</a:t>
+            </a:r>
+            <a:endParaRPr kumimoji="1" lang="en-US" altLang="ja-JP" dirty="0"/>
           </a:p>
         </p:txBody>
       </p:sp>
@@ -6276,6 +6326,15 @@
 </file>
 
 <file path=customXml/item1.xml><?xml version="1.0" encoding="utf-8"?>
+<?mso-contentType ?>
+<FormTemplates xmlns="http://schemas.microsoft.com/sharepoint/v3/contenttype/forms">
+  <Display>DocumentLibraryForm</Display>
+  <Edit>DocumentLibraryForm</Edit>
+  <New>DocumentLibraryForm</New>
+</FormTemplates>
+</file>
+
+<file path=customXml/item2.xml><?xml version="1.0" encoding="utf-8"?>
 <p:properties xmlns:p="http://schemas.microsoft.com/office/2006/metadata/properties" xmlns:xsi="http://www.w3.org/2001/XMLSchema-instance" xmlns:pc="http://schemas.microsoft.com/office/infopath/2007/PartnerControls">
   <documentManagement>
     <lcf76f155ced4ddcb4097134ff3c332f xmlns="d7a2ea18-1ea4-4cd6-8c3e-626499c8f82b">
@@ -6284,15 +6343,6 @@
     <TaxCatchAll xmlns="f08c68da-d145-4647-b7b0-41852d50ec21" xsi:nil="true"/>
   </documentManagement>
 </p:properties>
-</file>
-
-<file path=customXml/item2.xml><?xml version="1.0" encoding="utf-8"?>
-<?mso-contentType ?>
-<FormTemplates xmlns="http://schemas.microsoft.com/sharepoint/v3/contenttype/forms">
-  <Display>DocumentLibraryForm</Display>
-  <Edit>DocumentLibraryForm</Edit>
-  <New>DocumentLibraryForm</New>
-</FormTemplates>
 </file>
 
 <file path=customXml/item3.xml><?xml version="1.0" encoding="utf-8"?>
@@ -6497,6 +6547,14 @@
 </file>
 
 <file path=customXml/itemProps1.xml><?xml version="1.0" encoding="utf-8"?>
+<ds:datastoreItem xmlns:ds="http://schemas.openxmlformats.org/officeDocument/2006/customXml" ds:itemID="{E8216681-D782-45CA-A4C0-F2540F3F281E}">
+  <ds:schemaRefs>
+    <ds:schemaRef ds:uri="http://schemas.microsoft.com/sharepoint/v3/contenttype/forms"/>
+  </ds:schemaRefs>
+</ds:datastoreItem>
+</file>
+
+<file path=customXml/itemProps2.xml><?xml version="1.0" encoding="utf-8"?>
 <ds:datastoreItem xmlns:ds="http://schemas.openxmlformats.org/officeDocument/2006/customXml" ds:itemID="{94561E12-DD42-4580-91AA-2E56B6F36D47}">
   <ds:schemaRefs>
     <ds:schemaRef ds:uri="http://schemas.microsoft.com/office/2006/metadata/properties"/>
@@ -6505,14 +6563,6 @@
     <ds:schemaRef ds:uri="d5e75185-ab09-4bd5-a24e-9040de8604a3"/>
     <ds:schemaRef ds:uri="d7a2ea18-1ea4-4cd6-8c3e-626499c8f82b"/>
     <ds:schemaRef ds:uri="f08c68da-d145-4647-b7b0-41852d50ec21"/>
-  </ds:schemaRefs>
-</ds:datastoreItem>
-</file>
-
-<file path=customXml/itemProps2.xml><?xml version="1.0" encoding="utf-8"?>
-<ds:datastoreItem xmlns:ds="http://schemas.openxmlformats.org/officeDocument/2006/customXml" ds:itemID="{E8216681-D782-45CA-A4C0-F2540F3F281E}">
-  <ds:schemaRefs>
-    <ds:schemaRef ds:uri="http://schemas.microsoft.com/sharepoint/v3/contenttype/forms"/>
   </ds:schemaRefs>
 </ds:datastoreItem>
 </file>

--- a/概要書.pptx
+++ b/概要書.pptx
@@ -350,7 +350,7 @@
           <a:p>
             <a:fld id="{F2E66AB1-B6F6-4B6F-865F-BEB26A9FE76A}" type="datetimeFigureOut">
               <a:rPr kumimoji="1" lang="ja-JP" altLang="en-US" smtClean="0"/>
-              <a:t>2025/12/13</a:t>
+              <a:t>2025/12/15</a:t>
             </a:fld>
             <a:endParaRPr kumimoji="1" lang="ja-JP" altLang="en-US"/>
           </a:p>
@@ -583,7 +583,7 @@
           <a:p>
             <a:fld id="{F2E66AB1-B6F6-4B6F-865F-BEB26A9FE76A}" type="datetimeFigureOut">
               <a:rPr kumimoji="1" lang="ja-JP" altLang="en-US" smtClean="0"/>
-              <a:t>2025/12/13</a:t>
+              <a:t>2025/12/15</a:t>
             </a:fld>
             <a:endParaRPr kumimoji="1" lang="ja-JP" altLang="en-US"/>
           </a:p>
@@ -826,7 +826,7 @@
           <a:p>
             <a:fld id="{F2E66AB1-B6F6-4B6F-865F-BEB26A9FE76A}" type="datetimeFigureOut">
               <a:rPr kumimoji="1" lang="ja-JP" altLang="en-US" smtClean="0"/>
-              <a:t>2025/12/13</a:t>
+              <a:t>2025/12/15</a:t>
             </a:fld>
             <a:endParaRPr kumimoji="1" lang="ja-JP" altLang="en-US"/>
           </a:p>
@@ -1059,7 +1059,7 @@
           <a:p>
             <a:fld id="{F2E66AB1-B6F6-4B6F-865F-BEB26A9FE76A}" type="datetimeFigureOut">
               <a:rPr kumimoji="1" lang="ja-JP" altLang="en-US" smtClean="0"/>
-              <a:t>2025/12/13</a:t>
+              <a:t>2025/12/15</a:t>
             </a:fld>
             <a:endParaRPr kumimoji="1" lang="ja-JP" altLang="en-US"/>
           </a:p>
@@ -1337,7 +1337,7 @@
           <a:p>
             <a:fld id="{F2E66AB1-B6F6-4B6F-865F-BEB26A9FE76A}" type="datetimeFigureOut">
               <a:rPr kumimoji="1" lang="ja-JP" altLang="en-US" smtClean="0"/>
-              <a:t>2025/12/13</a:t>
+              <a:t>2025/12/15</a:t>
             </a:fld>
             <a:endParaRPr kumimoji="1" lang="ja-JP" altLang="en-US"/>
           </a:p>
@@ -1669,7 +1669,7 @@
           <a:p>
             <a:fld id="{F2E66AB1-B6F6-4B6F-865F-BEB26A9FE76A}" type="datetimeFigureOut">
               <a:rPr kumimoji="1" lang="ja-JP" altLang="en-US" smtClean="0"/>
-              <a:t>2025/12/13</a:t>
+              <a:t>2025/12/15</a:t>
             </a:fld>
             <a:endParaRPr kumimoji="1" lang="ja-JP" altLang="en-US"/>
           </a:p>
@@ -2148,7 +2148,7 @@
           <a:p>
             <a:fld id="{F2E66AB1-B6F6-4B6F-865F-BEB26A9FE76A}" type="datetimeFigureOut">
               <a:rPr kumimoji="1" lang="ja-JP" altLang="en-US" smtClean="0"/>
-              <a:t>2025/12/13</a:t>
+              <a:t>2025/12/15</a:t>
             </a:fld>
             <a:endParaRPr kumimoji="1" lang="ja-JP" altLang="en-US"/>
           </a:p>
@@ -2292,7 +2292,7 @@
           <a:p>
             <a:fld id="{F2E66AB1-B6F6-4B6F-865F-BEB26A9FE76A}" type="datetimeFigureOut">
               <a:rPr kumimoji="1" lang="ja-JP" altLang="en-US" smtClean="0"/>
-              <a:t>2025/12/13</a:t>
+              <a:t>2025/12/15</a:t>
             </a:fld>
             <a:endParaRPr kumimoji="1" lang="ja-JP" altLang="en-US"/>
           </a:p>
@@ -2408,7 +2408,7 @@
           <a:p>
             <a:fld id="{F2E66AB1-B6F6-4B6F-865F-BEB26A9FE76A}" type="datetimeFigureOut">
               <a:rPr kumimoji="1" lang="ja-JP" altLang="en-US" smtClean="0"/>
-              <a:t>2025/12/13</a:t>
+              <a:t>2025/12/15</a:t>
             </a:fld>
             <a:endParaRPr kumimoji="1" lang="ja-JP" altLang="en-US"/>
           </a:p>
@@ -2754,7 +2754,7 @@
           <a:p>
             <a:fld id="{F2E66AB1-B6F6-4B6F-865F-BEB26A9FE76A}" type="datetimeFigureOut">
               <a:rPr kumimoji="1" lang="ja-JP" altLang="en-US" smtClean="0"/>
-              <a:t>2025/12/13</a:t>
+              <a:t>2025/12/15</a:t>
             </a:fld>
             <a:endParaRPr kumimoji="1" lang="ja-JP" altLang="en-US"/>
           </a:p>
@@ -3045,7 +3045,7 @@
           <a:p>
             <a:fld id="{F2E66AB1-B6F6-4B6F-865F-BEB26A9FE76A}" type="datetimeFigureOut">
               <a:rPr kumimoji="1" lang="ja-JP" altLang="en-US" smtClean="0"/>
-              <a:t>2025/12/13</a:t>
+              <a:t>2025/12/15</a:t>
             </a:fld>
             <a:endParaRPr kumimoji="1" lang="ja-JP" altLang="en-US"/>
           </a:p>
@@ -3321,7 +3321,7 @@
           <a:p>
             <a:fld id="{F2E66AB1-B6F6-4B6F-865F-BEB26A9FE76A}" type="datetimeFigureOut">
               <a:rPr kumimoji="1" lang="ja-JP" altLang="en-US" smtClean="0"/>
-              <a:t>2025/12/13</a:t>
+              <a:t>2025/12/15</a:t>
             </a:fld>
             <a:endParaRPr kumimoji="1" lang="ja-JP" altLang="en-US"/>
           </a:p>
@@ -5610,7 +5610,7 @@
         <p:spPr>
           <a:xfrm>
             <a:off x="158314" y="4205618"/>
-            <a:ext cx="6131561" cy="923330"/>
+            <a:ext cx="6131561" cy="646331"/>
           </a:xfrm>
           <a:prstGeom prst="rect">
             <a:avLst/>
@@ -5627,31 +5627,20 @@
               <a:rPr kumimoji="1" lang="ja-JP" altLang="en-US" dirty="0"/>
               <a:t>発動条件</a:t>
             </a:r>
-            <a:endParaRPr kumimoji="1" lang="en-US" altLang="ja-JP" dirty="0"/>
-          </a:p>
-          <a:p>
-            <a:r>
-              <a:rPr lang="en-US" altLang="ja-JP" dirty="0"/>
-              <a:t>G</a:t>
-            </a:r>
             <a:r>
               <a:rPr lang="ja-JP" altLang="en-US" dirty="0"/>
-              <a:t>キー　今後ゲージの実装やキーの変更をする予定 </a:t>
+              <a:t> </a:t>
             </a:r>
             <a:endParaRPr lang="en-US" altLang="ja-JP" dirty="0"/>
           </a:p>
           <a:p>
             <a:r>
               <a:rPr lang="ja-JP" altLang="en-US" dirty="0"/>
-              <a:t>コントローラーは　</a:t>
+              <a:t>ゲージがたまった状態で</a:t>
             </a:r>
             <a:r>
               <a:rPr lang="en-US" altLang="ja-JP" dirty="0"/>
               <a:t>R</a:t>
-            </a:r>
-            <a:r>
-              <a:rPr lang="ja-JP" altLang="en-US" dirty="0"/>
-              <a:t>　予定</a:t>
             </a:r>
             <a:endParaRPr kumimoji="1" lang="ja-JP" altLang="en-US" dirty="0"/>
           </a:p>
@@ -5690,13 +5679,10 @@
               <a:t>メリット　敵を吹っ飛ばすので猶予ができる　</a:t>
             </a:r>
             <a:r>
-              <a:rPr kumimoji="1" lang="en-US" altLang="ja-JP" dirty="0"/>
-              <a:t>Hp</a:t>
-            </a:r>
-            <a:r>
-              <a:rPr kumimoji="1" lang="ja-JP" altLang="en-US" dirty="0"/>
-              <a:t>が低いとき回復の猶予　無敵　大ダメージ</a:t>
-            </a:r>
+              <a:rPr lang="ja-JP" altLang="en-US" dirty="0"/>
+              <a:t>強い</a:t>
+            </a:r>
+            <a:endParaRPr kumimoji="1" lang="ja-JP" altLang="en-US" dirty="0"/>
           </a:p>
         </p:txBody>
       </p:sp>
@@ -6326,15 +6312,6 @@
 </file>
 
 <file path=customXml/item1.xml><?xml version="1.0" encoding="utf-8"?>
-<?mso-contentType ?>
-<FormTemplates xmlns="http://schemas.microsoft.com/sharepoint/v3/contenttype/forms">
-  <Display>DocumentLibraryForm</Display>
-  <Edit>DocumentLibraryForm</Edit>
-  <New>DocumentLibraryForm</New>
-</FormTemplates>
-</file>
-
-<file path=customXml/item2.xml><?xml version="1.0" encoding="utf-8"?>
 <p:properties xmlns:p="http://schemas.microsoft.com/office/2006/metadata/properties" xmlns:xsi="http://www.w3.org/2001/XMLSchema-instance" xmlns:pc="http://schemas.microsoft.com/office/infopath/2007/PartnerControls">
   <documentManagement>
     <lcf76f155ced4ddcb4097134ff3c332f xmlns="d7a2ea18-1ea4-4cd6-8c3e-626499c8f82b">
@@ -6343,6 +6320,15 @@
     <TaxCatchAll xmlns="f08c68da-d145-4647-b7b0-41852d50ec21" xsi:nil="true"/>
   </documentManagement>
 </p:properties>
+</file>
+
+<file path=customXml/item2.xml><?xml version="1.0" encoding="utf-8"?>
+<?mso-contentType ?>
+<FormTemplates xmlns="http://schemas.microsoft.com/sharepoint/v3/contenttype/forms">
+  <Display>DocumentLibraryForm</Display>
+  <Edit>DocumentLibraryForm</Edit>
+  <New>DocumentLibraryForm</New>
+</FormTemplates>
 </file>
 
 <file path=customXml/item3.xml><?xml version="1.0" encoding="utf-8"?>
@@ -6547,14 +6533,6 @@
 </file>
 
 <file path=customXml/itemProps1.xml><?xml version="1.0" encoding="utf-8"?>
-<ds:datastoreItem xmlns:ds="http://schemas.openxmlformats.org/officeDocument/2006/customXml" ds:itemID="{E8216681-D782-45CA-A4C0-F2540F3F281E}">
-  <ds:schemaRefs>
-    <ds:schemaRef ds:uri="http://schemas.microsoft.com/sharepoint/v3/contenttype/forms"/>
-  </ds:schemaRefs>
-</ds:datastoreItem>
-</file>
-
-<file path=customXml/itemProps2.xml><?xml version="1.0" encoding="utf-8"?>
 <ds:datastoreItem xmlns:ds="http://schemas.openxmlformats.org/officeDocument/2006/customXml" ds:itemID="{94561E12-DD42-4580-91AA-2E56B6F36D47}">
   <ds:schemaRefs>
     <ds:schemaRef ds:uri="http://schemas.microsoft.com/office/2006/metadata/properties"/>
@@ -6563,6 +6541,14 @@
     <ds:schemaRef ds:uri="d5e75185-ab09-4bd5-a24e-9040de8604a3"/>
     <ds:schemaRef ds:uri="d7a2ea18-1ea4-4cd6-8c3e-626499c8f82b"/>
     <ds:schemaRef ds:uri="f08c68da-d145-4647-b7b0-41852d50ec21"/>
+  </ds:schemaRefs>
+</ds:datastoreItem>
+</file>
+
+<file path=customXml/itemProps2.xml><?xml version="1.0" encoding="utf-8"?>
+<ds:datastoreItem xmlns:ds="http://schemas.openxmlformats.org/officeDocument/2006/customXml" ds:itemID="{E8216681-D782-45CA-A4C0-F2540F3F281E}">
+  <ds:schemaRefs>
+    <ds:schemaRef ds:uri="http://schemas.microsoft.com/sharepoint/v3/contenttype/forms"/>
   </ds:schemaRefs>
 </ds:datastoreItem>
 </file>

--- a/概要書.pptx
+++ b/概要書.pptx
@@ -5640,7 +5640,7 @@
             </a:r>
             <a:r>
               <a:rPr lang="en-US" altLang="ja-JP" dirty="0"/>
-              <a:t>R</a:t>
+              <a:t>Y</a:t>
             </a:r>
             <a:endParaRPr kumimoji="1" lang="ja-JP" altLang="en-US" dirty="0"/>
           </a:p>
@@ -6312,6 +6312,15 @@
 </file>
 
 <file path=customXml/item1.xml><?xml version="1.0" encoding="utf-8"?>
+<?mso-contentType ?>
+<FormTemplates xmlns="http://schemas.microsoft.com/sharepoint/v3/contenttype/forms">
+  <Display>DocumentLibraryForm</Display>
+  <Edit>DocumentLibraryForm</Edit>
+  <New>DocumentLibraryForm</New>
+</FormTemplates>
+</file>
+
+<file path=customXml/item2.xml><?xml version="1.0" encoding="utf-8"?>
 <p:properties xmlns:p="http://schemas.microsoft.com/office/2006/metadata/properties" xmlns:xsi="http://www.w3.org/2001/XMLSchema-instance" xmlns:pc="http://schemas.microsoft.com/office/infopath/2007/PartnerControls">
   <documentManagement>
     <lcf76f155ced4ddcb4097134ff3c332f xmlns="d7a2ea18-1ea4-4cd6-8c3e-626499c8f82b">
@@ -6320,15 +6329,6 @@
     <TaxCatchAll xmlns="f08c68da-d145-4647-b7b0-41852d50ec21" xsi:nil="true"/>
   </documentManagement>
 </p:properties>
-</file>
-
-<file path=customXml/item2.xml><?xml version="1.0" encoding="utf-8"?>
-<?mso-contentType ?>
-<FormTemplates xmlns="http://schemas.microsoft.com/sharepoint/v3/contenttype/forms">
-  <Display>DocumentLibraryForm</Display>
-  <Edit>DocumentLibraryForm</Edit>
-  <New>DocumentLibraryForm</New>
-</FormTemplates>
 </file>
 
 <file path=customXml/item3.xml><?xml version="1.0" encoding="utf-8"?>
@@ -6533,6 +6533,14 @@
 </file>
 
 <file path=customXml/itemProps1.xml><?xml version="1.0" encoding="utf-8"?>
+<ds:datastoreItem xmlns:ds="http://schemas.openxmlformats.org/officeDocument/2006/customXml" ds:itemID="{E8216681-D782-45CA-A4C0-F2540F3F281E}">
+  <ds:schemaRefs>
+    <ds:schemaRef ds:uri="http://schemas.microsoft.com/sharepoint/v3/contenttype/forms"/>
+  </ds:schemaRefs>
+</ds:datastoreItem>
+</file>
+
+<file path=customXml/itemProps2.xml><?xml version="1.0" encoding="utf-8"?>
 <ds:datastoreItem xmlns:ds="http://schemas.openxmlformats.org/officeDocument/2006/customXml" ds:itemID="{94561E12-DD42-4580-91AA-2E56B6F36D47}">
   <ds:schemaRefs>
     <ds:schemaRef ds:uri="http://schemas.microsoft.com/office/2006/metadata/properties"/>
@@ -6541,14 +6549,6 @@
     <ds:schemaRef ds:uri="d5e75185-ab09-4bd5-a24e-9040de8604a3"/>
     <ds:schemaRef ds:uri="d7a2ea18-1ea4-4cd6-8c3e-626499c8f82b"/>
     <ds:schemaRef ds:uri="f08c68da-d145-4647-b7b0-41852d50ec21"/>
-  </ds:schemaRefs>
-</ds:datastoreItem>
-</file>
-
-<file path=customXml/itemProps2.xml><?xml version="1.0" encoding="utf-8"?>
-<ds:datastoreItem xmlns:ds="http://schemas.openxmlformats.org/officeDocument/2006/customXml" ds:itemID="{E8216681-D782-45CA-A4C0-F2540F3F281E}">
-  <ds:schemaRefs>
-    <ds:schemaRef ds:uri="http://schemas.microsoft.com/sharepoint/v3/contenttype/forms"/>
   </ds:schemaRefs>
 </ds:datastoreItem>
 </file>

--- a/概要書.pptx
+++ b/概要書.pptx
@@ -350,7 +350,7 @@
           <a:p>
             <a:fld id="{F2E66AB1-B6F6-4B6F-865F-BEB26A9FE76A}" type="datetimeFigureOut">
               <a:rPr kumimoji="1" lang="ja-JP" altLang="en-US" smtClean="0"/>
-              <a:t>2025/12/15</a:t>
+              <a:t>2025/12/17</a:t>
             </a:fld>
             <a:endParaRPr kumimoji="1" lang="ja-JP" altLang="en-US"/>
           </a:p>
@@ -583,7 +583,7 @@
           <a:p>
             <a:fld id="{F2E66AB1-B6F6-4B6F-865F-BEB26A9FE76A}" type="datetimeFigureOut">
               <a:rPr kumimoji="1" lang="ja-JP" altLang="en-US" smtClean="0"/>
-              <a:t>2025/12/15</a:t>
+              <a:t>2025/12/17</a:t>
             </a:fld>
             <a:endParaRPr kumimoji="1" lang="ja-JP" altLang="en-US"/>
           </a:p>
@@ -826,7 +826,7 @@
           <a:p>
             <a:fld id="{F2E66AB1-B6F6-4B6F-865F-BEB26A9FE76A}" type="datetimeFigureOut">
               <a:rPr kumimoji="1" lang="ja-JP" altLang="en-US" smtClean="0"/>
-              <a:t>2025/12/15</a:t>
+              <a:t>2025/12/17</a:t>
             </a:fld>
             <a:endParaRPr kumimoji="1" lang="ja-JP" altLang="en-US"/>
           </a:p>
@@ -1059,7 +1059,7 @@
           <a:p>
             <a:fld id="{F2E66AB1-B6F6-4B6F-865F-BEB26A9FE76A}" type="datetimeFigureOut">
               <a:rPr kumimoji="1" lang="ja-JP" altLang="en-US" smtClean="0"/>
-              <a:t>2025/12/15</a:t>
+              <a:t>2025/12/17</a:t>
             </a:fld>
             <a:endParaRPr kumimoji="1" lang="ja-JP" altLang="en-US"/>
           </a:p>
@@ -1337,7 +1337,7 @@
           <a:p>
             <a:fld id="{F2E66AB1-B6F6-4B6F-865F-BEB26A9FE76A}" type="datetimeFigureOut">
               <a:rPr kumimoji="1" lang="ja-JP" altLang="en-US" smtClean="0"/>
-              <a:t>2025/12/15</a:t>
+              <a:t>2025/12/17</a:t>
             </a:fld>
             <a:endParaRPr kumimoji="1" lang="ja-JP" altLang="en-US"/>
           </a:p>
@@ -1669,7 +1669,7 @@
           <a:p>
             <a:fld id="{F2E66AB1-B6F6-4B6F-865F-BEB26A9FE76A}" type="datetimeFigureOut">
               <a:rPr kumimoji="1" lang="ja-JP" altLang="en-US" smtClean="0"/>
-              <a:t>2025/12/15</a:t>
+              <a:t>2025/12/17</a:t>
             </a:fld>
             <a:endParaRPr kumimoji="1" lang="ja-JP" altLang="en-US"/>
           </a:p>
@@ -2148,7 +2148,7 @@
           <a:p>
             <a:fld id="{F2E66AB1-B6F6-4B6F-865F-BEB26A9FE76A}" type="datetimeFigureOut">
               <a:rPr kumimoji="1" lang="ja-JP" altLang="en-US" smtClean="0"/>
-              <a:t>2025/12/15</a:t>
+              <a:t>2025/12/17</a:t>
             </a:fld>
             <a:endParaRPr kumimoji="1" lang="ja-JP" altLang="en-US"/>
           </a:p>
@@ -2292,7 +2292,7 @@
           <a:p>
             <a:fld id="{F2E66AB1-B6F6-4B6F-865F-BEB26A9FE76A}" type="datetimeFigureOut">
               <a:rPr kumimoji="1" lang="ja-JP" altLang="en-US" smtClean="0"/>
-              <a:t>2025/12/15</a:t>
+              <a:t>2025/12/17</a:t>
             </a:fld>
             <a:endParaRPr kumimoji="1" lang="ja-JP" altLang="en-US"/>
           </a:p>
@@ -2408,7 +2408,7 @@
           <a:p>
             <a:fld id="{F2E66AB1-B6F6-4B6F-865F-BEB26A9FE76A}" type="datetimeFigureOut">
               <a:rPr kumimoji="1" lang="ja-JP" altLang="en-US" smtClean="0"/>
-              <a:t>2025/12/15</a:t>
+              <a:t>2025/12/17</a:t>
             </a:fld>
             <a:endParaRPr kumimoji="1" lang="ja-JP" altLang="en-US"/>
           </a:p>
@@ -2754,7 +2754,7 @@
           <a:p>
             <a:fld id="{F2E66AB1-B6F6-4B6F-865F-BEB26A9FE76A}" type="datetimeFigureOut">
               <a:rPr kumimoji="1" lang="ja-JP" altLang="en-US" smtClean="0"/>
-              <a:t>2025/12/15</a:t>
+              <a:t>2025/12/17</a:t>
             </a:fld>
             <a:endParaRPr kumimoji="1" lang="ja-JP" altLang="en-US"/>
           </a:p>
@@ -3045,7 +3045,7 @@
           <a:p>
             <a:fld id="{F2E66AB1-B6F6-4B6F-865F-BEB26A9FE76A}" type="datetimeFigureOut">
               <a:rPr kumimoji="1" lang="ja-JP" altLang="en-US" smtClean="0"/>
-              <a:t>2025/12/15</a:t>
+              <a:t>2025/12/17</a:t>
             </a:fld>
             <a:endParaRPr kumimoji="1" lang="ja-JP" altLang="en-US"/>
           </a:p>
@@ -3321,7 +3321,7 @@
           <a:p>
             <a:fld id="{F2E66AB1-B6F6-4B6F-865F-BEB26A9FE76A}" type="datetimeFigureOut">
               <a:rPr kumimoji="1" lang="ja-JP" altLang="en-US" smtClean="0"/>
-              <a:t>2025/12/15</a:t>
+              <a:t>2025/12/17</a:t>
             </a:fld>
             <a:endParaRPr kumimoji="1" lang="ja-JP" altLang="en-US"/>
           </a:p>
@@ -4385,7 +4385,7 @@
         <p:spPr>
           <a:xfrm>
             <a:off x="448407" y="1371262"/>
-            <a:ext cx="3392275" cy="1938992"/>
+            <a:ext cx="4867038" cy="3416320"/>
           </a:xfrm>
           <a:prstGeom prst="rect">
             <a:avLst/>
@@ -4503,7 +4503,28 @@
                 <a:latin typeface="ＭＳ Ｐゴシック" panose="020B0600070205080204" pitchFamily="50" charset="-128"/>
                 <a:ea typeface="ＭＳ Ｐゴシック" panose="020B0600070205080204" pitchFamily="50" charset="-128"/>
               </a:rPr>
-              <a:t>操作系 コントローラー</a:t>
+              <a:t>操作系 </a:t>
+            </a:r>
+            <a:endParaRPr lang="en-US" altLang="ja-JP" sz="2400" dirty="0">
+              <a:ln w="0"/>
+              <a:solidFill>
+                <a:schemeClr val="bg1"/>
+              </a:solidFill>
+              <a:latin typeface="ＭＳ Ｐゴシック" panose="020B0600070205080204" pitchFamily="50" charset="-128"/>
+              <a:ea typeface="ＭＳ Ｐゴシック" panose="020B0600070205080204" pitchFamily="50" charset="-128"/>
+            </a:endParaRPr>
+          </a:p>
+          <a:p>
+            <a:r>
+              <a:rPr lang="ja-JP" altLang="en-US" sz="2400" dirty="0">
+                <a:ln w="0"/>
+                <a:solidFill>
+                  <a:schemeClr val="bg1"/>
+                </a:solidFill>
+                <a:latin typeface="ＭＳ Ｐゴシック" panose="020B0600070205080204" pitchFamily="50" charset="-128"/>
+                <a:ea typeface="ＭＳ Ｐゴシック" panose="020B0600070205080204" pitchFamily="50" charset="-128"/>
+              </a:rPr>
+              <a:t>コントローラー</a:t>
             </a:r>
             <a:br>
               <a:rPr lang="en-US" altLang="ja-JP" sz="2400" b="0" cap="none" spc="0" dirty="0">
@@ -4523,6 +4544,110 @@
               </a:rPr>
               <a:t>・作品の注目ポイント　</a:t>
             </a:r>
+            <a:endParaRPr lang="en-US" altLang="ja-JP" sz="2400" b="0" cap="none" spc="0" dirty="0">
+              <a:ln w="0"/>
+              <a:solidFill>
+                <a:schemeClr val="bg1"/>
+              </a:solidFill>
+              <a:latin typeface="ＭＳ Ｐゴシック"/>
+              <a:ea typeface="ＭＳ Ｐゴシック"/>
+            </a:endParaRPr>
+          </a:p>
+          <a:p>
+            <a:r>
+              <a:rPr lang="ja-JP" altLang="en-US" sz="2400" b="0" cap="none" spc="0" dirty="0">
+                <a:ln w="0"/>
+                <a:solidFill>
+                  <a:schemeClr val="bg1"/>
+                </a:solidFill>
+                <a:latin typeface="ＭＳ Ｐゴシック"/>
+                <a:ea typeface="ＭＳ Ｐゴシック"/>
+              </a:rPr>
+              <a:t>何が起きているか分かりやすい演出</a:t>
+            </a:r>
+            <a:endParaRPr lang="en-US" altLang="ja-JP" sz="2400" b="0" cap="none" spc="0" dirty="0">
+              <a:ln w="0"/>
+              <a:solidFill>
+                <a:schemeClr val="bg1"/>
+              </a:solidFill>
+              <a:latin typeface="ＭＳ Ｐゴシック"/>
+              <a:ea typeface="ＭＳ Ｐゴシック"/>
+            </a:endParaRPr>
+          </a:p>
+          <a:p>
+            <a:r>
+              <a:rPr lang="ja-JP" altLang="en-US" sz="2400" dirty="0">
+                <a:ln w="0"/>
+                <a:solidFill>
+                  <a:schemeClr val="bg1"/>
+                </a:solidFill>
+                <a:latin typeface="ＭＳ Ｐゴシック"/>
+                <a:ea typeface="ＭＳ Ｐゴシック"/>
+              </a:rPr>
+              <a:t>よく動くカメラ</a:t>
+            </a:r>
+            <a:endParaRPr lang="en-US" altLang="ja-JP" sz="2400" dirty="0">
+              <a:ln w="0"/>
+              <a:solidFill>
+                <a:schemeClr val="bg1"/>
+              </a:solidFill>
+              <a:latin typeface="ＭＳ Ｐゴシック"/>
+              <a:ea typeface="ＭＳ Ｐゴシック"/>
+            </a:endParaRPr>
+          </a:p>
+          <a:p>
+            <a:r>
+              <a:rPr lang="ja-JP" altLang="en-US" sz="2400" b="0" cap="none" spc="0" dirty="0">
+                <a:ln w="0"/>
+                <a:solidFill>
+                  <a:schemeClr val="bg1"/>
+                </a:solidFill>
+                <a:latin typeface="ＭＳ Ｐゴシック"/>
+                <a:ea typeface="ＭＳ Ｐゴシック"/>
+              </a:rPr>
+              <a:t>開発環境　</a:t>
+            </a:r>
+            <a:r>
+              <a:rPr lang="en-US" altLang="ja-JP" sz="2400" b="0" cap="none" spc="0" dirty="0" err="1">
+                <a:ln w="0"/>
+                <a:solidFill>
+                  <a:schemeClr val="bg1"/>
+                </a:solidFill>
+                <a:latin typeface="ＭＳ Ｐゴシック"/>
+                <a:ea typeface="ＭＳ Ｐゴシック"/>
+              </a:rPr>
+              <a:t>Dxlib</a:t>
+            </a:r>
+            <a:r>
+              <a:rPr lang="ja-JP" altLang="en-US" sz="2400" b="0" cap="none" spc="0" dirty="0">
+                <a:ln w="0"/>
+                <a:solidFill>
+                  <a:schemeClr val="bg1"/>
+                </a:solidFill>
+                <a:latin typeface="ＭＳ Ｐゴシック"/>
+                <a:ea typeface="ＭＳ Ｐゴシック"/>
+              </a:rPr>
+              <a:t>　</a:t>
+            </a:r>
+            <a:r>
+              <a:rPr lang="en-US" altLang="ja-JP" sz="2400" b="0" cap="none" spc="0" dirty="0">
+                <a:ln w="0"/>
+                <a:solidFill>
+                  <a:schemeClr val="bg1"/>
+                </a:solidFill>
+                <a:latin typeface="ＭＳ Ｐゴシック"/>
+                <a:ea typeface="ＭＳ Ｐゴシック"/>
+              </a:rPr>
+              <a:t>C++</a:t>
+            </a:r>
+            <a:endParaRPr lang="ja-JP" altLang="en-US" sz="2400" b="0" cap="none" spc="0" dirty="0">
+              <a:ln w="0"/>
+              <a:solidFill>
+                <a:schemeClr val="bg1"/>
+              </a:solidFill>
+              <a:latin typeface="ＭＳ Ｐゴシック"/>
+              <a:ea typeface="ＭＳ Ｐゴシック"/>
+            </a:endParaRPr>
           </a:p>
         </p:txBody>
       </p:sp>
@@ -4895,8 +5020,8 @@
         </p:blipFill>
         <p:spPr bwMode="auto">
           <a:xfrm>
-            <a:off x="7232917" y="2544703"/>
-            <a:ext cx="2020405" cy="2143125"/>
+            <a:off x="7128414" y="1994093"/>
+            <a:ext cx="3356706" cy="3560593"/>
           </a:xfrm>
           <a:prstGeom prst="rect">
             <a:avLst/>
@@ -5124,7 +5249,7 @@
             </a:pPr>
             <a:r>
               <a:rPr lang="ja-JP" altLang="en-US" dirty="0"/>
-              <a:t>突進</a:t>
+              <a:t>突進　（軽度の追尾）</a:t>
             </a:r>
             <a:endParaRPr lang="en-US" altLang="ja-JP" dirty="0"/>
           </a:p>
@@ -5310,7 +5435,11 @@
           <a:p>
             <a:r>
               <a:rPr kumimoji="1" lang="ja-JP" altLang="en-US" dirty="0"/>
-              <a:t>　この時間は攻撃が通り当たると必殺キャンセル　会うアニメションを探し中</a:t>
+              <a:t>　この時間は攻撃が通り当たると必殺キャンセル　</a:t>
+            </a:r>
+            <a:r>
+              <a:rPr lang="ja-JP" altLang="en-US" dirty="0"/>
+              <a:t>カメラが回転</a:t>
             </a:r>
             <a:endParaRPr kumimoji="1" lang="en-US" altLang="ja-JP" dirty="0"/>
           </a:p>
@@ -5930,7 +6059,7 @@
           <a:p>
             <a:r>
               <a:rPr lang="ja-JP" altLang="en-US" dirty="0"/>
-              <a:t>必殺技をクラスで一括管理</a:t>
+              <a:t>必殺技をクラスで一括管理　必ず踏ませる処理の作り方</a:t>
             </a:r>
             <a:endParaRPr kumimoji="1" lang="en-US" altLang="ja-JP" dirty="0"/>
           </a:p>
